--- a/pitch/risk-desk-pitch.pptx
+++ b/pitch/risk-desk-pitch.pptx
@@ -13,6 +13,7 @@
     <p:sldId id="261" r:id="rId13"/>
     <p:sldId id="262" r:id="rId14"/>
     <p:sldId id="263" r:id="rId15"/>
+    <p:sldId id="264" r:id="rId16"/>
   </p:sldIdLst>
   <p:sldSz cx="12191695" cy="6858000" type="screen4x3"/>
   <p:notesSz cx="6858000" cy="9144000"/>
@@ -929,7 +930,7 @@
           <a:lstStyle/>
           <a:p>
             <a:r>
-              <a:t>Здесь добиваем инженерные критерии: Docker, тесты, метрики, auth, документация.</a:t>
+              <a:t>Бонусный пункт кейса: график оттока. Показать, что факт и прогноз не смешаны, и честно сказать про отсутствие дат удаления.</a:t>
             </a:r>
           </a:p>
         </p:txBody>
@@ -955,6 +956,76 @@
 </file>
 
 <file path=ppt/notesSlides/notesSlide8.xml><?xml version="1.0" encoding="utf-8"?>
+<p:notes xmlns:a="http://schemas.openxmlformats.org/drawingml/2006/main" xmlns:p="http://schemas.openxmlformats.org/presentationml/2006/main" xmlns:r="http://schemas.openxmlformats.org/officeDocument/2006/relationships">
+  <p:cSld>
+    <p:spTree>
+      <p:nvGrpSpPr>
+        <p:cNvPr id="1" name=""/>
+        <p:cNvGrpSpPr/>
+        <p:nvPr/>
+      </p:nvGrpSpPr>
+      <p:grpSpPr>
+        <a:xfrm>
+          <a:off x="0" y="0"/>
+          <a:ext cx="0" cy="0"/>
+          <a:chOff x="0" y="0"/>
+          <a:chExt cx="0" cy="0"/>
+        </a:xfrm>
+      </p:grpSpPr>
+      <p:sp>
+        <p:nvSpPr>
+          <p:cNvPr id="2" name="Slide Image Placeholder 1"/>
+          <p:cNvSpPr>
+            <a:spLocks noGrp="1"/>
+          </p:cNvSpPr>
+          <p:nvPr>
+            <p:ph type="sldImg" idx="2"/>
+          </p:nvPr>
+        </p:nvSpPr>
+        <p:spPr/>
+      </p:sp>
+      <p:sp>
+        <p:nvSpPr>
+          <p:cNvPr id="3" name="Notes Placeholder 2"/>
+          <p:cNvSpPr>
+            <a:spLocks noGrp="1"/>
+          </p:cNvSpPr>
+          <p:nvPr>
+            <p:ph type="body" idx="3" sz="quarter"/>
+          </p:nvPr>
+        </p:nvSpPr>
+        <p:spPr/>
+        <p:txBody>
+          <a:bodyPr/>
+          <a:lstStyle/>
+          <a:p>
+            <a:r>
+              <a:t>Здесь добиваем инженерные критерии: Docker, тесты, метрики, auth, документация.</a:t>
+            </a:r>
+          </a:p>
+        </p:txBody>
+      </p:sp>
+      <p:sp>
+        <p:nvSpPr>
+          <p:cNvPr id="4" name="Slide Number Placeholder 3"/>
+          <p:cNvSpPr>
+            <a:spLocks noGrp="1"/>
+          </p:cNvSpPr>
+          <p:nvPr>
+            <p:ph type="sldNum" idx="5" sz="quarter"/>
+          </p:nvPr>
+        </p:nvSpPr>
+        <p:spPr/>
+      </p:sp>
+    </p:spTree>
+  </p:cSld>
+  <p:clrMapOvr>
+    <a:masterClrMapping/>
+  </p:clrMapOvr>
+</p:notes>
+</file>
+
+<file path=ppt/notesSlides/notesSlide9.xml><?xml version="1.0" encoding="utf-8"?>
 <p:notes xmlns:a="http://schemas.openxmlformats.org/drawingml/2006/main" xmlns:p="http://schemas.openxmlformats.org/presentationml/2006/main" xmlns:r="http://schemas.openxmlformats.org/officeDocument/2006/relationships">
   <p:cSld>
     <p:spTree>
@@ -5602,7 +5673,7 @@
         <p:spPr>
           <a:xfrm>
             <a:off x="5989320" y="1965960"/>
-            <a:ext cx="5349240" cy="4086225"/>
+            <a:ext cx="5349240" cy="6073616"/>
           </a:xfrm>
           <a:prstGeom prst="rect">
             <a:avLst/>
@@ -8194,7 +8265,7 @@
                 </a:solidFill>
                 <a:latin typeface="Inter"/>
               </a:rPr>
-              <a:t>ИНЖЕНЕРИЯ</a:t>
+              <a:t>ПРОГНОЗ</a:t>
             </a:r>
           </a:p>
         </p:txBody>
@@ -8236,7 +8307,7 @@
                 </a:solidFill>
                 <a:latin typeface="Exo 2"/>
               </a:rPr>
-              <a:t>Одна команда — и проверки машиной</a:t>
+              <a:t>Когда наступит отток: факт и прогноз разделены</a:t>
             </a:r>
           </a:p>
         </p:txBody>
@@ -8285,24 +8356,157 @@
           </a:p>
         </p:txBody>
       </p:sp>
-      <p:sp>
-        <p:nvSpPr>
-          <p:cNvPr id="8" name="Rounded Rectangle 7"/>
+      <p:pic>
+        <p:nvPicPr>
+          <p:cNvPr id="8" name="Picture 7" descr="12-forecast.png"/>
+          <p:cNvPicPr>
+            <a:picLocks noChangeAspect="1"/>
+          </p:cNvPicPr>
+          <p:nvPr/>
+        </p:nvPicPr>
+        <p:blipFill>
+          <a:blip r:embed="rId2"/>
+          <a:stretch>
+            <a:fillRect/>
+          </a:stretch>
+        </p:blipFill>
+        <p:spPr>
+          <a:xfrm>
+            <a:off x="822960" y="2103120"/>
+            <a:ext cx="7589520" cy="3470652"/>
+          </a:xfrm>
+          <a:prstGeom prst="rect">
+            <a:avLst/>
+          </a:prstGeom>
+          <a:ln w="12700">
+            <a:solidFill>
+              <a:srgbClr val="DDE2EA"/>
+            </a:solidFill>
+          </a:ln>
+        </p:spPr>
+      </p:pic>
+      <p:sp>
+        <p:nvSpPr>
+          <p:cNvPr id="9" name="TextBox 8"/>
+          <p:cNvSpPr txBox="1"/>
+          <p:nvPr/>
+        </p:nvSpPr>
+        <p:spPr>
+          <a:xfrm>
+            <a:off x="8732520" y="2148840"/>
+            <a:ext cx="2834640" cy="3474720"/>
+          </a:xfrm>
+          <a:prstGeom prst="rect">
+            <a:avLst/>
+          </a:prstGeom>
+          <a:noFill/>
+        </p:spPr>
+        <p:txBody>
+          <a:bodyPr wrap="square" lIns="0" rIns="0" tIns="0" bIns="0">
+            <a:spAutoFit/>
+          </a:bodyPr>
+          <a:lstStyle/>
+          <a:p>
+            <a:pPr marL="274320" indent="-274320">
+              <a:lnSpc>
+                <a:spcPct val="130000"/>
+              </a:lnSpc>
+              <a:spcAft>
+                <a:spcPts val="1200"/>
+              </a:spcAft>
+            </a:pPr>
+            <a:r>
+              <a:rPr sz="1200">
+                <a:solidFill>
+                  <a:srgbClr val="000000"/>
+                </a:solidFill>
+                <a:latin typeface="Inter"/>
+              </a:rPr>
+              <a:t>—  Слева — факт по снимку: срок истёк, услуга не продлена</a:t>
+            </a:r>
+          </a:p>
+          <a:p>
+            <a:pPr marL="274320" indent="-274320">
+              <a:lnSpc>
+                <a:spcPct val="130000"/>
+              </a:lnSpc>
+              <a:spcAft>
+                <a:spcPts val="1200"/>
+              </a:spcAft>
+            </a:pPr>
+            <a:r>
+              <a:rPr sz="1200">
+                <a:solidFill>
+                  <a:srgbClr val="000000"/>
+                </a:solidFill>
+                <a:latin typeface="Inter"/>
+              </a:rPr>
+              <a:t>—  Справа — прогноз: срок истекает, вероятность взята из score</a:t>
+            </a:r>
+          </a:p>
+          <a:p>
+            <a:pPr marL="274320" indent="-274320">
+              <a:lnSpc>
+                <a:spcPct val="130000"/>
+              </a:lnSpc>
+              <a:spcAft>
+                <a:spcPts val="1200"/>
+              </a:spcAft>
+            </a:pPr>
+            <a:r>
+              <a:rPr sz="1200">
+                <a:solidFill>
+                  <a:srgbClr val="000000"/>
+                </a:solidFill>
+                <a:latin typeface="Inter"/>
+              </a:rPr>
+              <a:t>—  Исторических удалений нет: в данных нет даты удаления — говорим прямо</a:t>
+            </a:r>
+          </a:p>
+        </p:txBody>
+      </p:sp>
+    </p:spTree>
+  </p:cSld>
+  <p:clrMapOvr>
+    <a:masterClrMapping/>
+  </p:clrMapOvr>
+</p:sld>
+</file>
+
+<file path=ppt/slides/slide8.xml><?xml version="1.0" encoding="utf-8"?>
+<p:sld xmlns:a="http://schemas.openxmlformats.org/drawingml/2006/main" xmlns:p="http://schemas.openxmlformats.org/presentationml/2006/main" xmlns:r="http://schemas.openxmlformats.org/officeDocument/2006/relationships">
+  <p:cSld>
+    <p:bg>
+      <p:bgPr>
+        <a:solidFill>
+          <a:srgbClr val="FFFFFF"/>
+        </a:solidFill>
+        <a:effectLst/>
+      </p:bgPr>
+    </p:bg>
+    <p:spTree>
+      <p:nvGrpSpPr>
+        <p:cNvPr id="1" name=""/>
+        <p:cNvGrpSpPr/>
+        <p:nvPr/>
+      </p:nvGrpSpPr>
+      <p:grpSpPr/>
+      <p:sp>
+        <p:nvSpPr>
+          <p:cNvPr id="2" name="Rectangle 1"/>
           <p:cNvSpPr/>
           <p:nvPr/>
         </p:nvSpPr>
         <p:spPr>
           <a:xfrm>
-            <a:off x="822960" y="2240280"/>
-            <a:ext cx="2395728" cy="1417320"/>
-          </a:xfrm>
-          <a:prstGeom prst="roundRect">
-            <a:avLst>
-              <a:gd name="adj" fmla="val 8000"/>
-            </a:avLst>
+            <a:off x="822960" y="6419088"/>
+            <a:ext cx="10545775" cy="9144"/>
+          </a:xfrm>
+          <a:prstGeom prst="rect">
+            <a:avLst/>
           </a:prstGeom>
           <a:solidFill>
-            <a:srgbClr val="F4F4F4"/>
+            <a:srgbClr val="DDE2EA"/>
           </a:solidFill>
           <a:ln>
             <a:noFill/>
@@ -8333,14 +8537,14 @@
       </p:sp>
       <p:sp>
         <p:nvSpPr>
-          <p:cNvPr id="9" name="TextBox 8"/>
+          <p:cNvPr id="3" name="TextBox 2"/>
           <p:cNvSpPr txBox="1"/>
           <p:nvPr/>
         </p:nvSpPr>
         <p:spPr>
           <a:xfrm>
-            <a:off x="1005840" y="2423160"/>
-            <a:ext cx="2148840" cy="365760"/>
+            <a:off x="822960" y="6492240"/>
+            <a:ext cx="5486400" cy="274320"/>
           </a:xfrm>
           <a:prstGeom prst="rect">
             <a:avLst/>
@@ -8362,27 +8566,27 @@
               </a:spcAft>
             </a:pPr>
             <a:r>
-              <a:rPr sz="2000" b="1">
-                <a:solidFill>
-                  <a:srgbClr val="000000"/>
+              <a:rPr sz="900" b="0">
+                <a:solidFill>
+                  <a:srgbClr val="182D48"/>
                 </a:solidFill>
                 <a:latin typeface="Exo 2"/>
               </a:rPr>
-              <a:t>1 команда</a:t>
-            </a:r>
-          </a:p>
-        </p:txBody>
-      </p:sp>
-      <p:sp>
-        <p:nvSpPr>
-          <p:cNvPr id="10" name="TextBox 9"/>
+              <a:t>ОТТОК · Risk Desk</a:t>
+            </a:r>
+          </a:p>
+        </p:txBody>
+      </p:sp>
+      <p:sp>
+        <p:nvSpPr>
+          <p:cNvPr id="4" name="TextBox 3"/>
           <p:cNvSpPr txBox="1"/>
           <p:nvPr/>
         </p:nvSpPr>
         <p:spPr>
           <a:xfrm>
-            <a:off x="1005840" y="2880360"/>
-            <a:ext cx="2148840" cy="685800"/>
+            <a:off x="10820095" y="6492240"/>
+            <a:ext cx="548640" cy="274320"/>
           </a:xfrm>
           <a:prstGeom prst="rect">
             <a:avLst/>
@@ -8395,6 +8599,48 @@
           </a:bodyPr>
           <a:lstStyle/>
           <a:p>
+            <a:pPr algn="r">
+              <a:lnSpc>
+                <a:spcPct val="115000"/>
+              </a:lnSpc>
+              <a:spcAft>
+                <a:spcPts val="0"/>
+              </a:spcAft>
+            </a:pPr>
+            <a:r>
+              <a:rPr sz="900" b="0">
+                <a:solidFill>
+                  <a:srgbClr val="182D48"/>
+                </a:solidFill>
+                <a:latin typeface="Exo 2"/>
+              </a:rPr>
+              <a:t>08</a:t>
+            </a:r>
+          </a:p>
+        </p:txBody>
+      </p:sp>
+      <p:sp>
+        <p:nvSpPr>
+          <p:cNvPr id="5" name="TextBox 4"/>
+          <p:cNvSpPr txBox="1"/>
+          <p:nvPr/>
+        </p:nvSpPr>
+        <p:spPr>
+          <a:xfrm>
+            <a:off x="822960" y="502920"/>
+            <a:ext cx="7315200" cy="274320"/>
+          </a:xfrm>
+          <a:prstGeom prst="rect">
+            <a:avLst/>
+          </a:prstGeom>
+          <a:noFill/>
+        </p:spPr>
+        <p:txBody>
+          <a:bodyPr wrap="square" lIns="0" rIns="0" tIns="0" bIns="0">
+            <a:spAutoFit/>
+          </a:bodyPr>
+          <a:lstStyle/>
+          <a:p>
             <a:pPr algn="l">
               <a:lnSpc>
                 <a:spcPct val="115000"/>
@@ -8404,15 +8650,38 @@
               </a:spcAft>
             </a:pPr>
             <a:r>
-              <a:rPr sz="1050" b="0">
+              <a:rPr sz="1000" b="1">
                 <a:solidFill>
                   <a:srgbClr val="182D48"/>
                 </a:solidFill>
                 <a:latin typeface="Inter"/>
               </a:rPr>
-              <a:t>docker compose up --build</a:t>
-            </a:r>
-          </a:p>
+              <a:t>ИНЖЕНЕРИЯ</a:t>
+            </a:r>
+          </a:p>
+        </p:txBody>
+      </p:sp>
+      <p:sp>
+        <p:nvSpPr>
+          <p:cNvPr id="6" name="TextBox 5"/>
+          <p:cNvSpPr txBox="1"/>
+          <p:nvPr/>
+        </p:nvSpPr>
+        <p:spPr>
+          <a:xfrm>
+            <a:off x="822960" y="868680"/>
+            <a:ext cx="10424160" cy="1005840"/>
+          </a:xfrm>
+          <a:prstGeom prst="rect">
+            <a:avLst/>
+          </a:prstGeom>
+          <a:noFill/>
+        </p:spPr>
+        <p:txBody>
+          <a:bodyPr wrap="square" lIns="0" rIns="0" tIns="0" bIns="0">
+            <a:spAutoFit/>
+          </a:bodyPr>
+          <a:lstStyle/>
           <a:p>
             <a:pPr algn="l">
               <a:lnSpc>
@@ -8423,35 +8692,33 @@
               </a:spcAft>
             </a:pPr>
             <a:r>
-              <a:rPr sz="1050" b="0">
-                <a:solidFill>
-                  <a:srgbClr val="182D48"/>
-                </a:solidFill>
-                <a:latin typeface="Inter"/>
-              </a:rPr>
-              <a:t>12 секунд до healthz</a:t>
-            </a:r>
-          </a:p>
-        </p:txBody>
-      </p:sp>
-      <p:sp>
-        <p:nvSpPr>
-          <p:cNvPr id="11" name="Rounded Rectangle 10"/>
+              <a:rPr sz="3200" b="1">
+                <a:solidFill>
+                  <a:srgbClr val="000000"/>
+                </a:solidFill>
+                <a:latin typeface="Exo 2"/>
+              </a:rPr>
+              <a:t>Одна команда — и проверки машиной</a:t>
+            </a:r>
+          </a:p>
+        </p:txBody>
+      </p:sp>
+      <p:sp>
+        <p:nvSpPr>
+          <p:cNvPr id="7" name="Rectangle 6"/>
           <p:cNvSpPr/>
           <p:nvPr/>
         </p:nvSpPr>
         <p:spPr>
           <a:xfrm>
-            <a:off x="3493008" y="2240280"/>
-            <a:ext cx="2395728" cy="1417320"/>
-          </a:xfrm>
-          <a:prstGeom prst="roundRect">
-            <a:avLst>
-              <a:gd name="adj" fmla="val 8000"/>
-            </a:avLst>
+            <a:off x="822960" y="1783080"/>
+            <a:ext cx="822960" cy="54864"/>
+          </a:xfrm>
+          <a:prstGeom prst="rect">
+            <a:avLst/>
           </a:prstGeom>
           <a:solidFill>
-            <a:srgbClr val="F4F4F4"/>
+            <a:srgbClr val="4CC6F1"/>
           </a:solidFill>
           <a:ln>
             <a:noFill/>
@@ -8482,116 +8749,13 @@
       </p:sp>
       <p:sp>
         <p:nvSpPr>
-          <p:cNvPr id="12" name="TextBox 11"/>
-          <p:cNvSpPr txBox="1"/>
-          <p:nvPr/>
-        </p:nvSpPr>
-        <p:spPr>
-          <a:xfrm>
-            <a:off x="3675887" y="2423160"/>
-            <a:ext cx="2148840" cy="365760"/>
-          </a:xfrm>
-          <a:prstGeom prst="rect">
-            <a:avLst/>
-          </a:prstGeom>
-          <a:noFill/>
-        </p:spPr>
-        <p:txBody>
-          <a:bodyPr wrap="square" lIns="0" rIns="0" tIns="0" bIns="0">
-            <a:spAutoFit/>
-          </a:bodyPr>
-          <a:lstStyle/>
-          <a:p>
-            <a:pPr algn="l">
-              <a:lnSpc>
-                <a:spcPct val="115000"/>
-              </a:lnSpc>
-              <a:spcAft>
-                <a:spcPts val="0"/>
-              </a:spcAft>
-            </a:pPr>
-            <a:r>
-              <a:rPr sz="2000" b="1">
-                <a:solidFill>
-                  <a:srgbClr val="000000"/>
-                </a:solidFill>
-                <a:latin typeface="Exo 2"/>
-              </a:rPr>
-              <a:t>422 теста</a:t>
-            </a:r>
-          </a:p>
-        </p:txBody>
-      </p:sp>
-      <p:sp>
-        <p:nvSpPr>
-          <p:cNvPr id="13" name="TextBox 12"/>
-          <p:cNvSpPr txBox="1"/>
-          <p:nvPr/>
-        </p:nvSpPr>
-        <p:spPr>
-          <a:xfrm>
-            <a:off x="3675887" y="2880360"/>
-            <a:ext cx="2148840" cy="685800"/>
-          </a:xfrm>
-          <a:prstGeom prst="rect">
-            <a:avLst/>
-          </a:prstGeom>
-          <a:noFill/>
-        </p:spPr>
-        <p:txBody>
-          <a:bodyPr wrap="square" lIns="0" rIns="0" tIns="0" bIns="0">
-            <a:spAutoFit/>
-          </a:bodyPr>
-          <a:lstStyle/>
-          <a:p>
-            <a:pPr algn="l">
-              <a:lnSpc>
-                <a:spcPct val="115000"/>
-              </a:lnSpc>
-              <a:spcAft>
-                <a:spcPts val="0"/>
-              </a:spcAft>
-            </a:pPr>
-            <a:r>
-              <a:rPr sz="1050" b="0">
-                <a:solidFill>
-                  <a:srgbClr val="182D48"/>
-                </a:solidFill>
-                <a:latin typeface="Inter"/>
-              </a:rPr>
-              <a:t>backend + генератор данных</a:t>
-            </a:r>
-          </a:p>
-          <a:p>
-            <a:pPr algn="l">
-              <a:lnSpc>
-                <a:spcPct val="115000"/>
-              </a:lnSpc>
-              <a:spcAft>
-                <a:spcPts val="0"/>
-              </a:spcAft>
-            </a:pPr>
-            <a:r>
-              <a:rPr sz="1050" b="0">
-                <a:solidFill>
-                  <a:srgbClr val="182D48"/>
-                </a:solidFill>
-                <a:latin typeface="Inter"/>
-              </a:rPr>
-              <a:t>7 e2e в браузере</a:t>
-            </a:r>
-          </a:p>
-        </p:txBody>
-      </p:sp>
-      <p:sp>
-        <p:nvSpPr>
-          <p:cNvPr id="14" name="Rounded Rectangle 13"/>
+          <p:cNvPr id="8" name="Rounded Rectangle 7"/>
           <p:cNvSpPr/>
           <p:nvPr/>
         </p:nvSpPr>
         <p:spPr>
           <a:xfrm>
-            <a:off x="6163056" y="2240280"/>
+            <a:off x="822960" y="2240280"/>
             <a:ext cx="2395728" cy="1417320"/>
           </a:xfrm>
           <a:prstGeom prst="roundRect">
@@ -8631,13 +8795,13 @@
       </p:sp>
       <p:sp>
         <p:nvSpPr>
-          <p:cNvPr id="15" name="TextBox 14"/>
+          <p:cNvPr id="9" name="TextBox 8"/>
           <p:cNvSpPr txBox="1"/>
           <p:nvPr/>
         </p:nvSpPr>
         <p:spPr>
           <a:xfrm>
-            <a:off x="6345936" y="2423160"/>
+            <a:off x="1005840" y="2423160"/>
             <a:ext cx="2148840" cy="365760"/>
           </a:xfrm>
           <a:prstGeom prst="rect">
@@ -8666,20 +8830,20 @@
                 </a:solidFill>
                 <a:latin typeface="Exo 2"/>
               </a:rPr>
-              <a:t>CI</a:t>
-            </a:r>
-          </a:p>
-        </p:txBody>
-      </p:sp>
-      <p:sp>
-        <p:nvSpPr>
-          <p:cNvPr id="16" name="TextBox 15"/>
+              <a:t>1 команда</a:t>
+            </a:r>
+          </a:p>
+        </p:txBody>
+      </p:sp>
+      <p:sp>
+        <p:nvSpPr>
+          <p:cNvPr id="10" name="TextBox 9"/>
           <p:cNvSpPr txBox="1"/>
           <p:nvPr/>
         </p:nvSpPr>
         <p:spPr>
           <a:xfrm>
-            <a:off x="6345936" y="2880360"/>
+            <a:off x="1005840" y="2880360"/>
             <a:ext cx="2148840" cy="685800"/>
           </a:xfrm>
           <a:prstGeom prst="rect">
@@ -8708,7 +8872,7 @@
                 </a:solidFill>
                 <a:latin typeface="Inter"/>
               </a:rPr>
-              <a:t>pytest, сборка, OpenAPI,</a:t>
+              <a:t>docker compose up --build</a:t>
             </a:r>
           </a:p>
           <a:p>
@@ -8727,20 +8891,20 @@
                 </a:solidFill>
                 <a:latin typeface="Inter"/>
               </a:rPr>
-              <a:t>compose и docker build</a:t>
-            </a:r>
-          </a:p>
-        </p:txBody>
-      </p:sp>
-      <p:sp>
-        <p:nvSpPr>
-          <p:cNvPr id="17" name="Rounded Rectangle 16"/>
+              <a:t>12 секунд до healthz</a:t>
+            </a:r>
+          </a:p>
+        </p:txBody>
+      </p:sp>
+      <p:sp>
+        <p:nvSpPr>
+          <p:cNvPr id="11" name="Rounded Rectangle 10"/>
           <p:cNvSpPr/>
           <p:nvPr/>
         </p:nvSpPr>
         <p:spPr>
           <a:xfrm>
-            <a:off x="8833104" y="2240280"/>
+            <a:off x="3493008" y="2240280"/>
             <a:ext cx="2395728" cy="1417320"/>
           </a:xfrm>
           <a:prstGeom prst="roundRect">
@@ -8780,6 +8944,304 @@
       </p:sp>
       <p:sp>
         <p:nvSpPr>
+          <p:cNvPr id="12" name="TextBox 11"/>
+          <p:cNvSpPr txBox="1"/>
+          <p:nvPr/>
+        </p:nvSpPr>
+        <p:spPr>
+          <a:xfrm>
+            <a:off x="3675887" y="2423160"/>
+            <a:ext cx="2148840" cy="365760"/>
+          </a:xfrm>
+          <a:prstGeom prst="rect">
+            <a:avLst/>
+          </a:prstGeom>
+          <a:noFill/>
+        </p:spPr>
+        <p:txBody>
+          <a:bodyPr wrap="square" lIns="0" rIns="0" tIns="0" bIns="0">
+            <a:spAutoFit/>
+          </a:bodyPr>
+          <a:lstStyle/>
+          <a:p>
+            <a:pPr algn="l">
+              <a:lnSpc>
+                <a:spcPct val="115000"/>
+              </a:lnSpc>
+              <a:spcAft>
+                <a:spcPts val="0"/>
+              </a:spcAft>
+            </a:pPr>
+            <a:r>
+              <a:rPr sz="2000" b="1">
+                <a:solidFill>
+                  <a:srgbClr val="000000"/>
+                </a:solidFill>
+                <a:latin typeface="Exo 2"/>
+              </a:rPr>
+              <a:t>422 теста</a:t>
+            </a:r>
+          </a:p>
+        </p:txBody>
+      </p:sp>
+      <p:sp>
+        <p:nvSpPr>
+          <p:cNvPr id="13" name="TextBox 12"/>
+          <p:cNvSpPr txBox="1"/>
+          <p:nvPr/>
+        </p:nvSpPr>
+        <p:spPr>
+          <a:xfrm>
+            <a:off x="3675887" y="2880360"/>
+            <a:ext cx="2148840" cy="685800"/>
+          </a:xfrm>
+          <a:prstGeom prst="rect">
+            <a:avLst/>
+          </a:prstGeom>
+          <a:noFill/>
+        </p:spPr>
+        <p:txBody>
+          <a:bodyPr wrap="square" lIns="0" rIns="0" tIns="0" bIns="0">
+            <a:spAutoFit/>
+          </a:bodyPr>
+          <a:lstStyle/>
+          <a:p>
+            <a:pPr algn="l">
+              <a:lnSpc>
+                <a:spcPct val="115000"/>
+              </a:lnSpc>
+              <a:spcAft>
+                <a:spcPts val="0"/>
+              </a:spcAft>
+            </a:pPr>
+            <a:r>
+              <a:rPr sz="1050" b="0">
+                <a:solidFill>
+                  <a:srgbClr val="182D48"/>
+                </a:solidFill>
+                <a:latin typeface="Inter"/>
+              </a:rPr>
+              <a:t>backend + генератор данных</a:t>
+            </a:r>
+          </a:p>
+          <a:p>
+            <a:pPr algn="l">
+              <a:lnSpc>
+                <a:spcPct val="115000"/>
+              </a:lnSpc>
+              <a:spcAft>
+                <a:spcPts val="0"/>
+              </a:spcAft>
+            </a:pPr>
+            <a:r>
+              <a:rPr sz="1050" b="0">
+                <a:solidFill>
+                  <a:srgbClr val="182D48"/>
+                </a:solidFill>
+                <a:latin typeface="Inter"/>
+              </a:rPr>
+              <a:t>7 e2e в браузере</a:t>
+            </a:r>
+          </a:p>
+        </p:txBody>
+      </p:sp>
+      <p:sp>
+        <p:nvSpPr>
+          <p:cNvPr id="14" name="Rounded Rectangle 13"/>
+          <p:cNvSpPr/>
+          <p:nvPr/>
+        </p:nvSpPr>
+        <p:spPr>
+          <a:xfrm>
+            <a:off x="6163056" y="2240280"/>
+            <a:ext cx="2395728" cy="1417320"/>
+          </a:xfrm>
+          <a:prstGeom prst="roundRect">
+            <a:avLst>
+              <a:gd name="adj" fmla="val 8000"/>
+            </a:avLst>
+          </a:prstGeom>
+          <a:solidFill>
+            <a:srgbClr val="F4F4F4"/>
+          </a:solidFill>
+          <a:ln>
+            <a:noFill/>
+          </a:ln>
+          <a:effectLst/>
+        </p:spPr>
+        <p:style>
+          <a:lnRef idx="1">
+            <a:schemeClr val="accent1"/>
+          </a:lnRef>
+          <a:fillRef idx="3">
+            <a:schemeClr val="accent1"/>
+          </a:fillRef>
+          <a:effectRef idx="2">
+            <a:schemeClr val="accent1"/>
+          </a:effectRef>
+          <a:fontRef idx="minor">
+            <a:schemeClr val="lt1"/>
+          </a:fontRef>
+        </p:style>
+        <p:txBody>
+          <a:bodyPr rtlCol="0" anchor="ctr"/>
+          <a:lstStyle/>
+          <a:p>
+            <a:pPr algn="ctr"/>
+          </a:p>
+        </p:txBody>
+      </p:sp>
+      <p:sp>
+        <p:nvSpPr>
+          <p:cNvPr id="15" name="TextBox 14"/>
+          <p:cNvSpPr txBox="1"/>
+          <p:nvPr/>
+        </p:nvSpPr>
+        <p:spPr>
+          <a:xfrm>
+            <a:off x="6345936" y="2423160"/>
+            <a:ext cx="2148840" cy="365760"/>
+          </a:xfrm>
+          <a:prstGeom prst="rect">
+            <a:avLst/>
+          </a:prstGeom>
+          <a:noFill/>
+        </p:spPr>
+        <p:txBody>
+          <a:bodyPr wrap="square" lIns="0" rIns="0" tIns="0" bIns="0">
+            <a:spAutoFit/>
+          </a:bodyPr>
+          <a:lstStyle/>
+          <a:p>
+            <a:pPr algn="l">
+              <a:lnSpc>
+                <a:spcPct val="115000"/>
+              </a:lnSpc>
+              <a:spcAft>
+                <a:spcPts val="0"/>
+              </a:spcAft>
+            </a:pPr>
+            <a:r>
+              <a:rPr sz="2000" b="1">
+                <a:solidFill>
+                  <a:srgbClr val="000000"/>
+                </a:solidFill>
+                <a:latin typeface="Exo 2"/>
+              </a:rPr>
+              <a:t>CI</a:t>
+            </a:r>
+          </a:p>
+        </p:txBody>
+      </p:sp>
+      <p:sp>
+        <p:nvSpPr>
+          <p:cNvPr id="16" name="TextBox 15"/>
+          <p:cNvSpPr txBox="1"/>
+          <p:nvPr/>
+        </p:nvSpPr>
+        <p:spPr>
+          <a:xfrm>
+            <a:off x="6345936" y="2880360"/>
+            <a:ext cx="2148840" cy="685800"/>
+          </a:xfrm>
+          <a:prstGeom prst="rect">
+            <a:avLst/>
+          </a:prstGeom>
+          <a:noFill/>
+        </p:spPr>
+        <p:txBody>
+          <a:bodyPr wrap="square" lIns="0" rIns="0" tIns="0" bIns="0">
+            <a:spAutoFit/>
+          </a:bodyPr>
+          <a:lstStyle/>
+          <a:p>
+            <a:pPr algn="l">
+              <a:lnSpc>
+                <a:spcPct val="115000"/>
+              </a:lnSpc>
+              <a:spcAft>
+                <a:spcPts val="0"/>
+              </a:spcAft>
+            </a:pPr>
+            <a:r>
+              <a:rPr sz="1050" b="0">
+                <a:solidFill>
+                  <a:srgbClr val="182D48"/>
+                </a:solidFill>
+                <a:latin typeface="Inter"/>
+              </a:rPr>
+              <a:t>pytest, сборка, OpenAPI,</a:t>
+            </a:r>
+          </a:p>
+          <a:p>
+            <a:pPr algn="l">
+              <a:lnSpc>
+                <a:spcPct val="115000"/>
+              </a:lnSpc>
+              <a:spcAft>
+                <a:spcPts val="0"/>
+              </a:spcAft>
+            </a:pPr>
+            <a:r>
+              <a:rPr sz="1050" b="0">
+                <a:solidFill>
+                  <a:srgbClr val="182D48"/>
+                </a:solidFill>
+                <a:latin typeface="Inter"/>
+              </a:rPr>
+              <a:t>compose и docker build</a:t>
+            </a:r>
+          </a:p>
+        </p:txBody>
+      </p:sp>
+      <p:sp>
+        <p:nvSpPr>
+          <p:cNvPr id="17" name="Rounded Rectangle 16"/>
+          <p:cNvSpPr/>
+          <p:nvPr/>
+        </p:nvSpPr>
+        <p:spPr>
+          <a:xfrm>
+            <a:off x="8833104" y="2240280"/>
+            <a:ext cx="2395728" cy="1417320"/>
+          </a:xfrm>
+          <a:prstGeom prst="roundRect">
+            <a:avLst>
+              <a:gd name="adj" fmla="val 8000"/>
+            </a:avLst>
+          </a:prstGeom>
+          <a:solidFill>
+            <a:srgbClr val="F4F4F4"/>
+          </a:solidFill>
+          <a:ln>
+            <a:noFill/>
+          </a:ln>
+          <a:effectLst/>
+        </p:spPr>
+        <p:style>
+          <a:lnRef idx="1">
+            <a:schemeClr val="accent1"/>
+          </a:lnRef>
+          <a:fillRef idx="3">
+            <a:schemeClr val="accent1"/>
+          </a:fillRef>
+          <a:effectRef idx="2">
+            <a:schemeClr val="accent1"/>
+          </a:effectRef>
+          <a:fontRef idx="minor">
+            <a:schemeClr val="lt1"/>
+          </a:fontRef>
+        </p:style>
+        <p:txBody>
+          <a:bodyPr rtlCol="0" anchor="ctr"/>
+          <a:lstStyle/>
+          <a:p>
+            <a:pPr algn="ctr"/>
+          </a:p>
+        </p:txBody>
+      </p:sp>
+      <p:sp>
+        <p:nvSpPr>
           <p:cNvPr id="18" name="TextBox 17"/>
           <p:cNvSpPr txBox="1"/>
           <p:nvPr/>
@@ -8998,7 +9460,7 @@
 </p:sld>
 </file>
 
-<file path=ppt/slides/slide8.xml><?xml version="1.0" encoding="utf-8"?>
+<file path=ppt/slides/slide9.xml><?xml version="1.0" encoding="utf-8"?>
 <p:sld xmlns:a="http://schemas.openxmlformats.org/drawingml/2006/main" xmlns:p="http://schemas.openxmlformats.org/presentationml/2006/main" xmlns:r="http://schemas.openxmlformats.org/officeDocument/2006/relationships">
   <p:cSld>
     <p:bg>
@@ -9139,7 +9601,7 @@
                 </a:solidFill>
                 <a:latin typeface="Exo 2"/>
               </a:rPr>
-              <a:t>08</a:t>
+              <a:t>09</a:t>
             </a:r>
           </a:p>
         </p:txBody>

--- a/pitch/risk-desk-pitch.pptx
+++ b/pitch/risk-desk-pitch.pptx
@@ -9352,7 +9352,7 @@
         <p:spPr>
           <a:xfrm>
             <a:off x="822960" y="3977639"/>
-            <a:ext cx="5852160" cy="2011680"/>
+            <a:ext cx="5852160" cy="2103120"/>
           </a:xfrm>
           <a:prstGeom prst="rect">
             <a:avLst/>
@@ -9380,6 +9380,25 @@
                 </a:solidFill>
                 <a:latin typeface="Inter"/>
               </a:rPr>
+              <a:t>—  10 000 клиентов: пересчёт 3,1 с, список p95 24 мс</a:t>
+            </a:r>
+          </a:p>
+          <a:p>
+            <a:pPr marL="274320" indent="-274320">
+              <a:lnSpc>
+                <a:spcPct val="130000"/>
+              </a:lnSpc>
+              <a:spcAft>
+                <a:spcPts val="1000"/>
+              </a:spcAft>
+            </a:pPr>
+            <a:r>
+              <a:rPr sz="1400">
+                <a:solidFill>
+                  <a:srgbClr val="000000"/>
+                </a:solidFill>
+                <a:latin typeface="Inter"/>
+              </a:rPr>
               <a:t>—  Prometheus /metrics и Swagger /api/v1/docs</a:t>
             </a:r>
           </a:p>
@@ -9400,25 +9419,6 @@
                 <a:latin typeface="Inter"/>
               </a:rPr>
               <a:t>—  Настройки и снимок переживают перезапуск</a:t>
-            </a:r>
-          </a:p>
-          <a:p>
-            <a:pPr marL="274320" indent="-274320">
-              <a:lnSpc>
-                <a:spcPct val="130000"/>
-              </a:lnSpc>
-              <a:spcAft>
-                <a:spcPts val="1000"/>
-              </a:spcAft>
-            </a:pPr>
-            <a:r>
-              <a:rPr sz="1400">
-                <a:solidFill>
-                  <a:srgbClr val="000000"/>
-                </a:solidFill>
-                <a:latin typeface="Inter"/>
-              </a:rPr>
-              <a:t>—  Изменения атомарны: ошибка не оставляет полу-состояния</a:t>
             </a:r>
           </a:p>
         </p:txBody>

--- a/pitch/risk-desk-pitch.pptx
+++ b/pitch/risk-desk-pitch.pptx
@@ -5673,7 +5673,7 @@
         <p:spPr>
           <a:xfrm>
             <a:off x="5989320" y="1965960"/>
-            <a:ext cx="5349240" cy="6073616"/>
+            <a:ext cx="5349240" cy="6270498"/>
           </a:xfrm>
           <a:prstGeom prst="rect">
             <a:avLst/>
@@ -8373,7 +8373,7 @@
         <p:spPr>
           <a:xfrm>
             <a:off x="822960" y="2103120"/>
-            <a:ext cx="7589520" cy="3470652"/>
+            <a:ext cx="7589520" cy="3828521"/>
           </a:xfrm>
           <a:prstGeom prst="rect">
             <a:avLst/>

--- a/pitch/risk-desk-pitch.pptx
+++ b/pitch/risk-desk-pitch.pptx
@@ -4377,7 +4377,7 @@
                 </a:solidFill>
                 <a:latin typeface="Inter"/>
               </a:rPr>
-              <a:t>FastAPI · React · SQLite · один Docker-образ · 422 теста · CI</a:t>
+              <a:t>FastAPI · React · SQLite · один Docker-образ · 441 тест · CI</a:t>
             </a:r>
           </a:p>
         </p:txBody>
@@ -8979,7 +8979,7 @@
                 </a:solidFill>
                 <a:latin typeface="Exo 2"/>
               </a:rPr>
-              <a:t>422 теста</a:t>
+              <a:t>441 тест</a:t>
             </a:r>
           </a:p>
         </p:txBody>
@@ -9040,7 +9040,7 @@
                 </a:solidFill>
                 <a:latin typeface="Inter"/>
               </a:rPr>
-              <a:t>7 e2e в браузере</a:t>
+              <a:t>9 e2e в браузере</a:t>
             </a:r>
           </a:p>
         </p:txBody>

--- a/pitch/risk-desk-pitch.pptx
+++ b/pitch/risk-desk-pitch.pptx
@@ -6004,7 +6004,7 @@
                 </a:solidFill>
                 <a:latin typeface="Inter"/>
               </a:rPr>
-              <a:t>ШЕСТЬ ПРИЗНАКОВ И ВЕСА (МЕНЯЮТСЯ В ПАНЕЛИ)</a:t>
+              <a:t>СЕМЬ ПРИЗНАКОВ И ВЕСА (МЕНЯЮТСЯ В ПАНЕЛИ)</a:t>
             </a:r>
           </a:p>
         </p:txBody>
@@ -6785,8 +6785,8 @@
         </p:nvSpPr>
         <p:spPr>
           <a:xfrm>
-            <a:off x="822960" y="4160520"/>
-            <a:ext cx="5669280" cy="822960"/>
+            <a:off x="822960" y="4114800"/>
+            <a:ext cx="5669280" cy="365760"/>
           </a:xfrm>
           <a:prstGeom prst="rect">
             <a:avLst/>
@@ -6808,12 +6808,54 @@
               </a:spcAft>
             </a:pPr>
             <a:r>
-              <a:rPr sz="1200" b="0">
+              <a:rPr sz="1050" b="0">
                 <a:solidFill>
                   <a:srgbClr val="182D48"/>
                 </a:solidFill>
                 <a:latin typeface="Inter"/>
               </a:rPr>
+              <a:t>+ новый признак: доля услуг без автопродления, вес 0,00 — прежние оценки не меняются</a:t>
+            </a:r>
+          </a:p>
+        </p:txBody>
+      </p:sp>
+      <p:sp>
+        <p:nvSpPr>
+          <p:cNvPr id="28" name="TextBox 27"/>
+          <p:cNvSpPr txBox="1"/>
+          <p:nvPr/>
+        </p:nvSpPr>
+        <p:spPr>
+          <a:xfrm>
+            <a:off x="822960" y="4526280"/>
+            <a:ext cx="5669280" cy="822960"/>
+          </a:xfrm>
+          <a:prstGeom prst="rect">
+            <a:avLst/>
+          </a:prstGeom>
+          <a:noFill/>
+        </p:spPr>
+        <p:txBody>
+          <a:bodyPr wrap="square" lIns="0" rIns="0" tIns="0" bIns="0">
+            <a:spAutoFit/>
+          </a:bodyPr>
+          <a:lstStyle/>
+          <a:p>
+            <a:pPr algn="l">
+              <a:lnSpc>
+                <a:spcPct val="115000"/>
+              </a:lnSpc>
+              <a:spcAft>
+                <a:spcPts val="0"/>
+              </a:spcAft>
+            </a:pPr>
+            <a:r>
+              <a:rPr sz="1100" b="0">
+                <a:solidFill>
+                  <a:srgbClr val="182D48"/>
+                </a:solidFill>
+                <a:latin typeface="Inter"/>
+              </a:rPr>
               <a:t>Score 0–100 · уровни 40/70 · prolong_wait и устаревшие статусы</a:t>
             </a:r>
           </a:p>
@@ -6827,7 +6869,7 @@
               </a:spcAft>
             </a:pPr>
             <a:r>
-              <a:rPr sz="1200" b="0">
+              <a:rPr sz="1100" b="0">
                 <a:solidFill>
                   <a:srgbClr val="182D48"/>
                 </a:solidFill>
@@ -6840,7 +6882,7 @@
       </p:sp>
       <p:sp>
         <p:nvSpPr>
-          <p:cNvPr id="28" name="Rounded Rectangle 27"/>
+          <p:cNvPr id="29" name="Rounded Rectangle 28"/>
           <p:cNvSpPr/>
           <p:nvPr/>
         </p:nvSpPr>
@@ -6886,7 +6928,7 @@
       </p:sp>
       <p:sp>
         <p:nvSpPr>
-          <p:cNvPr id="29" name="TextBox 28"/>
+          <p:cNvPr id="30" name="TextBox 29"/>
           <p:cNvSpPr txBox="1"/>
           <p:nvPr/>
         </p:nvSpPr>
@@ -6928,7 +6970,7 @@
       </p:sp>
       <p:sp>
         <p:nvSpPr>
-          <p:cNvPr id="30" name="TextBox 29"/>
+          <p:cNvPr id="31" name="TextBox 30"/>
           <p:cNvSpPr txBox="1"/>
           <p:nvPr/>
         </p:nvSpPr>
@@ -6970,7 +7012,7 @@
       </p:sp>
       <p:sp>
         <p:nvSpPr>
-          <p:cNvPr id="31" name="TextBox 30"/>
+          <p:cNvPr id="32" name="TextBox 31"/>
           <p:cNvSpPr txBox="1"/>
           <p:nvPr/>
         </p:nvSpPr>

--- a/pitch/risk-desk-pitch.pptx
+++ b/pitch/risk-desk-pitch.pptx
@@ -8075,7 +8075,7 @@
         <p:spPr>
           <a:xfrm>
             <a:off x="5074920" y="1783080"/>
-            <a:ext cx="3017520" cy="3367468"/>
+            <a:ext cx="3017520" cy="3396806"/>
           </a:xfrm>
           <a:prstGeom prst="rect">
             <a:avLst/>

--- a/pitch/risk-desk-pitch.pptx
+++ b/pitch/risk-desk-pitch.pptx
@@ -4,19 +4,17 @@
   <p:sldMasterIdLst>
     <p:sldMasterId id="2147483648" r:id="rId1"/>
   </p:sldMasterIdLst>
-  <p:notesMasterIdLst>
-    <p:notesMasterId r:id="rId9"/>
-  </p:notesMasterIdLst>
   <p:sldIdLst>
-    <p:sldId id="256" r:id="rId2"/>
-    <p:sldId id="257" r:id="rId3"/>
-    <p:sldId id="258" r:id="rId4"/>
-    <p:sldId id="259" r:id="rId5"/>
-    <p:sldId id="260" r:id="rId6"/>
-    <p:sldId id="261" r:id="rId7"/>
-    <p:sldId id="262" r:id="rId8"/>
+    <p:sldId id="256" r:id="rId7"/>
+    <p:sldId id="257" r:id="rId9"/>
+    <p:sldId id="258" r:id="rId10"/>
+    <p:sldId id="259" r:id="rId11"/>
+    <p:sldId id="260" r:id="rId12"/>
+    <p:sldId id="261" r:id="rId13"/>
+    <p:sldId id="262" r:id="rId14"/>
+    <p:sldId id="263" r:id="rId15"/>
   </p:sldIdLst>
-  <p:sldSz cx="12192000" cy="6858000"/>
+  <p:sldSz cx="12191695" cy="6858000" type="screen4x3"/>
   <p:notesSz cx="6858000" cy="9144000"/>
   <p:defaultTextStyle>
     <a:defPPr>
@@ -113,27 +111,11 @@
       </a:defRPr>
     </a:lvl9pPr>
   </p:defaultTextStyle>
-  <p:extLst>
-    <p:ext uri="{EFAFB233-063F-42B5-8137-9DF3F51BA10A}">
-      <p15:sldGuideLst xmlns:p15="http://schemas.microsoft.com/office/powerpoint/2012/main">
-        <p15:guide id="1" orient="horz" pos="2160">
-          <p15:clr>
-            <a:srgbClr val="A4A3A4"/>
-          </p15:clr>
-        </p15:guide>
-        <p15:guide id="2" pos="2880">
-          <p15:clr>
-            <a:srgbClr val="A4A3A4"/>
-          </p15:clr>
-        </p15:guide>
-      </p15:sldGuideLst>
-    </p:ext>
-  </p:extLst>
 </p:presentation>
 </file>
 
 <file path=ppt/notesMasters/notesMaster1.xml><?xml version="1.0" encoding="utf-8"?>
-<p:notesMaster xmlns:a="http://schemas.openxmlformats.org/drawingml/2006/main" xmlns:r="http://schemas.openxmlformats.org/officeDocument/2006/relationships" xmlns:p="http://schemas.openxmlformats.org/presentationml/2006/main">
+<p:notesMaster xmlns:a="http://schemas.openxmlformats.org/drawingml/2006/main" xmlns:p="http://schemas.openxmlformats.org/presentationml/2006/main" xmlns:r="http://schemas.openxmlformats.org/officeDocument/2006/relationships">
   <p:cSld>
     <p:bg>
       <p:bgRef idx="1001">
@@ -154,16 +136,241 @@
           <a:chExt cx="0" cy="0"/>
         </a:xfrm>
       </p:grpSpPr>
+      <p:sp>
+        <p:nvSpPr>
+          <p:cNvPr id="2" name="Header Placeholder 1"/>
+          <p:cNvSpPr>
+            <a:spLocks noGrp="1"/>
+          </p:cNvSpPr>
+          <p:nvPr>
+            <p:ph type="hdr" sz="quarter"/>
+          </p:nvPr>
+        </p:nvSpPr>
+        <p:spPr>
+          <a:xfrm>
+            <a:off x="0" y="0"/>
+            <a:ext cx="2971800" cy="457200"/>
+          </a:xfrm>
+          <a:prstGeom prst="rect">
+            <a:avLst/>
+          </a:prstGeom>
+        </p:spPr>
+        <p:txBody>
+          <a:bodyPr vert="horz" lIns="91440" tIns="45720" rIns="91440" bIns="45720" rtlCol="0"/>
+          <a:lstStyle>
+            <a:lvl1pPr algn="l">
+              <a:defRPr sz="1200"/>
+            </a:lvl1pPr>
+          </a:lstStyle>
+          <a:p>
+            <a:endParaRPr lang="en-US"/>
+          </a:p>
+        </p:txBody>
+      </p:sp>
+      <p:sp>
+        <p:nvSpPr>
+          <p:cNvPr id="3" name="Date Placeholder 2"/>
+          <p:cNvSpPr>
+            <a:spLocks noGrp="1"/>
+          </p:cNvSpPr>
+          <p:nvPr>
+            <p:ph type="dt" idx="1"/>
+          </p:nvPr>
+        </p:nvSpPr>
+        <p:spPr>
+          <a:xfrm>
+            <a:off x="3884613" y="0"/>
+            <a:ext cx="2971800" cy="457200"/>
+          </a:xfrm>
+          <a:prstGeom prst="rect">
+            <a:avLst/>
+          </a:prstGeom>
+        </p:spPr>
+        <p:txBody>
+          <a:bodyPr vert="horz" lIns="91440" tIns="45720" rIns="91440" bIns="45720" rtlCol="0"/>
+          <a:lstStyle>
+            <a:lvl1pPr algn="r">
+              <a:defRPr sz="1200"/>
+            </a:lvl1pPr>
+          </a:lstStyle>
+          <a:p>
+            <a:fld id="{0F89C1C7-3DCD-1040-A9CF-14679D8B5DDD}" type="datetimeFigureOut">
+              <a:rPr lang="en-US" smtClean="0"/>
+              <a:t>10/17/16</a:t>
+            </a:fld>
+            <a:endParaRPr lang="en-US"/>
+          </a:p>
+        </p:txBody>
+      </p:sp>
+      <p:sp>
+        <p:nvSpPr>
+          <p:cNvPr id="4" name="Slide Image Placeholder 3"/>
+          <p:cNvSpPr>
+            <a:spLocks noGrp="1" noRot="1" noChangeAspect="1"/>
+          </p:cNvSpPr>
+          <p:nvPr>
+            <p:ph type="sldImg" idx="2"/>
+          </p:nvPr>
+        </p:nvSpPr>
+        <p:spPr>
+          <a:xfrm>
+            <a:off x="1143000" y="685800"/>
+            <a:ext cx="4572000" cy="3429000"/>
+          </a:xfrm>
+          <a:prstGeom prst="rect">
+            <a:avLst/>
+          </a:prstGeom>
+          <a:noFill/>
+          <a:ln w="12700">
+            <a:solidFill>
+              <a:prstClr val="black"/>
+            </a:solidFill>
+          </a:ln>
+        </p:spPr>
+        <p:txBody>
+          <a:bodyPr vert="horz" lIns="91440" tIns="45720" rIns="91440" bIns="45720" rtlCol="0" anchor="ctr"/>
+          <a:lstStyle/>
+          <a:p>
+            <a:endParaRPr lang="en-US"/>
+          </a:p>
+        </p:txBody>
+      </p:sp>
+      <p:sp>
+        <p:nvSpPr>
+          <p:cNvPr id="5" name="Notes Placeholder 4"/>
+          <p:cNvSpPr>
+            <a:spLocks noGrp="1"/>
+          </p:cNvSpPr>
+          <p:nvPr>
+            <p:ph type="body" sz="quarter" idx="3"/>
+          </p:nvPr>
+        </p:nvSpPr>
+        <p:spPr>
+          <a:xfrm>
+            <a:off x="685800" y="4343400"/>
+            <a:ext cx="5486400" cy="4114800"/>
+          </a:xfrm>
+          <a:prstGeom prst="rect">
+            <a:avLst/>
+          </a:prstGeom>
+        </p:spPr>
+        <p:txBody>
+          <a:bodyPr vert="horz" lIns="91440" tIns="45720" rIns="91440" bIns="45720" rtlCol="0"/>
+          <a:lstStyle/>
+          <a:p>
+            <a:pPr lvl="0"/>
+            <a:r>
+              <a:rPr lang="en-US" smtClean="0"/>
+              <a:t>Click to edit Master text styles</a:t>
+            </a:r>
+          </a:p>
+          <a:p>
+            <a:pPr lvl="1"/>
+            <a:r>
+              <a:rPr lang="en-US" smtClean="0"/>
+              <a:t>Second level</a:t>
+            </a:r>
+          </a:p>
+          <a:p>
+            <a:pPr lvl="2"/>
+            <a:r>
+              <a:rPr lang="en-US" smtClean="0"/>
+              <a:t>Third level</a:t>
+            </a:r>
+          </a:p>
+          <a:p>
+            <a:pPr lvl="3"/>
+            <a:r>
+              <a:rPr lang="en-US" smtClean="0"/>
+              <a:t>Fourth level</a:t>
+            </a:r>
+          </a:p>
+          <a:p>
+            <a:pPr lvl="4"/>
+            <a:r>
+              <a:rPr lang="en-US" smtClean="0"/>
+              <a:t>Fifth level</a:t>
+            </a:r>
+            <a:endParaRPr lang="en-US"/>
+          </a:p>
+        </p:txBody>
+      </p:sp>
+      <p:sp>
+        <p:nvSpPr>
+          <p:cNvPr id="6" name="Footer Placeholder 5"/>
+          <p:cNvSpPr>
+            <a:spLocks noGrp="1"/>
+          </p:cNvSpPr>
+          <p:nvPr>
+            <p:ph type="ftr" sz="quarter" idx="4"/>
+          </p:nvPr>
+        </p:nvSpPr>
+        <p:spPr>
+          <a:xfrm>
+            <a:off x="0" y="8685213"/>
+            <a:ext cx="2971800" cy="457200"/>
+          </a:xfrm>
+          <a:prstGeom prst="rect">
+            <a:avLst/>
+          </a:prstGeom>
+        </p:spPr>
+        <p:txBody>
+          <a:bodyPr vert="horz" lIns="91440" tIns="45720" rIns="91440" bIns="45720" rtlCol="0" anchor="b"/>
+          <a:lstStyle>
+            <a:lvl1pPr algn="l">
+              <a:defRPr sz="1200"/>
+            </a:lvl1pPr>
+          </a:lstStyle>
+          <a:p>
+            <a:endParaRPr lang="en-US"/>
+          </a:p>
+        </p:txBody>
+      </p:sp>
+      <p:sp>
+        <p:nvSpPr>
+          <p:cNvPr id="7" name="Slide Number Placeholder 6"/>
+          <p:cNvSpPr>
+            <a:spLocks noGrp="1"/>
+          </p:cNvSpPr>
+          <p:nvPr>
+            <p:ph type="sldNum" sz="quarter" idx="5"/>
+          </p:nvPr>
+        </p:nvSpPr>
+        <p:spPr>
+          <a:xfrm>
+            <a:off x="3884613" y="8685213"/>
+            <a:ext cx="2971800" cy="457200"/>
+          </a:xfrm>
+          <a:prstGeom prst="rect">
+            <a:avLst/>
+          </a:prstGeom>
+        </p:spPr>
+        <p:txBody>
+          <a:bodyPr vert="horz" lIns="91440" tIns="45720" rIns="91440" bIns="45720" rtlCol="0" anchor="b"/>
+          <a:lstStyle>
+            <a:lvl1pPr algn="r">
+              <a:defRPr sz="1200"/>
+            </a:lvl1pPr>
+          </a:lstStyle>
+          <a:p>
+            <a:fld id="{BB5E49A5-4136-284D-997B-48E1D791AD67}" type="slidenum">
+              <a:rPr lang="en-US" smtClean="0"/>
+              <a:t>‹#›</a:t>
+            </a:fld>
+            <a:endParaRPr lang="en-US"/>
+          </a:p>
+        </p:txBody>
+      </p:sp>
     </p:spTree>
     <p:extLst>
       <p:ext uri="{BB962C8B-B14F-4D97-AF65-F5344CB8AC3E}">
-        <p14:creationId xmlns:p14="http://schemas.microsoft.com/office/powerpoint/2010/main" val="3385720562"/>
+        <p14:creationId xmlns:p14="http://schemas.microsoft.com/office/powerpoint/2010/main" val="2623252185"/>
       </p:ext>
     </p:extLst>
   </p:cSld>
   <p:clrMap bg1="lt1" tx1="dk1" bg2="lt2" tx2="dk2" accent1="accent1" accent2="accent2" accent3="accent3" accent4="accent4" accent5="accent5" accent6="accent6" hlink="hlink" folHlink="folHlink"/>
   <p:notesStyle>
-    <a:lvl1pPr marL="0" algn="l" defTabSz="914400" rtl="0" eaLnBrk="1" latinLnBrk="0" hangingPunct="1">
+    <a:lvl1pPr marL="0" algn="l" defTabSz="457200" rtl="0" eaLnBrk="1" latinLnBrk="0" hangingPunct="1">
       <a:defRPr sz="1200" kern="1200">
         <a:solidFill>
           <a:schemeClr val="tx1"/>
@@ -173,7 +380,7 @@
         <a:cs typeface="+mn-cs"/>
       </a:defRPr>
     </a:lvl1pPr>
-    <a:lvl2pPr marL="457200" algn="l" defTabSz="914400" rtl="0" eaLnBrk="1" latinLnBrk="0" hangingPunct="1">
+    <a:lvl2pPr marL="457200" algn="l" defTabSz="457200" rtl="0" eaLnBrk="1" latinLnBrk="0" hangingPunct="1">
       <a:defRPr sz="1200" kern="1200">
         <a:solidFill>
           <a:schemeClr val="tx1"/>
@@ -183,7 +390,7 @@
         <a:cs typeface="+mn-cs"/>
       </a:defRPr>
     </a:lvl2pPr>
-    <a:lvl3pPr marL="914400" algn="l" defTabSz="914400" rtl="0" eaLnBrk="1" latinLnBrk="0" hangingPunct="1">
+    <a:lvl3pPr marL="914400" algn="l" defTabSz="457200" rtl="0" eaLnBrk="1" latinLnBrk="0" hangingPunct="1">
       <a:defRPr sz="1200" kern="1200">
         <a:solidFill>
           <a:schemeClr val="tx1"/>
@@ -193,7 +400,7 @@
         <a:cs typeface="+mn-cs"/>
       </a:defRPr>
     </a:lvl3pPr>
-    <a:lvl4pPr marL="1371600" algn="l" defTabSz="914400" rtl="0" eaLnBrk="1" latinLnBrk="0" hangingPunct="1">
+    <a:lvl4pPr marL="1371600" algn="l" defTabSz="457200" rtl="0" eaLnBrk="1" latinLnBrk="0" hangingPunct="1">
       <a:defRPr sz="1200" kern="1200">
         <a:solidFill>
           <a:schemeClr val="tx1"/>
@@ -203,7 +410,7 @@
         <a:cs typeface="+mn-cs"/>
       </a:defRPr>
     </a:lvl4pPr>
-    <a:lvl5pPr marL="1828800" algn="l" defTabSz="914400" rtl="0" eaLnBrk="1" latinLnBrk="0" hangingPunct="1">
+    <a:lvl5pPr marL="1828800" algn="l" defTabSz="457200" rtl="0" eaLnBrk="1" latinLnBrk="0" hangingPunct="1">
       <a:defRPr sz="1200" kern="1200">
         <a:solidFill>
           <a:schemeClr val="tx1"/>
@@ -213,7 +420,7 @@
         <a:cs typeface="+mn-cs"/>
       </a:defRPr>
     </a:lvl5pPr>
-    <a:lvl6pPr marL="2286000" algn="l" defTabSz="914400" rtl="0" eaLnBrk="1" latinLnBrk="0" hangingPunct="1">
+    <a:lvl6pPr marL="2286000" algn="l" defTabSz="457200" rtl="0" eaLnBrk="1" latinLnBrk="0" hangingPunct="1">
       <a:defRPr sz="1200" kern="1200">
         <a:solidFill>
           <a:schemeClr val="tx1"/>
@@ -223,7 +430,7 @@
         <a:cs typeface="+mn-cs"/>
       </a:defRPr>
     </a:lvl6pPr>
-    <a:lvl7pPr marL="2743200" algn="l" defTabSz="914400" rtl="0" eaLnBrk="1" latinLnBrk="0" hangingPunct="1">
+    <a:lvl7pPr marL="2743200" algn="l" defTabSz="457200" rtl="0" eaLnBrk="1" latinLnBrk="0" hangingPunct="1">
       <a:defRPr sz="1200" kern="1200">
         <a:solidFill>
           <a:schemeClr val="tx1"/>
@@ -233,7 +440,7 @@
         <a:cs typeface="+mn-cs"/>
       </a:defRPr>
     </a:lvl7pPr>
-    <a:lvl8pPr marL="3200400" algn="l" defTabSz="914400" rtl="0" eaLnBrk="1" latinLnBrk="0" hangingPunct="1">
+    <a:lvl8pPr marL="3200400" algn="l" defTabSz="457200" rtl="0" eaLnBrk="1" latinLnBrk="0" hangingPunct="1">
       <a:defRPr sz="1200" kern="1200">
         <a:solidFill>
           <a:schemeClr val="tx1"/>
@@ -243,7 +450,7 @@
         <a:cs typeface="+mn-cs"/>
       </a:defRPr>
     </a:lvl8pPr>
-    <a:lvl9pPr marL="3657600" algn="l" defTabSz="914400" rtl="0" eaLnBrk="1" latinLnBrk="0" hangingPunct="1">
+    <a:lvl9pPr marL="3657600" algn="l" defTabSz="457200" rtl="0" eaLnBrk="1" latinLnBrk="0" hangingPunct="1">
       <a:defRPr sz="1200" kern="1200">
         <a:solidFill>
           <a:schemeClr val="tx1"/>
@@ -258,7 +465,7 @@
 </file>
 
 <file path=ppt/notesSlides/notesSlide1.xml><?xml version="1.0" encoding="utf-8"?>
-<p:notes xmlns:a="http://schemas.openxmlformats.org/drawingml/2006/main" xmlns:r="http://schemas.openxmlformats.org/officeDocument/2006/relationships" xmlns:p="http://schemas.openxmlformats.org/presentationml/2006/main">
+<p:notes xmlns:a="http://schemas.openxmlformats.org/drawingml/2006/main" xmlns:p="http://schemas.openxmlformats.org/presentationml/2006/main" xmlns:r="http://schemas.openxmlformats.org/officeDocument/2006/relationships">
   <p:cSld>
     <p:spTree>
       <p:nvGrpSpPr>
@@ -278,7 +485,7 @@
         <p:nvSpPr>
           <p:cNvPr id="2" name="Slide Image Placeholder 1"/>
           <p:cNvSpPr>
-            <a:spLocks noGrp="1" noRot="1" noChangeAspect="1"/>
+            <a:spLocks noGrp="1"/>
           </p:cNvSpPr>
           <p:nvPr>
             <p:ph type="sldImg" idx="2"/>
@@ -293,7 +500,7 @@
             <a:spLocks noGrp="1"/>
           </p:cNvSpPr>
           <p:nvPr>
-            <p:ph type="body" sz="quarter" idx="3"/>
+            <p:ph type="body" idx="3" sz="quarter"/>
           </p:nvPr>
         </p:nvSpPr>
         <p:spPr/>
@@ -305,9 +512,7 @@
               <a:t>[0:00–0:18 | 24 слова]</a:t>
             </a:r>
           </a:p>
-          <a:p>
-            <a:endParaRPr/>
-          </a:p>
+          <a:p/>
           <a:p>
             <a:r>
               <a:t>«Здравствуйте! Наша команда представляет Risk Desk — рабочее место маркетолога хостинга. Мы отвечаем на три вопроса кейса: кому звонить сегодня, почему клиент уходит и сколько бизнес потеряет».</a:t>
@@ -322,7 +527,7 @@
             <a:spLocks noGrp="1"/>
           </p:cNvSpPr>
           <p:nvPr>
-            <p:ph type="sldNum" sz="quarter" idx="5"/>
+            <p:ph type="sldNum" idx="5" sz="quarter"/>
           </p:nvPr>
         </p:nvSpPr>
         <p:spPr/>
@@ -336,7 +541,7 @@
 </file>
 
 <file path=ppt/notesSlides/notesSlide2.xml><?xml version="1.0" encoding="utf-8"?>
-<p:notes xmlns:a="http://schemas.openxmlformats.org/drawingml/2006/main" xmlns:r="http://schemas.openxmlformats.org/officeDocument/2006/relationships" xmlns:p="http://schemas.openxmlformats.org/presentationml/2006/main">
+<p:notes xmlns:a="http://schemas.openxmlformats.org/drawingml/2006/main" xmlns:p="http://schemas.openxmlformats.org/presentationml/2006/main" xmlns:r="http://schemas.openxmlformats.org/officeDocument/2006/relationships">
   <p:cSld>
     <p:spTree>
       <p:nvGrpSpPr>
@@ -356,7 +561,7 @@
         <p:nvSpPr>
           <p:cNvPr id="2" name="Slide Image Placeholder 1"/>
           <p:cNvSpPr>
-            <a:spLocks noGrp="1" noRot="1" noChangeAspect="1"/>
+            <a:spLocks noGrp="1"/>
           </p:cNvSpPr>
           <p:nvPr>
             <p:ph type="sldImg" idx="2"/>
@@ -371,7 +576,7 @@
             <a:spLocks noGrp="1"/>
           </p:cNvSpPr>
           <p:nvPr>
-            <p:ph type="body" sz="quarter" idx="3"/>
+            <p:ph type="body" idx="3" sz="quarter"/>
           </p:nvPr>
         </p:nvSpPr>
         <p:spPr/>
@@ -383,9 +588,7 @@
               <a:t>[0:18–0:50 | 42 слова]</a:t>
             </a:r>
           </a:p>
-          <a:p>
-            <a:endParaRPr/>
-          </a:p>
+          <a:p/>
           <a:p>
             <a:r>
               <a:t>«В хостинге обычный биллинг не спасает: когда сервер удалён — удерживать поздно. Отток нужно перехватывать раньше: когда услугу отключили (suspended) или она ждёт оплаты (prolong_wait). На нашем снимке под риском 67,53 евро. Система мгновенно выявляет критических клиентов».</a:t>
@@ -400,7 +603,7 @@
             <a:spLocks noGrp="1"/>
           </p:cNvSpPr>
           <p:nvPr>
-            <p:ph type="sldNum" sz="quarter" idx="5"/>
+            <p:ph type="sldNum" idx="5" sz="quarter"/>
           </p:nvPr>
         </p:nvSpPr>
         <p:spPr/>
@@ -414,7 +617,7 @@
 </file>
 
 <file path=ppt/notesSlides/notesSlide3.xml><?xml version="1.0" encoding="utf-8"?>
-<p:notes xmlns:a="http://schemas.openxmlformats.org/drawingml/2006/main" xmlns:r="http://schemas.openxmlformats.org/officeDocument/2006/relationships" xmlns:p="http://schemas.openxmlformats.org/presentationml/2006/main">
+<p:notes xmlns:a="http://schemas.openxmlformats.org/drawingml/2006/main" xmlns:p="http://schemas.openxmlformats.org/presentationml/2006/main" xmlns:r="http://schemas.openxmlformats.org/officeDocument/2006/relationships">
   <p:cSld>
     <p:spTree>
       <p:nvGrpSpPr>
@@ -434,7 +637,7 @@
         <p:nvSpPr>
           <p:cNvPr id="2" name="Slide Image Placeholder 1"/>
           <p:cNvSpPr>
-            <a:spLocks noGrp="1" noRot="1" noChangeAspect="1"/>
+            <a:spLocks noGrp="1"/>
           </p:cNvSpPr>
           <p:nvPr>
             <p:ph type="sldImg" idx="2"/>
@@ -449,7 +652,7 @@
             <a:spLocks noGrp="1"/>
           </p:cNvSpPr>
           <p:nvPr>
-            <p:ph type="body" sz="quarter" idx="3"/>
+            <p:ph type="body" idx="3" sz="quarter"/>
           </p:nvPr>
         </p:nvSpPr>
         <p:spPr/>
@@ -461,9 +664,7 @@
               <a:t>[0:50–1:15 | 34 слова]</a:t>
             </a:r>
           </a:p>
-          <a:p>
-            <a:endParaRPr/>
-          </a:p>
+          <a:p/>
           <a:p>
             <a:r>
               <a:t>«Мы объединили все три ответа кейса на одном экране дашборда:</a:t>
@@ -493,7 +694,7 @@
             <a:spLocks noGrp="1"/>
           </p:cNvSpPr>
           <p:nvPr>
-            <p:ph type="sldNum" sz="quarter" idx="5"/>
+            <p:ph type="sldNum" idx="5" sz="quarter"/>
           </p:nvPr>
         </p:nvSpPr>
         <p:spPr/>
@@ -507,7 +708,7 @@
 </file>
 
 <file path=ppt/notesSlides/notesSlide4.xml><?xml version="1.0" encoding="utf-8"?>
-<p:notes xmlns:a="http://schemas.openxmlformats.org/drawingml/2006/main" xmlns:r="http://schemas.openxmlformats.org/officeDocument/2006/relationships" xmlns:p="http://schemas.openxmlformats.org/presentationml/2006/main">
+<p:notes xmlns:a="http://schemas.openxmlformats.org/drawingml/2006/main" xmlns:p="http://schemas.openxmlformats.org/presentationml/2006/main" xmlns:r="http://schemas.openxmlformats.org/officeDocument/2006/relationships">
   <p:cSld>
     <p:spTree>
       <p:nvGrpSpPr>
@@ -527,7 +728,7 @@
         <p:nvSpPr>
           <p:cNvPr id="2" name="Slide Image Placeholder 1"/>
           <p:cNvSpPr>
-            <a:spLocks noGrp="1" noRot="1" noChangeAspect="1"/>
+            <a:spLocks noGrp="1"/>
           </p:cNvSpPr>
           <p:nvPr>
             <p:ph type="sldImg" idx="2"/>
@@ -542,7 +743,7 @@
             <a:spLocks noGrp="1"/>
           </p:cNvSpPr>
           <p:nvPr>
-            <p:ph type="body" sz="quarter" idx="3"/>
+            <p:ph type="body" idx="3" sz="quarter"/>
           </p:nvPr>
         </p:nvSpPr>
         <p:spPr/>
@@ -554,9 +755,7 @@
               <a:t>[1:15–1:40 | 32 слова]</a:t>
             </a:r>
           </a:p>
-          <a:p>
-            <a:endParaRPr/>
-          </a:p>
+          <a:p/>
           <a:p>
             <a:r>
               <a:t>«Главное — аналитика сразу переходит в действие. По клику на клиента открывается персонализированный драфт письма: система сама подставляет услугу, сумму к доплате и промокод. Маркетолог удерживает клиента в один клик».</a:t>
@@ -571,7 +770,7 @@
             <a:spLocks noGrp="1"/>
           </p:cNvSpPr>
           <p:nvPr>
-            <p:ph type="sldNum" sz="quarter" idx="5"/>
+            <p:ph type="sldNum" idx="5" sz="quarter"/>
           </p:nvPr>
         </p:nvSpPr>
         <p:spPr/>
@@ -585,7 +784,7 @@
 </file>
 
 <file path=ppt/notesSlides/notesSlide5.xml><?xml version="1.0" encoding="utf-8"?>
-<p:notes xmlns:a="http://schemas.openxmlformats.org/drawingml/2006/main" xmlns:r="http://schemas.openxmlformats.org/officeDocument/2006/relationships" xmlns:p="http://schemas.openxmlformats.org/presentationml/2006/main">
+<p:notes xmlns:a="http://schemas.openxmlformats.org/drawingml/2006/main" xmlns:p="http://schemas.openxmlformats.org/presentationml/2006/main" xmlns:r="http://schemas.openxmlformats.org/officeDocument/2006/relationships">
   <p:cSld>
     <p:spTree>
       <p:nvGrpSpPr>
@@ -605,7 +804,7 @@
         <p:nvSpPr>
           <p:cNvPr id="2" name="Slide Image Placeholder 1"/>
           <p:cNvSpPr>
-            <a:spLocks noGrp="1" noRot="1" noChangeAspect="1"/>
+            <a:spLocks noGrp="1"/>
           </p:cNvSpPr>
           <p:nvPr>
             <p:ph type="sldImg" idx="2"/>
@@ -620,7 +819,7 @@
             <a:spLocks noGrp="1"/>
           </p:cNvSpPr>
           <p:nvPr>
-            <p:ph type="body" sz="quarter" idx="3"/>
+            <p:ph type="body" idx="3" sz="quarter"/>
           </p:nvPr>
         </p:nvSpPr>
         <p:spPr/>
@@ -632,9 +831,7 @@
               <a:t>[1:40–2:10 | 44 слова]</a:t>
             </a:r>
           </a:p>
-          <a:p>
-            <a:endParaRPr/>
-          </a:p>
+          <a:p/>
           <a:p>
             <a:r>
               <a:t>«Почему не машинное обучение? В исходных данных нет истории и меток оттока. Обучать ML на десяти строках — это самообман.</a:t>
@@ -654,7 +851,7 @@
             <a:spLocks noGrp="1"/>
           </p:cNvSpPr>
           <p:nvPr>
-            <p:ph type="sldNum" sz="quarter" idx="5"/>
+            <p:ph type="sldNum" idx="5" sz="quarter"/>
           </p:nvPr>
         </p:nvSpPr>
         <p:spPr/>
@@ -668,7 +865,7 @@
 </file>
 
 <file path=ppt/notesSlides/notesSlide6.xml><?xml version="1.0" encoding="utf-8"?>
-<p:notes xmlns:a="http://schemas.openxmlformats.org/drawingml/2006/main" xmlns:r="http://schemas.openxmlformats.org/officeDocument/2006/relationships" xmlns:p="http://schemas.openxmlformats.org/presentationml/2006/main">
+<p:notes xmlns:a="http://schemas.openxmlformats.org/drawingml/2006/main" xmlns:p="http://schemas.openxmlformats.org/presentationml/2006/main" xmlns:r="http://schemas.openxmlformats.org/officeDocument/2006/relationships">
   <p:cSld>
     <p:spTree>
       <p:nvGrpSpPr>
@@ -688,7 +885,7 @@
         <p:nvSpPr>
           <p:cNvPr id="2" name="Slide Image Placeholder 1"/>
           <p:cNvSpPr>
-            <a:spLocks noGrp="1" noRot="1" noChangeAspect="1"/>
+            <a:spLocks noGrp="1"/>
           </p:cNvSpPr>
           <p:nvPr>
             <p:ph type="sldImg" idx="2"/>
@@ -703,7 +900,7 @@
             <a:spLocks noGrp="1"/>
           </p:cNvSpPr>
           <p:nvPr>
-            <p:ph type="body" sz="quarter" idx="3"/>
+            <p:ph type="body" idx="3" sz="quarter"/>
           </p:nvPr>
         </p:nvSpPr>
         <p:spPr/>
@@ -715,9 +912,7 @@
               <a:t>[2:10–2:35 | 35 слов]</a:t>
             </a:r>
           </a:p>
-          <a:p>
-            <a:endParaRPr/>
-          </a:p>
+          <a:p/>
           <a:p>
             <a:r>
               <a:t>«Сервис полностью готов. Вы можете развернуть и проверить его прямо сейчас одной командой docker compose up. В проекте 449 бэкенд-тестов и браузерные E2E тесты. База данных оптимизирована под 10 000 клиентов, подключены Swagger, Prometheus и корпоративный SSO».</a:t>
@@ -732,7 +927,7 @@
             <a:spLocks noGrp="1"/>
           </p:cNvSpPr>
           <p:nvPr>
-            <p:ph type="sldNum" sz="quarter" idx="5"/>
+            <p:ph type="sldNum" idx="5" sz="quarter"/>
           </p:nvPr>
         </p:nvSpPr>
         <p:spPr/>
@@ -746,7 +941,7 @@
 </file>
 
 <file path=ppt/notesSlides/notesSlide7.xml><?xml version="1.0" encoding="utf-8"?>
-<p:notes xmlns:a="http://schemas.openxmlformats.org/drawingml/2006/main" xmlns:r="http://schemas.openxmlformats.org/officeDocument/2006/relationships" xmlns:p="http://schemas.openxmlformats.org/presentationml/2006/main">
+<p:notes xmlns:a="http://schemas.openxmlformats.org/drawingml/2006/main" xmlns:p="http://schemas.openxmlformats.org/presentationml/2006/main" xmlns:r="http://schemas.openxmlformats.org/officeDocument/2006/relationships">
   <p:cSld>
     <p:spTree>
       <p:nvGrpSpPr>
@@ -766,7 +961,7 @@
         <p:nvSpPr>
           <p:cNvPr id="2" name="Slide Image Placeholder 1"/>
           <p:cNvSpPr>
-            <a:spLocks noGrp="1" noRot="1" noChangeAspect="1"/>
+            <a:spLocks noGrp="1"/>
           </p:cNvSpPr>
           <p:nvPr>
             <p:ph type="sldImg" idx="2"/>
@@ -781,7 +976,7 @@
             <a:spLocks noGrp="1"/>
           </p:cNvSpPr>
           <p:nvPr>
-            <p:ph type="body" sz="quarter" idx="3"/>
+            <p:ph type="body" idx="3" sz="quarter"/>
           </p:nvPr>
         </p:nvSpPr>
         <p:spPr/>
@@ -793,9 +988,7 @@
               <a:t>[2:35–2:50 | 18 слов]</a:t>
             </a:r>
           </a:p>
-          <a:p>
-            <a:endParaRPr/>
-          </a:p>
+          <a:p/>
           <a:p>
             <a:r>
               <a:t>«Инструкция по запуску — в файле JURY.md. Спасибо за внимание, мы готовы ответить на вопросы и показать работу системы».</a:t>
@@ -810,7 +1003,83 @@
             <a:spLocks noGrp="1"/>
           </p:cNvSpPr>
           <p:nvPr>
-            <p:ph type="sldNum" sz="quarter" idx="5"/>
+            <p:ph type="sldNum" idx="5" sz="quarter"/>
+          </p:nvPr>
+        </p:nvSpPr>
+        <p:spPr/>
+      </p:sp>
+    </p:spTree>
+  </p:cSld>
+  <p:clrMapOvr>
+    <a:masterClrMapping/>
+  </p:clrMapOvr>
+</p:notes>
+</file>
+
+<file path=ppt/notesSlides/notesSlide8.xml><?xml version="1.0" encoding="utf-8"?>
+<p:notes xmlns:a="http://schemas.openxmlformats.org/drawingml/2006/main" xmlns:p="http://schemas.openxmlformats.org/presentationml/2006/main" xmlns:r="http://schemas.openxmlformats.org/officeDocument/2006/relationships">
+  <p:cSld>
+    <p:spTree>
+      <p:nvGrpSpPr>
+        <p:cNvPr id="1" name=""/>
+        <p:cNvGrpSpPr/>
+        <p:nvPr/>
+      </p:nvGrpSpPr>
+      <p:grpSpPr>
+        <a:xfrm>
+          <a:off x="0" y="0"/>
+          <a:ext cx="0" cy="0"/>
+          <a:chOff x="0" y="0"/>
+          <a:chExt cx="0" cy="0"/>
+        </a:xfrm>
+      </p:grpSpPr>
+      <p:sp>
+        <p:nvSpPr>
+          <p:cNvPr id="2" name="Slide Image Placeholder 1"/>
+          <p:cNvSpPr>
+            <a:spLocks noGrp="1"/>
+          </p:cNvSpPr>
+          <p:nvPr>
+            <p:ph type="sldImg" idx="2"/>
+          </p:nvPr>
+        </p:nvSpPr>
+        <p:spPr/>
+      </p:sp>
+      <p:sp>
+        <p:nvSpPr>
+          <p:cNvPr id="3" name="Notes Placeholder 2"/>
+          <p:cNvSpPr>
+            <a:spLocks noGrp="1"/>
+          </p:cNvSpPr>
+          <p:nvPr>
+            <p:ph type="body" idx="3" sz="quarter"/>
+          </p:nvPr>
+        </p:nvSpPr>
+        <p:spPr/>
+        <p:txBody>
+          <a:bodyPr/>
+          <a:lstStyle/>
+          <a:p>
+            <a:r>
+              <a:t>[2:50–3:00 | 15 слов]</a:t>
+            </a:r>
+          </a:p>
+          <a:p/>
+          <a:p>
+            <a:r>
+              <a:t>«Вот QR: сканируете — панель открывается сразу, без пароля и Docker. Это тот же код, что в репозитории, просто уже развёрнутый».</a:t>
+            </a:r>
+          </a:p>
+        </p:txBody>
+      </p:sp>
+      <p:sp>
+        <p:nvSpPr>
+          <p:cNvPr id="4" name="Slide Number Placeholder 3"/>
+          <p:cNvSpPr>
+            <a:spLocks noGrp="1"/>
+          </p:cNvSpPr>
+          <p:nvPr>
+            <p:ph type="sldNum" idx="5" sz="quarter"/>
           </p:nvPr>
         </p:nvSpPr>
         <p:spPr/>
@@ -861,9 +1130,10 @@
           <a:lstStyle/>
           <a:p>
             <a:r>
-              <a:rPr lang="en-US"/>
+              <a:rPr lang="en-US" smtClean="0"/>
               <a:t>Click to edit Master title style</a:t>
             </a:r>
+            <a:endParaRPr lang="en-US"/>
           </a:p>
         </p:txBody>
       </p:sp>
@@ -979,9 +1249,10 @@
           </a:lstStyle>
           <a:p>
             <a:r>
-              <a:rPr lang="en-US"/>
+              <a:rPr lang="en-US" smtClean="0"/>
               <a:t>Click to edit Master subtitle style</a:t>
             </a:r>
+            <a:endParaRPr lang="en-US"/>
           </a:p>
         </p:txBody>
       </p:sp>
@@ -1002,7 +1273,7 @@
           <a:p>
             <a:fld id="{5BCAD085-E8A6-8845-BD4E-CB4CCA059FC4}" type="datetimeFigureOut">
               <a:rPr lang="en-US" smtClean="0"/>
-              <a:t>10/24/2026</a:t>
+              <a:t>1/27/13</a:t>
             </a:fld>
             <a:endParaRPr lang="en-US"/>
           </a:p>
@@ -1096,9 +1367,10 @@
           <a:lstStyle/>
           <a:p>
             <a:r>
-              <a:rPr lang="en-US"/>
+              <a:rPr lang="en-US" smtClean="0"/>
               <a:t>Click to edit Master title style</a:t>
             </a:r>
+            <a:endParaRPr lang="en-US"/>
           </a:p>
         </p:txBody>
       </p:sp>
@@ -1119,37 +1391,38 @@
           <a:p>
             <a:pPr lvl="0"/>
             <a:r>
-              <a:rPr lang="en-US"/>
+              <a:rPr lang="en-US" smtClean="0"/>
               <a:t>Click to edit Master text styles</a:t>
             </a:r>
           </a:p>
           <a:p>
             <a:pPr lvl="1"/>
             <a:r>
-              <a:rPr lang="en-US"/>
+              <a:rPr lang="en-US" smtClean="0"/>
               <a:t>Second level</a:t>
             </a:r>
           </a:p>
           <a:p>
             <a:pPr lvl="2"/>
             <a:r>
-              <a:rPr lang="en-US"/>
+              <a:rPr lang="en-US" smtClean="0"/>
               <a:t>Third level</a:t>
             </a:r>
           </a:p>
           <a:p>
             <a:pPr lvl="3"/>
             <a:r>
-              <a:rPr lang="en-US"/>
+              <a:rPr lang="en-US" smtClean="0"/>
               <a:t>Fourth level</a:t>
             </a:r>
           </a:p>
           <a:p>
             <a:pPr lvl="4"/>
             <a:r>
-              <a:rPr lang="en-US"/>
+              <a:rPr lang="en-US" smtClean="0"/>
               <a:t>Fifth level</a:t>
             </a:r>
+            <a:endParaRPr lang="en-US"/>
           </a:p>
         </p:txBody>
       </p:sp>
@@ -1170,7 +1443,7 @@
           <a:p>
             <a:fld id="{5BCAD085-E8A6-8845-BD4E-CB4CCA059FC4}" type="datetimeFigureOut">
               <a:rPr lang="en-US" smtClean="0"/>
-              <a:t>10/24/2026</a:t>
+              <a:t>1/27/13</a:t>
             </a:fld>
             <a:endParaRPr lang="en-US"/>
           </a:p>
@@ -1269,9 +1542,10 @@
           <a:lstStyle/>
           <a:p>
             <a:r>
-              <a:rPr lang="en-US"/>
+              <a:rPr lang="en-US" smtClean="0"/>
               <a:t>Click to edit Master title style</a:t>
             </a:r>
+            <a:endParaRPr lang="en-US"/>
           </a:p>
         </p:txBody>
       </p:sp>
@@ -1297,37 +1571,38 @@
           <a:p>
             <a:pPr lvl="0"/>
             <a:r>
-              <a:rPr lang="en-US"/>
+              <a:rPr lang="en-US" smtClean="0"/>
               <a:t>Click to edit Master text styles</a:t>
             </a:r>
           </a:p>
           <a:p>
             <a:pPr lvl="1"/>
             <a:r>
-              <a:rPr lang="en-US"/>
+              <a:rPr lang="en-US" smtClean="0"/>
               <a:t>Second level</a:t>
             </a:r>
           </a:p>
           <a:p>
             <a:pPr lvl="2"/>
             <a:r>
-              <a:rPr lang="en-US"/>
+              <a:rPr lang="en-US" smtClean="0"/>
               <a:t>Third level</a:t>
             </a:r>
           </a:p>
           <a:p>
             <a:pPr lvl="3"/>
             <a:r>
-              <a:rPr lang="en-US"/>
+              <a:rPr lang="en-US" smtClean="0"/>
               <a:t>Fourth level</a:t>
             </a:r>
           </a:p>
           <a:p>
             <a:pPr lvl="4"/>
             <a:r>
-              <a:rPr lang="en-US"/>
+              <a:rPr lang="en-US" smtClean="0"/>
               <a:t>Fifth level</a:t>
             </a:r>
+            <a:endParaRPr lang="en-US"/>
           </a:p>
         </p:txBody>
       </p:sp>
@@ -1348,7 +1623,7 @@
           <a:p>
             <a:fld id="{5BCAD085-E8A6-8845-BD4E-CB4CCA059FC4}" type="datetimeFigureOut">
               <a:rPr lang="en-US" smtClean="0"/>
-              <a:t>10/24/2026</a:t>
+              <a:t>1/27/13</a:t>
             </a:fld>
             <a:endParaRPr lang="en-US"/>
           </a:p>
@@ -1442,9 +1717,10 @@
           <a:lstStyle/>
           <a:p>
             <a:r>
-              <a:rPr lang="en-US"/>
+              <a:rPr lang="en-US" smtClean="0"/>
               <a:t>Click to edit Master title style</a:t>
             </a:r>
+            <a:endParaRPr lang="en-US"/>
           </a:p>
         </p:txBody>
       </p:sp>
@@ -1465,37 +1741,38 @@
           <a:p>
             <a:pPr lvl="0"/>
             <a:r>
-              <a:rPr lang="en-US"/>
+              <a:rPr lang="en-US" smtClean="0"/>
               <a:t>Click to edit Master text styles</a:t>
             </a:r>
           </a:p>
           <a:p>
             <a:pPr lvl="1"/>
             <a:r>
-              <a:rPr lang="en-US"/>
+              <a:rPr lang="en-US" smtClean="0"/>
               <a:t>Second level</a:t>
             </a:r>
           </a:p>
           <a:p>
             <a:pPr lvl="2"/>
             <a:r>
-              <a:rPr lang="en-US"/>
+              <a:rPr lang="en-US" smtClean="0"/>
               <a:t>Third level</a:t>
             </a:r>
           </a:p>
           <a:p>
             <a:pPr lvl="3"/>
             <a:r>
-              <a:rPr lang="en-US"/>
+              <a:rPr lang="en-US" smtClean="0"/>
               <a:t>Fourth level</a:t>
             </a:r>
           </a:p>
           <a:p>
             <a:pPr lvl="4"/>
             <a:r>
-              <a:rPr lang="en-US"/>
+              <a:rPr lang="en-US" smtClean="0"/>
               <a:t>Fifth level</a:t>
             </a:r>
+            <a:endParaRPr lang="en-US"/>
           </a:p>
         </p:txBody>
       </p:sp>
@@ -1516,7 +1793,7 @@
           <a:p>
             <a:fld id="{5BCAD085-E8A6-8845-BD4E-CB4CCA059FC4}" type="datetimeFigureOut">
               <a:rPr lang="en-US" smtClean="0"/>
-              <a:t>10/24/2026</a:t>
+              <a:t>1/27/13</a:t>
             </a:fld>
             <a:endParaRPr lang="en-US"/>
           </a:p>
@@ -1619,9 +1896,10 @@
           </a:lstStyle>
           <a:p>
             <a:r>
-              <a:rPr lang="en-US"/>
+              <a:rPr lang="en-US" smtClean="0"/>
               <a:t>Click to edit Master title style</a:t>
             </a:r>
+            <a:endParaRPr lang="en-US"/>
           </a:p>
         </p:txBody>
       </p:sp>
@@ -1738,7 +2016,7 @@
           <a:p>
             <a:pPr lvl="0"/>
             <a:r>
-              <a:rPr lang="en-US"/>
+              <a:rPr lang="en-US" smtClean="0"/>
               <a:t>Click to edit Master text styles</a:t>
             </a:r>
           </a:p>
@@ -1761,7 +2039,7 @@
           <a:p>
             <a:fld id="{5BCAD085-E8A6-8845-BD4E-CB4CCA059FC4}" type="datetimeFigureOut">
               <a:rPr lang="en-US" smtClean="0"/>
-              <a:t>10/24/2026</a:t>
+              <a:t>1/27/13</a:t>
             </a:fld>
             <a:endParaRPr lang="en-US"/>
           </a:p>
@@ -1855,9 +2133,10 @@
           <a:lstStyle/>
           <a:p>
             <a:r>
-              <a:rPr lang="en-US"/>
+              <a:rPr lang="en-US" smtClean="0"/>
               <a:t>Click to edit Master title style</a:t>
             </a:r>
+            <a:endParaRPr lang="en-US"/>
           </a:p>
         </p:txBody>
       </p:sp>
@@ -1911,37 +2190,38 @@
           <a:p>
             <a:pPr lvl="0"/>
             <a:r>
-              <a:rPr lang="en-US"/>
+              <a:rPr lang="en-US" smtClean="0"/>
               <a:t>Click to edit Master text styles</a:t>
             </a:r>
           </a:p>
           <a:p>
             <a:pPr lvl="1"/>
             <a:r>
-              <a:rPr lang="en-US"/>
+              <a:rPr lang="en-US" smtClean="0"/>
               <a:t>Second level</a:t>
             </a:r>
           </a:p>
           <a:p>
             <a:pPr lvl="2"/>
             <a:r>
-              <a:rPr lang="en-US"/>
+              <a:rPr lang="en-US" smtClean="0"/>
               <a:t>Third level</a:t>
             </a:r>
           </a:p>
           <a:p>
             <a:pPr lvl="3"/>
             <a:r>
-              <a:rPr lang="en-US"/>
+              <a:rPr lang="en-US" smtClean="0"/>
               <a:t>Fourth level</a:t>
             </a:r>
           </a:p>
           <a:p>
             <a:pPr lvl="4"/>
             <a:r>
-              <a:rPr lang="en-US"/>
+              <a:rPr lang="en-US" smtClean="0"/>
               <a:t>Fifth level</a:t>
             </a:r>
+            <a:endParaRPr lang="en-US"/>
           </a:p>
         </p:txBody>
       </p:sp>
@@ -1995,37 +2275,38 @@
           <a:p>
             <a:pPr lvl="0"/>
             <a:r>
-              <a:rPr lang="en-US"/>
+              <a:rPr lang="en-US" smtClean="0"/>
               <a:t>Click to edit Master text styles</a:t>
             </a:r>
           </a:p>
           <a:p>
             <a:pPr lvl="1"/>
             <a:r>
-              <a:rPr lang="en-US"/>
+              <a:rPr lang="en-US" smtClean="0"/>
               <a:t>Second level</a:t>
             </a:r>
           </a:p>
           <a:p>
             <a:pPr lvl="2"/>
             <a:r>
-              <a:rPr lang="en-US"/>
+              <a:rPr lang="en-US" smtClean="0"/>
               <a:t>Third level</a:t>
             </a:r>
           </a:p>
           <a:p>
             <a:pPr lvl="3"/>
             <a:r>
-              <a:rPr lang="en-US"/>
+              <a:rPr lang="en-US" smtClean="0"/>
               <a:t>Fourth level</a:t>
             </a:r>
           </a:p>
           <a:p>
             <a:pPr lvl="4"/>
             <a:r>
-              <a:rPr lang="en-US"/>
+              <a:rPr lang="en-US" smtClean="0"/>
               <a:t>Fifth level</a:t>
             </a:r>
+            <a:endParaRPr lang="en-US"/>
           </a:p>
         </p:txBody>
       </p:sp>
@@ -2046,7 +2327,7 @@
           <a:p>
             <a:fld id="{5BCAD085-E8A6-8845-BD4E-CB4CCA059FC4}" type="datetimeFigureOut">
               <a:rPr lang="en-US" smtClean="0"/>
-              <a:t>10/24/2026</a:t>
+              <a:t>1/27/13</a:t>
             </a:fld>
             <a:endParaRPr lang="en-US"/>
           </a:p>
@@ -2144,9 +2425,10 @@
           </a:lstStyle>
           <a:p>
             <a:r>
-              <a:rPr lang="en-US"/>
+              <a:rPr lang="en-US" smtClean="0"/>
               <a:t>Click to edit Master title style</a:t>
             </a:r>
+            <a:endParaRPr lang="en-US"/>
           </a:p>
         </p:txBody>
       </p:sp>
@@ -2209,7 +2491,7 @@
           <a:p>
             <a:pPr lvl="0"/>
             <a:r>
-              <a:rPr lang="en-US"/>
+              <a:rPr lang="en-US" smtClean="0"/>
               <a:t>Click to edit Master text styles</a:t>
             </a:r>
           </a:p>
@@ -2265,37 +2547,38 @@
           <a:p>
             <a:pPr lvl="0"/>
             <a:r>
-              <a:rPr lang="en-US"/>
+              <a:rPr lang="en-US" smtClean="0"/>
               <a:t>Click to edit Master text styles</a:t>
             </a:r>
           </a:p>
           <a:p>
             <a:pPr lvl="1"/>
             <a:r>
-              <a:rPr lang="en-US"/>
+              <a:rPr lang="en-US" smtClean="0"/>
               <a:t>Second level</a:t>
             </a:r>
           </a:p>
           <a:p>
             <a:pPr lvl="2"/>
             <a:r>
-              <a:rPr lang="en-US"/>
+              <a:rPr lang="en-US" smtClean="0"/>
               <a:t>Third level</a:t>
             </a:r>
           </a:p>
           <a:p>
             <a:pPr lvl="3"/>
             <a:r>
-              <a:rPr lang="en-US"/>
+              <a:rPr lang="en-US" smtClean="0"/>
               <a:t>Fourth level</a:t>
             </a:r>
           </a:p>
           <a:p>
             <a:pPr lvl="4"/>
             <a:r>
-              <a:rPr lang="en-US"/>
+              <a:rPr lang="en-US" smtClean="0"/>
               <a:t>Fifth level</a:t>
             </a:r>
+            <a:endParaRPr lang="en-US"/>
           </a:p>
         </p:txBody>
       </p:sp>
@@ -2358,7 +2641,7 @@
           <a:p>
             <a:pPr lvl="0"/>
             <a:r>
-              <a:rPr lang="en-US"/>
+              <a:rPr lang="en-US" smtClean="0"/>
               <a:t>Click to edit Master text styles</a:t>
             </a:r>
           </a:p>
@@ -2414,37 +2697,38 @@
           <a:p>
             <a:pPr lvl="0"/>
             <a:r>
-              <a:rPr lang="en-US"/>
+              <a:rPr lang="en-US" smtClean="0"/>
               <a:t>Click to edit Master text styles</a:t>
             </a:r>
           </a:p>
           <a:p>
             <a:pPr lvl="1"/>
             <a:r>
-              <a:rPr lang="en-US"/>
+              <a:rPr lang="en-US" smtClean="0"/>
               <a:t>Second level</a:t>
             </a:r>
           </a:p>
           <a:p>
             <a:pPr lvl="2"/>
             <a:r>
-              <a:rPr lang="en-US"/>
+              <a:rPr lang="en-US" smtClean="0"/>
               <a:t>Third level</a:t>
             </a:r>
           </a:p>
           <a:p>
             <a:pPr lvl="3"/>
             <a:r>
-              <a:rPr lang="en-US"/>
+              <a:rPr lang="en-US" smtClean="0"/>
               <a:t>Fourth level</a:t>
             </a:r>
           </a:p>
           <a:p>
             <a:pPr lvl="4"/>
             <a:r>
-              <a:rPr lang="en-US"/>
+              <a:rPr lang="en-US" smtClean="0"/>
               <a:t>Fifth level</a:t>
             </a:r>
+            <a:endParaRPr lang="en-US"/>
           </a:p>
         </p:txBody>
       </p:sp>
@@ -2465,7 +2749,7 @@
           <a:p>
             <a:fld id="{5BCAD085-E8A6-8845-BD4E-CB4CCA059FC4}" type="datetimeFigureOut">
               <a:rPr lang="en-US" smtClean="0"/>
-              <a:t>10/24/2026</a:t>
+              <a:t>1/27/13</a:t>
             </a:fld>
             <a:endParaRPr lang="en-US"/>
           </a:p>
@@ -2559,9 +2843,10 @@
           <a:lstStyle/>
           <a:p>
             <a:r>
-              <a:rPr lang="en-US"/>
+              <a:rPr lang="en-US" smtClean="0"/>
               <a:t>Click to edit Master title style</a:t>
             </a:r>
+            <a:endParaRPr lang="en-US"/>
           </a:p>
         </p:txBody>
       </p:sp>
@@ -2582,7 +2867,7 @@
           <a:p>
             <a:fld id="{5BCAD085-E8A6-8845-BD4E-CB4CCA059FC4}" type="datetimeFigureOut">
               <a:rPr lang="en-US" smtClean="0"/>
-              <a:t>10/24/2026</a:t>
+              <a:t>1/27/13</a:t>
             </a:fld>
             <a:endParaRPr lang="en-US"/>
           </a:p>
@@ -2677,7 +2962,7 @@
           <a:p>
             <a:fld id="{5BCAD085-E8A6-8845-BD4E-CB4CCA059FC4}" type="datetimeFigureOut">
               <a:rPr lang="en-US" smtClean="0"/>
-              <a:t>10/24/2026</a:t>
+              <a:t>1/27/13</a:t>
             </a:fld>
             <a:endParaRPr lang="en-US"/>
           </a:p>
@@ -2780,9 +3065,10 @@
           </a:lstStyle>
           <a:p>
             <a:r>
-              <a:rPr lang="en-US"/>
+              <a:rPr lang="en-US" smtClean="0"/>
               <a:t>Click to edit Master title style</a:t>
             </a:r>
+            <a:endParaRPr lang="en-US"/>
           </a:p>
         </p:txBody>
       </p:sp>
@@ -2836,37 +3122,38 @@
           <a:p>
             <a:pPr lvl="0"/>
             <a:r>
-              <a:rPr lang="en-US"/>
+              <a:rPr lang="en-US" smtClean="0"/>
               <a:t>Click to edit Master text styles</a:t>
             </a:r>
           </a:p>
           <a:p>
             <a:pPr lvl="1"/>
             <a:r>
-              <a:rPr lang="en-US"/>
+              <a:rPr lang="en-US" smtClean="0"/>
               <a:t>Second level</a:t>
             </a:r>
           </a:p>
           <a:p>
             <a:pPr lvl="2"/>
             <a:r>
-              <a:rPr lang="en-US"/>
+              <a:rPr lang="en-US" smtClean="0"/>
               <a:t>Third level</a:t>
             </a:r>
           </a:p>
           <a:p>
             <a:pPr lvl="3"/>
             <a:r>
-              <a:rPr lang="en-US"/>
+              <a:rPr lang="en-US" smtClean="0"/>
               <a:t>Fourth level</a:t>
             </a:r>
           </a:p>
           <a:p>
             <a:pPr lvl="4"/>
             <a:r>
-              <a:rPr lang="en-US"/>
+              <a:rPr lang="en-US" smtClean="0"/>
               <a:t>Fifth level</a:t>
             </a:r>
+            <a:endParaRPr lang="en-US"/>
           </a:p>
         </p:txBody>
       </p:sp>
@@ -2929,7 +3216,7 @@
           <a:p>
             <a:pPr lvl="0"/>
             <a:r>
-              <a:rPr lang="en-US"/>
+              <a:rPr lang="en-US" smtClean="0"/>
               <a:t>Click to edit Master text styles</a:t>
             </a:r>
           </a:p>
@@ -2952,7 +3239,7 @@
           <a:p>
             <a:fld id="{5BCAD085-E8A6-8845-BD4E-CB4CCA059FC4}" type="datetimeFigureOut">
               <a:rPr lang="en-US" smtClean="0"/>
-              <a:t>10/24/2026</a:t>
+              <a:t>1/27/13</a:t>
             </a:fld>
             <a:endParaRPr lang="en-US"/>
           </a:p>
@@ -3055,9 +3342,10 @@
           </a:lstStyle>
           <a:p>
             <a:r>
-              <a:rPr lang="en-US"/>
+              <a:rPr lang="en-US" smtClean="0"/>
               <a:t>Click to edit Master title style</a:t>
             </a:r>
+            <a:endParaRPr lang="en-US"/>
           </a:p>
         </p:txBody>
       </p:sp>
@@ -3181,7 +3469,7 @@
           <a:p>
             <a:pPr lvl="0"/>
             <a:r>
-              <a:rPr lang="en-US"/>
+              <a:rPr lang="en-US" smtClean="0"/>
               <a:t>Click to edit Master text styles</a:t>
             </a:r>
           </a:p>
@@ -3204,7 +3492,7 @@
           <a:p>
             <a:fld id="{5BCAD085-E8A6-8845-BD4E-CB4CCA059FC4}" type="datetimeFigureOut">
               <a:rPr lang="en-US" smtClean="0"/>
-              <a:t>10/24/2026</a:t>
+              <a:t>1/27/13</a:t>
             </a:fld>
             <a:endParaRPr lang="en-US"/>
           </a:p>
@@ -3313,9 +3601,10 @@
           <a:lstStyle/>
           <a:p>
             <a:r>
-              <a:rPr lang="en-US"/>
+              <a:rPr lang="en-US" smtClean="0"/>
               <a:t>Click to edit Master title style</a:t>
             </a:r>
+            <a:endParaRPr lang="en-US"/>
           </a:p>
         </p:txBody>
       </p:sp>
@@ -3346,37 +3635,38 @@
           <a:p>
             <a:pPr lvl="0"/>
             <a:r>
-              <a:rPr lang="en-US"/>
+              <a:rPr lang="en-US" smtClean="0"/>
               <a:t>Click to edit Master text styles</a:t>
             </a:r>
           </a:p>
           <a:p>
             <a:pPr lvl="1"/>
             <a:r>
-              <a:rPr lang="en-US"/>
+              <a:rPr lang="en-US" smtClean="0"/>
               <a:t>Second level</a:t>
             </a:r>
           </a:p>
           <a:p>
             <a:pPr lvl="2"/>
             <a:r>
-              <a:rPr lang="en-US"/>
+              <a:rPr lang="en-US" smtClean="0"/>
               <a:t>Third level</a:t>
             </a:r>
           </a:p>
           <a:p>
             <a:pPr lvl="3"/>
             <a:r>
-              <a:rPr lang="en-US"/>
+              <a:rPr lang="en-US" smtClean="0"/>
               <a:t>Fourth level</a:t>
             </a:r>
           </a:p>
           <a:p>
             <a:pPr lvl="4"/>
             <a:r>
-              <a:rPr lang="en-US"/>
+              <a:rPr lang="en-US" smtClean="0"/>
               <a:t>Fifth level</a:t>
             </a:r>
+            <a:endParaRPr lang="en-US"/>
           </a:p>
         </p:txBody>
       </p:sp>
@@ -3415,7 +3705,7 @@
           <a:p>
             <a:fld id="{5BCAD085-E8A6-8845-BD4E-CB4CCA059FC4}" type="datetimeFigureOut">
               <a:rPr lang="en-US" smtClean="0"/>
-              <a:t>10/24/2026</a:t>
+              <a:t>1/27/13</a:t>
             </a:fld>
             <a:endParaRPr lang="en-US"/>
           </a:p>
@@ -3774,7 +4064,7 @@
 </file>
 
 <file path=ppt/slides/slide1.xml><?xml version="1.0" encoding="utf-8"?>
-<p:sld xmlns:a="http://schemas.openxmlformats.org/drawingml/2006/main" xmlns:r="http://schemas.openxmlformats.org/officeDocument/2006/relationships" xmlns:p="http://schemas.openxmlformats.org/presentationml/2006/main">
+<p:sld xmlns:a="http://schemas.openxmlformats.org/drawingml/2006/main" xmlns:p="http://schemas.openxmlformats.org/presentationml/2006/main" xmlns:r="http://schemas.openxmlformats.org/officeDocument/2006/relationships">
   <p:cSld>
     <p:bg>
       <p:bgPr>
@@ -3790,14 +4080,7 @@
         <p:cNvGrpSpPr/>
         <p:nvPr/>
       </p:nvGrpSpPr>
-      <p:grpSpPr>
-        <a:xfrm>
-          <a:off x="0" y="0"/>
-          <a:ext cx="0" cy="0"/>
-          <a:chOff x="0" y="0"/>
-          <a:chExt cx="0" cy="0"/>
-        </a:xfrm>
-      </p:grpSpPr>
+      <p:grpSpPr/>
       <p:sp>
         <p:nvSpPr>
           <p:cNvPr id="2" name="Rectangle 1"/>
@@ -3839,7 +4122,6 @@
           <a:lstStyle/>
           <a:p>
             <a:pPr algn="ctr"/>
-            <a:endParaRPr/>
           </a:p>
         </p:txBody>
       </p:sp>
@@ -3884,7 +4166,6 @@
           <a:lstStyle/>
           <a:p>
             <a:pPr algn="ctr"/>
-            <a:endParaRPr/>
           </a:p>
         </p:txBody>
       </p:sp>
@@ -3929,7 +4210,6 @@
           <a:lstStyle/>
           <a:p>
             <a:pPr algn="ctr"/>
-            <a:endParaRPr/>
           </a:p>
         </p:txBody>
       </p:sp>
@@ -3942,7 +4222,7 @@
           <p:nvPr/>
         </p:nvPicPr>
         <p:blipFill>
-          <a:blip r:embed="rId3"/>
+          <a:blip r:embed="rId2"/>
           <a:stretch>
             <a:fillRect/>
           </a:stretch>
@@ -3974,7 +4254,7 @@
           <a:noFill/>
         </p:spPr>
         <p:txBody>
-          <a:bodyPr wrap="square" lIns="0" tIns="0" rIns="0" bIns="0">
+          <a:bodyPr wrap="square" lIns="0" rIns="0" tIns="0" bIns="0">
             <a:spAutoFit/>
           </a:bodyPr>
           <a:lstStyle/>
@@ -4016,7 +4296,7 @@
           <a:noFill/>
         </p:spPr>
         <p:txBody>
-          <a:bodyPr wrap="square" lIns="0" tIns="0" rIns="0" bIns="0">
+          <a:bodyPr wrap="square" lIns="0" rIns="0" tIns="0" bIns="0">
             <a:spAutoFit/>
           </a:bodyPr>
           <a:lstStyle/>
@@ -4058,7 +4338,7 @@
           <a:noFill/>
         </p:spPr>
         <p:txBody>
-          <a:bodyPr wrap="square" lIns="0" tIns="0" rIns="0" bIns="0">
+          <a:bodyPr wrap="square" lIns="0" rIns="0" tIns="0" bIns="0">
             <a:spAutoFit/>
           </a:bodyPr>
           <a:lstStyle/>
@@ -4124,7 +4404,6 @@
           <a:lstStyle/>
           <a:p>
             <a:pPr algn="ctr"/>
-            <a:endParaRPr/>
           </a:p>
         </p:txBody>
       </p:sp>
@@ -4145,7 +4424,7 @@
           <a:noFill/>
         </p:spPr>
         <p:txBody>
-          <a:bodyPr wrap="square" lIns="0" tIns="0" rIns="0" bIns="0">
+          <a:bodyPr wrap="square" lIns="0" rIns="0" tIns="0" bIns="0">
             <a:spAutoFit/>
           </a:bodyPr>
           <a:lstStyle/>
@@ -4206,7 +4485,7 @@
           <a:noFill/>
         </p:spPr>
         <p:txBody>
-          <a:bodyPr wrap="square" lIns="0" tIns="0" rIns="0" bIns="0">
+          <a:bodyPr wrap="square" lIns="0" rIns="0" tIns="0" bIns="0">
             <a:spAutoFit/>
           </a:bodyPr>
           <a:lstStyle/>
@@ -4276,7 +4555,6 @@
           <a:lstStyle/>
           <a:p>
             <a:pPr algn="ctr"/>
-            <a:endParaRPr/>
           </a:p>
         </p:txBody>
       </p:sp>
@@ -4289,7 +4567,7 @@
           <p:nvPr/>
         </p:nvPicPr>
         <p:blipFill>
-          <a:blip r:embed="rId4"/>
+          <a:blip r:embed="rId3"/>
           <a:stretch>
             <a:fillRect/>
           </a:stretch>
@@ -4321,7 +4599,7 @@
           <a:noFill/>
         </p:spPr>
         <p:txBody>
-          <a:bodyPr wrap="square" lIns="0" tIns="0" rIns="0" bIns="0">
+          <a:bodyPr wrap="square" lIns="0" rIns="0" tIns="0" bIns="0">
             <a:spAutoFit/>
           </a:bodyPr>
           <a:lstStyle/>
@@ -4355,7 +4633,7 @@
 </file>
 
 <file path=ppt/slides/slide2.xml><?xml version="1.0" encoding="utf-8"?>
-<p:sld xmlns:a="http://schemas.openxmlformats.org/drawingml/2006/main" xmlns:r="http://schemas.openxmlformats.org/officeDocument/2006/relationships" xmlns:p="http://schemas.openxmlformats.org/presentationml/2006/main">
+<p:sld xmlns:a="http://schemas.openxmlformats.org/drawingml/2006/main" xmlns:p="http://schemas.openxmlformats.org/presentationml/2006/main" xmlns:r="http://schemas.openxmlformats.org/officeDocument/2006/relationships">
   <p:cSld>
     <p:bg>
       <p:bgPr>
@@ -4371,14 +4649,7 @@
         <p:cNvGrpSpPr/>
         <p:nvPr/>
       </p:nvGrpSpPr>
-      <p:grpSpPr>
-        <a:xfrm>
-          <a:off x="0" y="0"/>
-          <a:ext cx="0" cy="0"/>
-          <a:chOff x="0" y="0"/>
-          <a:chExt cx="0" cy="0"/>
-        </a:xfrm>
-      </p:grpSpPr>
+      <p:grpSpPr/>
       <p:sp>
         <p:nvSpPr>
           <p:cNvPr id="2" name="Rectangle 1"/>
@@ -4420,7 +4691,6 @@
           <a:lstStyle/>
           <a:p>
             <a:pPr algn="ctr"/>
-            <a:endParaRPr/>
           </a:p>
         </p:txBody>
       </p:sp>
@@ -4465,7 +4735,6 @@
           <a:lstStyle/>
           <a:p>
             <a:pPr algn="ctr"/>
-            <a:endParaRPr/>
           </a:p>
         </p:txBody>
       </p:sp>
@@ -4478,7 +4747,7 @@
           <p:nvPr/>
         </p:nvPicPr>
         <p:blipFill>
-          <a:blip r:embed="rId3"/>
+          <a:blip r:embed="rId2"/>
           <a:stretch>
             <a:fillRect/>
           </a:stretch>
@@ -4510,7 +4779,7 @@
           <a:noFill/>
         </p:spPr>
         <p:txBody>
-          <a:bodyPr wrap="square" lIns="0" tIns="0" rIns="0" bIns="0">
+          <a:bodyPr wrap="square" lIns="0" rIns="0" tIns="0" bIns="0">
             <a:spAutoFit/>
           </a:bodyPr>
           <a:lstStyle/>
@@ -4552,7 +4821,7 @@
           <a:noFill/>
         </p:spPr>
         <p:txBody>
-          <a:bodyPr wrap="square" lIns="0" tIns="0" rIns="0" bIns="0">
+          <a:bodyPr wrap="square" lIns="0" rIns="0" tIns="0" bIns="0">
             <a:spAutoFit/>
           </a:bodyPr>
           <a:lstStyle/>
@@ -4572,7 +4841,7 @@
                 </a:solidFill>
                 <a:latin typeface="Exo 2"/>
               </a:rPr>
-              <a:t>02 / 07</a:t>
+              <a:t>02 / 08</a:t>
             </a:r>
           </a:p>
         </p:txBody>
@@ -4594,7 +4863,7 @@
           <a:noFill/>
         </p:spPr>
         <p:txBody>
-          <a:bodyPr wrap="square" lIns="0" tIns="0" rIns="0" bIns="0">
+          <a:bodyPr wrap="square" lIns="0" rIns="0" tIns="0" bIns="0">
             <a:spAutoFit/>
           </a:bodyPr>
           <a:lstStyle/>
@@ -4636,7 +4905,7 @@
           <a:noFill/>
         </p:spPr>
         <p:txBody>
-          <a:bodyPr wrap="square" lIns="0" tIns="0" rIns="0" bIns="0">
+          <a:bodyPr wrap="square" lIns="0" rIns="0" tIns="0" bIns="0">
             <a:spAutoFit/>
           </a:bodyPr>
           <a:lstStyle/>
@@ -4702,7 +4971,6 @@
           <a:lstStyle/>
           <a:p>
             <a:pPr algn="ctr"/>
-            <a:endParaRPr/>
           </a:p>
         </p:txBody>
       </p:sp>
@@ -4723,7 +4991,7 @@
           <a:noFill/>
         </p:spPr>
         <p:txBody>
-          <a:bodyPr wrap="square" lIns="0" tIns="0" rIns="0" bIns="0">
+          <a:bodyPr wrap="square" lIns="0" rIns="0" tIns="0" bIns="0">
             <a:spAutoFit/>
           </a:bodyPr>
           <a:lstStyle/>
@@ -4920,7 +5188,6 @@
           <a:lstStyle/>
           <a:p>
             <a:pPr algn="ctr"/>
-            <a:endParaRPr/>
           </a:p>
         </p:txBody>
       </p:sp>
@@ -4941,7 +5208,7 @@
           <a:noFill/>
         </p:spPr>
         <p:txBody>
-          <a:bodyPr wrap="square" lIns="0" tIns="0" rIns="0" bIns="0">
+          <a:bodyPr wrap="square" lIns="0" rIns="0" tIns="0" bIns="0">
             <a:spAutoFit/>
           </a:bodyPr>
           <a:lstStyle/>
@@ -4983,7 +5250,7 @@
           <a:noFill/>
         </p:spPr>
         <p:txBody>
-          <a:bodyPr wrap="square" lIns="0" tIns="0" rIns="0" bIns="0">
+          <a:bodyPr wrap="square" lIns="0" rIns="0" tIns="0" bIns="0">
             <a:spAutoFit/>
           </a:bodyPr>
           <a:lstStyle/>
@@ -5051,7 +5318,6 @@
           <a:lstStyle/>
           <a:p>
             <a:pPr algn="ctr"/>
-            <a:endParaRPr/>
           </a:p>
         </p:txBody>
       </p:sp>
@@ -5072,7 +5338,7 @@
           <a:noFill/>
         </p:spPr>
         <p:txBody>
-          <a:bodyPr wrap="square" lIns="0" tIns="0" rIns="0" bIns="0">
+          <a:bodyPr wrap="square" lIns="0" rIns="0" tIns="0" bIns="0">
             <a:spAutoFit/>
           </a:bodyPr>
           <a:lstStyle/>
@@ -5114,7 +5380,7 @@
           <a:noFill/>
         </p:spPr>
         <p:txBody>
-          <a:bodyPr wrap="square" lIns="0" tIns="0" rIns="0" bIns="0">
+          <a:bodyPr wrap="square" lIns="0" rIns="0" tIns="0" bIns="0">
             <a:spAutoFit/>
           </a:bodyPr>
           <a:lstStyle/>
@@ -5182,7 +5448,6 @@
           <a:lstStyle/>
           <a:p>
             <a:pPr algn="ctr"/>
-            <a:endParaRPr/>
           </a:p>
         </p:txBody>
       </p:sp>
@@ -5203,7 +5468,7 @@
           <a:noFill/>
         </p:spPr>
         <p:txBody>
-          <a:bodyPr wrap="square" lIns="0" tIns="0" rIns="0" bIns="0">
+          <a:bodyPr wrap="square" lIns="0" rIns="0" tIns="0" bIns="0">
             <a:spAutoFit/>
           </a:bodyPr>
           <a:lstStyle/>
@@ -5245,7 +5510,7 @@
           <a:noFill/>
         </p:spPr>
         <p:txBody>
-          <a:bodyPr wrap="square" lIns="0" tIns="0" rIns="0" bIns="0">
+          <a:bodyPr wrap="square" lIns="0" rIns="0" tIns="0" bIns="0">
             <a:spAutoFit/>
           </a:bodyPr>
           <a:lstStyle/>
@@ -5279,7 +5544,7 @@
 </file>
 
 <file path=ppt/slides/slide3.xml><?xml version="1.0" encoding="utf-8"?>
-<p:sld xmlns:a="http://schemas.openxmlformats.org/drawingml/2006/main" xmlns:r="http://schemas.openxmlformats.org/officeDocument/2006/relationships" xmlns:p="http://schemas.openxmlformats.org/presentationml/2006/main">
+<p:sld xmlns:a="http://schemas.openxmlformats.org/drawingml/2006/main" xmlns:p="http://schemas.openxmlformats.org/presentationml/2006/main" xmlns:r="http://schemas.openxmlformats.org/officeDocument/2006/relationships">
   <p:cSld>
     <p:bg>
       <p:bgPr>
@@ -5295,14 +5560,7 @@
         <p:cNvGrpSpPr/>
         <p:nvPr/>
       </p:nvGrpSpPr>
-      <p:grpSpPr>
-        <a:xfrm>
-          <a:off x="0" y="0"/>
-          <a:ext cx="0" cy="0"/>
-          <a:chOff x="0" y="0"/>
-          <a:chExt cx="0" cy="0"/>
-        </a:xfrm>
-      </p:grpSpPr>
+      <p:grpSpPr/>
       <p:sp>
         <p:nvSpPr>
           <p:cNvPr id="2" name="Rectangle 1"/>
@@ -5344,7 +5602,6 @@
           <a:lstStyle/>
           <a:p>
             <a:pPr algn="ctr"/>
-            <a:endParaRPr/>
           </a:p>
         </p:txBody>
       </p:sp>
@@ -5389,7 +5646,6 @@
           <a:lstStyle/>
           <a:p>
             <a:pPr algn="ctr"/>
-            <a:endParaRPr/>
           </a:p>
         </p:txBody>
       </p:sp>
@@ -5402,7 +5658,7 @@
           <p:nvPr/>
         </p:nvPicPr>
         <p:blipFill>
-          <a:blip r:embed="rId3"/>
+          <a:blip r:embed="rId2"/>
           <a:stretch>
             <a:fillRect/>
           </a:stretch>
@@ -5434,7 +5690,7 @@
           <a:noFill/>
         </p:spPr>
         <p:txBody>
-          <a:bodyPr wrap="square" lIns="0" tIns="0" rIns="0" bIns="0">
+          <a:bodyPr wrap="square" lIns="0" rIns="0" tIns="0" bIns="0">
             <a:spAutoFit/>
           </a:bodyPr>
           <a:lstStyle/>
@@ -5476,7 +5732,7 @@
           <a:noFill/>
         </p:spPr>
         <p:txBody>
-          <a:bodyPr wrap="square" lIns="0" tIns="0" rIns="0" bIns="0">
+          <a:bodyPr wrap="square" lIns="0" rIns="0" tIns="0" bIns="0">
             <a:spAutoFit/>
           </a:bodyPr>
           <a:lstStyle/>
@@ -5496,7 +5752,7 @@
                 </a:solidFill>
                 <a:latin typeface="Exo 2"/>
               </a:rPr>
-              <a:t>03 / 07</a:t>
+              <a:t>03 / 08</a:t>
             </a:r>
           </a:p>
         </p:txBody>
@@ -5518,7 +5774,7 @@
           <a:noFill/>
         </p:spPr>
         <p:txBody>
-          <a:bodyPr wrap="square" lIns="0" tIns="0" rIns="0" bIns="0">
+          <a:bodyPr wrap="square" lIns="0" rIns="0" tIns="0" bIns="0">
             <a:spAutoFit/>
           </a:bodyPr>
           <a:lstStyle/>
@@ -5560,7 +5816,7 @@
           <a:noFill/>
         </p:spPr>
         <p:txBody>
-          <a:bodyPr wrap="square" lIns="0" tIns="0" rIns="0" bIns="0">
+          <a:bodyPr wrap="square" lIns="0" rIns="0" tIns="0" bIns="0">
             <a:spAutoFit/>
           </a:bodyPr>
           <a:lstStyle/>
@@ -5626,7 +5882,6 @@
           <a:lstStyle/>
           <a:p>
             <a:pPr algn="ctr"/>
-            <a:endParaRPr/>
           </a:p>
         </p:txBody>
       </p:sp>
@@ -5647,7 +5902,7 @@
           <a:noFill/>
         </p:spPr>
         <p:txBody>
-          <a:bodyPr wrap="square" lIns="0" tIns="0" rIns="0" bIns="0">
+          <a:bodyPr wrap="square" lIns="0" rIns="0" tIns="0" bIns="0">
             <a:spAutoFit/>
           </a:bodyPr>
           <a:lstStyle/>
@@ -5689,7 +5944,7 @@
           <a:noFill/>
         </p:spPr>
         <p:txBody>
-          <a:bodyPr wrap="square" lIns="0" tIns="0" rIns="0" bIns="0">
+          <a:bodyPr wrap="square" lIns="0" rIns="0" tIns="0" bIns="0">
             <a:spAutoFit/>
           </a:bodyPr>
           <a:lstStyle/>
@@ -5731,7 +5986,7 @@
           <a:noFill/>
         </p:spPr>
         <p:txBody>
-          <a:bodyPr wrap="square" lIns="0" tIns="0" rIns="0" bIns="0">
+          <a:bodyPr wrap="square" lIns="0" rIns="0" tIns="0" bIns="0">
             <a:spAutoFit/>
           </a:bodyPr>
           <a:lstStyle/>
@@ -5773,7 +6028,7 @@
           <a:noFill/>
         </p:spPr>
         <p:txBody>
-          <a:bodyPr wrap="square" lIns="0" tIns="0" rIns="0" bIns="0">
+          <a:bodyPr wrap="square" lIns="0" rIns="0" tIns="0" bIns="0">
             <a:spAutoFit/>
           </a:bodyPr>
           <a:lstStyle/>
@@ -5815,7 +6070,7 @@
           <a:noFill/>
         </p:spPr>
         <p:txBody>
-          <a:bodyPr wrap="square" lIns="0" tIns="0" rIns="0" bIns="0">
+          <a:bodyPr wrap="square" lIns="0" rIns="0" tIns="0" bIns="0">
             <a:spAutoFit/>
           </a:bodyPr>
           <a:lstStyle/>
@@ -5857,7 +6112,7 @@
           <a:noFill/>
         </p:spPr>
         <p:txBody>
-          <a:bodyPr wrap="square" lIns="0" tIns="0" rIns="0" bIns="0">
+          <a:bodyPr wrap="square" lIns="0" rIns="0" tIns="0" bIns="0">
             <a:spAutoFit/>
           </a:bodyPr>
           <a:lstStyle/>
@@ -5899,7 +6154,7 @@
           <a:noFill/>
         </p:spPr>
         <p:txBody>
-          <a:bodyPr wrap="square" lIns="0" tIns="0" rIns="0" bIns="0">
+          <a:bodyPr wrap="square" lIns="0" rIns="0" tIns="0" bIns="0">
             <a:spAutoFit/>
           </a:bodyPr>
           <a:lstStyle/>
@@ -5941,7 +6196,7 @@
           <a:noFill/>
         </p:spPr>
         <p:txBody>
-          <a:bodyPr wrap="square" lIns="0" tIns="0" rIns="0" bIns="0">
+          <a:bodyPr wrap="square" lIns="0" rIns="0" tIns="0" bIns="0">
             <a:spAutoFit/>
           </a:bodyPr>
           <a:lstStyle/>
@@ -5983,7 +6238,7 @@
           <a:noFill/>
         </p:spPr>
         <p:txBody>
-          <a:bodyPr wrap="square" lIns="0" tIns="0" rIns="0" bIns="0">
+          <a:bodyPr wrap="square" lIns="0" rIns="0" tIns="0" bIns="0">
             <a:spAutoFit/>
           </a:bodyPr>
           <a:lstStyle/>
@@ -6017,7 +6272,7 @@
           <p:nvPr/>
         </p:nvPicPr>
         <p:blipFill>
-          <a:blip r:embed="rId4"/>
+          <a:blip r:embed="rId3"/>
           <a:stretch>
             <a:fillRect/>
           </a:stretch>
@@ -6046,7 +6301,7 @@
 </file>
 
 <file path=ppt/slides/slide4.xml><?xml version="1.0" encoding="utf-8"?>
-<p:sld xmlns:a="http://schemas.openxmlformats.org/drawingml/2006/main" xmlns:r="http://schemas.openxmlformats.org/officeDocument/2006/relationships" xmlns:p="http://schemas.openxmlformats.org/presentationml/2006/main">
+<p:sld xmlns:a="http://schemas.openxmlformats.org/drawingml/2006/main" xmlns:p="http://schemas.openxmlformats.org/presentationml/2006/main" xmlns:r="http://schemas.openxmlformats.org/officeDocument/2006/relationships">
   <p:cSld>
     <p:bg>
       <p:bgPr>
@@ -6062,14 +6317,7 @@
         <p:cNvGrpSpPr/>
         <p:nvPr/>
       </p:nvGrpSpPr>
-      <p:grpSpPr>
-        <a:xfrm>
-          <a:off x="0" y="0"/>
-          <a:ext cx="0" cy="0"/>
-          <a:chOff x="0" y="0"/>
-          <a:chExt cx="0" cy="0"/>
-        </a:xfrm>
-      </p:grpSpPr>
+      <p:grpSpPr/>
       <p:sp>
         <p:nvSpPr>
           <p:cNvPr id="2" name="Rectangle 1"/>
@@ -6111,7 +6359,6 @@
           <a:lstStyle/>
           <a:p>
             <a:pPr algn="ctr"/>
-            <a:endParaRPr/>
           </a:p>
         </p:txBody>
       </p:sp>
@@ -6156,13 +6403,419 @@
           <a:lstStyle/>
           <a:p>
             <a:pPr algn="ctr"/>
-            <a:endParaRPr/>
           </a:p>
         </p:txBody>
       </p:sp>
       <p:pic>
         <p:nvPicPr>
           <p:cNvPr id="4" name="Picture 3" descr="aeza-mark.png"/>
+          <p:cNvPicPr>
+            <a:picLocks noChangeAspect="1"/>
+          </p:cNvPicPr>
+          <p:nvPr/>
+        </p:nvPicPr>
+        <p:blipFill>
+          <a:blip r:embed="rId2"/>
+          <a:stretch>
+            <a:fillRect/>
+          </a:stretch>
+        </p:blipFill>
+        <p:spPr>
+          <a:xfrm>
+            <a:off x="777240" y="6455664"/>
+            <a:ext cx="201168" cy="64374"/>
+          </a:xfrm>
+          <a:prstGeom prst="rect">
+            <a:avLst/>
+          </a:prstGeom>
+        </p:spPr>
+      </p:pic>
+      <p:sp>
+        <p:nvSpPr>
+          <p:cNvPr id="5" name="TextBox 4"/>
+          <p:cNvSpPr txBox="1"/>
+          <p:nvPr/>
+        </p:nvSpPr>
+        <p:spPr>
+          <a:xfrm>
+            <a:off x="1069848" y="6473952"/>
+            <a:ext cx="5486400" cy="274320"/>
+          </a:xfrm>
+          <a:prstGeom prst="rect">
+            <a:avLst/>
+          </a:prstGeom>
+          <a:noFill/>
+        </p:spPr>
+        <p:txBody>
+          <a:bodyPr wrap="square" lIns="0" rIns="0" tIns="0" bIns="0">
+            <a:spAutoFit/>
+          </a:bodyPr>
+          <a:lstStyle/>
+          <a:p>
+            <a:pPr algn="l">
+              <a:lnSpc>
+                <a:spcPct val="115000"/>
+              </a:lnSpc>
+              <a:spcAft>
+                <a:spcPts val="0"/>
+              </a:spcAft>
+            </a:pPr>
+            <a:r>
+              <a:rPr sz="1000" b="1">
+                <a:solidFill>
+                  <a:srgbClr val="182D48"/>
+                </a:solidFill>
+                <a:latin typeface="Exo 2"/>
+              </a:rPr>
+              <a:t>AÉZA · ОТТОК · Risk Desk</a:t>
+            </a:r>
+          </a:p>
+        </p:txBody>
+      </p:sp>
+      <p:sp>
+        <p:nvSpPr>
+          <p:cNvPr id="6" name="TextBox 5"/>
+          <p:cNvSpPr txBox="1"/>
+          <p:nvPr/>
+        </p:nvSpPr>
+        <p:spPr>
+          <a:xfrm>
+            <a:off x="10682935" y="6473952"/>
+            <a:ext cx="731520" cy="274320"/>
+          </a:xfrm>
+          <a:prstGeom prst="rect">
+            <a:avLst/>
+          </a:prstGeom>
+          <a:noFill/>
+        </p:spPr>
+        <p:txBody>
+          <a:bodyPr wrap="square" lIns="0" rIns="0" tIns="0" bIns="0">
+            <a:spAutoFit/>
+          </a:bodyPr>
+          <a:lstStyle/>
+          <a:p>
+            <a:pPr algn="r">
+              <a:lnSpc>
+                <a:spcPct val="115000"/>
+              </a:lnSpc>
+              <a:spcAft>
+                <a:spcPts val="0"/>
+              </a:spcAft>
+            </a:pPr>
+            <a:r>
+              <a:rPr sz="1000" b="1">
+                <a:solidFill>
+                  <a:srgbClr val="182D48"/>
+                </a:solidFill>
+                <a:latin typeface="Exo 2"/>
+              </a:rPr>
+              <a:t>04 / 08</a:t>
+            </a:r>
+          </a:p>
+        </p:txBody>
+      </p:sp>
+      <p:sp>
+        <p:nvSpPr>
+          <p:cNvPr id="7" name="TextBox 6"/>
+          <p:cNvSpPr txBox="1"/>
+          <p:nvPr/>
+        </p:nvSpPr>
+        <p:spPr>
+          <a:xfrm>
+            <a:off x="777240" y="411480"/>
+            <a:ext cx="8229600" cy="274320"/>
+          </a:xfrm>
+          <a:prstGeom prst="rect">
+            <a:avLst/>
+          </a:prstGeom>
+          <a:noFill/>
+        </p:spPr>
+        <p:txBody>
+          <a:bodyPr wrap="square" lIns="0" rIns="0" tIns="0" bIns="0">
+            <a:spAutoFit/>
+          </a:bodyPr>
+          <a:lstStyle/>
+          <a:p>
+            <a:pPr algn="l">
+              <a:lnSpc>
+                <a:spcPct val="115000"/>
+              </a:lnSpc>
+              <a:spcAft>
+                <a:spcPts val="0"/>
+              </a:spcAft>
+            </a:pPr>
+            <a:r>
+              <a:rPr sz="1100" b="1">
+                <a:solidFill>
+                  <a:srgbClr val="182D48"/>
+                </a:solidFill>
+                <a:latin typeface="Exo 2"/>
+              </a:rPr>
+              <a:t>ДЕЙСТВИЕ И RETENTION</a:t>
+            </a:r>
+          </a:p>
+        </p:txBody>
+      </p:sp>
+      <p:sp>
+        <p:nvSpPr>
+          <p:cNvPr id="8" name="TextBox 7"/>
+          <p:cNvSpPr txBox="1"/>
+          <p:nvPr/>
+        </p:nvSpPr>
+        <p:spPr>
+          <a:xfrm>
+            <a:off x="777240" y="749808"/>
+            <a:ext cx="10607040" cy="868680"/>
+          </a:xfrm>
+          <a:prstGeom prst="rect">
+            <a:avLst/>
+          </a:prstGeom>
+          <a:noFill/>
+        </p:spPr>
+        <p:txBody>
+          <a:bodyPr wrap="square" lIns="0" rIns="0" tIns="0" bIns="0">
+            <a:spAutoFit/>
+          </a:bodyPr>
+          <a:lstStyle/>
+          <a:p>
+            <a:pPr algn="l">
+              <a:lnSpc>
+                <a:spcPct val="115000"/>
+              </a:lnSpc>
+              <a:spcAft>
+                <a:spcPts val="0"/>
+              </a:spcAft>
+            </a:pPr>
+            <a:r>
+              <a:rPr sz="3400" b="1">
+                <a:solidFill>
+                  <a:srgbClr val="000000"/>
+                </a:solidFill>
+                <a:latin typeface="Exo 2"/>
+              </a:rPr>
+              <a:t>От анализа к действию: удержание в 1 клик</a:t>
+            </a:r>
+          </a:p>
+        </p:txBody>
+      </p:sp>
+      <p:sp>
+        <p:nvSpPr>
+          <p:cNvPr id="9" name="Rectangle 8"/>
+          <p:cNvSpPr/>
+          <p:nvPr/>
+        </p:nvSpPr>
+        <p:spPr>
+          <a:xfrm>
+            <a:off x="777240" y="1645919"/>
+            <a:ext cx="1097280" cy="64008"/>
+          </a:xfrm>
+          <a:prstGeom prst="rect">
+            <a:avLst/>
+          </a:prstGeom>
+          <a:solidFill>
+            <a:srgbClr val="4CC6F1"/>
+          </a:solidFill>
+          <a:ln>
+            <a:noFill/>
+          </a:ln>
+          <a:effectLst/>
+        </p:spPr>
+        <p:style>
+          <a:lnRef idx="1">
+            <a:schemeClr val="accent1"/>
+          </a:lnRef>
+          <a:fillRef idx="3">
+            <a:schemeClr val="accent1"/>
+          </a:fillRef>
+          <a:effectRef idx="2">
+            <a:schemeClr val="accent1"/>
+          </a:effectRef>
+          <a:fontRef idx="minor">
+            <a:schemeClr val="lt1"/>
+          </a:fontRef>
+        </p:style>
+        <p:txBody>
+          <a:bodyPr rtlCol="0" anchor="ctr"/>
+          <a:lstStyle/>
+          <a:p>
+            <a:pPr algn="ctr"/>
+          </a:p>
+        </p:txBody>
+      </p:sp>
+      <p:sp>
+        <p:nvSpPr>
+          <p:cNvPr id="10" name="TextBox 9"/>
+          <p:cNvSpPr txBox="1"/>
+          <p:nvPr/>
+        </p:nvSpPr>
+        <p:spPr>
+          <a:xfrm>
+            <a:off x="777240" y="2148840"/>
+            <a:ext cx="5852160" cy="3840480"/>
+          </a:xfrm>
+          <a:prstGeom prst="rect">
+            <a:avLst/>
+          </a:prstGeom>
+          <a:noFill/>
+        </p:spPr>
+        <p:txBody>
+          <a:bodyPr wrap="square" lIns="0" rIns="0" tIns="0" bIns="0">
+            <a:spAutoFit/>
+          </a:bodyPr>
+          <a:lstStyle/>
+          <a:p>
+            <a:pPr marL="320040" indent="-320040">
+              <a:lnSpc>
+                <a:spcPct val="125000"/>
+              </a:lnSpc>
+              <a:spcAft>
+                <a:spcPts val="1600"/>
+              </a:spcAft>
+            </a:pPr>
+            <a:r>
+              <a:rPr sz="1700" b="1">
+                <a:solidFill>
+                  <a:srgbClr val="4CC6F1"/>
+                </a:solidFill>
+                <a:latin typeface="Exo 2"/>
+              </a:rPr>
+              <a:t>—  </a:t>
+            </a:r>
+            <a:r>
+              <a:rPr sz="1700" b="1">
+                <a:solidFill>
+                  <a:srgbClr val="000000"/>
+                </a:solidFill>
+                <a:latin typeface="Exo 2"/>
+              </a:rPr>
+              <a:t>Маркетолог не тратит время на рутину: </a:t>
+            </a:r>
+            <a:r>
+              <a:rPr sz="1700" b="0">
+                <a:solidFill>
+                  <a:srgbClr val="000000"/>
+                </a:solidFill>
+                <a:latin typeface="Inter"/>
+              </a:rPr>
+              <a:t>система сама формирует контекст обращения.</a:t>
+            </a:r>
+          </a:p>
+          <a:p>
+            <a:pPr marL="320040" indent="-320040">
+              <a:lnSpc>
+                <a:spcPct val="125000"/>
+              </a:lnSpc>
+              <a:spcAft>
+                <a:spcPts val="1600"/>
+              </a:spcAft>
+            </a:pPr>
+            <a:r>
+              <a:rPr sz="1700" b="1">
+                <a:solidFill>
+                  <a:srgbClr val="4CC6F1"/>
+                </a:solidFill>
+                <a:latin typeface="Exo 2"/>
+              </a:rPr>
+              <a:t>—  </a:t>
+            </a:r>
+            <a:r>
+              <a:rPr sz="1700" b="1">
+                <a:solidFill>
+                  <a:srgbClr val="000000"/>
+                </a:solidFill>
+                <a:latin typeface="Exo 2"/>
+              </a:rPr>
+              <a:t>7 готовых сценариев удержания: </a:t>
+            </a:r>
+            <a:r>
+              <a:rPr sz="1700" b="0">
+                <a:solidFill>
+                  <a:srgbClr val="000000"/>
+                </a:solidFill>
+                <a:latin typeface="Inter"/>
+              </a:rPr>
+              <a:t>от нехватки денег до зависшей оплаты и блокировки.</a:t>
+            </a:r>
+          </a:p>
+          <a:p>
+            <a:pPr marL="320040" indent="-320040">
+              <a:lnSpc>
+                <a:spcPct val="125000"/>
+              </a:lnSpc>
+              <a:spcAft>
+                <a:spcPts val="1600"/>
+              </a:spcAft>
+            </a:pPr>
+            <a:r>
+              <a:rPr sz="1700" b="1">
+                <a:solidFill>
+                  <a:srgbClr val="4CC6F1"/>
+                </a:solidFill>
+                <a:latin typeface="Exo 2"/>
+              </a:rPr>
+              <a:t>—  </a:t>
+            </a:r>
+            <a:r>
+              <a:rPr sz="1700" b="1">
+                <a:solidFill>
+                  <a:srgbClr val="000000"/>
+                </a:solidFill>
+                <a:latin typeface="Exo 2"/>
+              </a:rPr>
+              <a:t>Умная автоподстановка: </a:t>
+            </a:r>
+            <a:r>
+              <a:rPr sz="1700" b="0">
+                <a:solidFill>
+                  <a:srgbClr val="000000"/>
+                </a:solidFill>
+                <a:latin typeface="Inter"/>
+              </a:rPr>
+              <a:t>в письмо подставляются имя, название сервера, сумма доплаты и промокод.</a:t>
+            </a:r>
+          </a:p>
+          <a:p>
+            <a:pPr marL="320040" indent="-320040">
+              <a:lnSpc>
+                <a:spcPct val="125000"/>
+              </a:lnSpc>
+              <a:spcAft>
+                <a:spcPts val="1600"/>
+              </a:spcAft>
+            </a:pPr>
+            <a:r>
+              <a:rPr sz="1700" b="1">
+                <a:solidFill>
+                  <a:srgbClr val="4CC6F1"/>
+                </a:solidFill>
+                <a:latin typeface="Exo 2"/>
+              </a:rPr>
+              <a:t>—  </a:t>
+            </a:r>
+            <a:r>
+              <a:rPr sz="1700" b="1">
+                <a:solidFill>
+                  <a:srgbClr val="000000"/>
+                </a:solidFill>
+                <a:latin typeface="Exo 2"/>
+              </a:rPr>
+              <a:t>Мгновенное действие: </a:t>
+            </a:r>
+            <a:r>
+              <a:rPr sz="1700" b="0">
+                <a:solidFill>
+                  <a:srgbClr val="000000"/>
+                </a:solidFill>
+                <a:latin typeface="Inter"/>
+              </a:rPr>
+              <a:t>копирование текста в один клик или прямая ссылка mailto: для отправки.</a:t>
+            </a:r>
+          </a:p>
+        </p:txBody>
+      </p:sp>
+      <p:pic>
+        <p:nvPicPr>
+          <p:cNvPr id="11" name="Picture 10" descr="email-crop.png"/>
           <p:cNvPicPr>
             <a:picLocks noChangeAspect="1"/>
           </p:cNvPicPr>
@@ -6176,1186 +6829,7 @@
         </p:blipFill>
         <p:spPr>
           <a:xfrm>
-            <a:off x="777240" y="6455664"/>
-            <a:ext cx="201168" cy="64374"/>
-          </a:xfrm>
-          <a:prstGeom prst="rect">
-            <a:avLst/>
-          </a:prstGeom>
-        </p:spPr>
-      </p:pic>
-      <p:sp>
-        <p:nvSpPr>
-          <p:cNvPr id="5" name="TextBox 4"/>
-          <p:cNvSpPr txBox="1"/>
-          <p:nvPr/>
-        </p:nvSpPr>
-        <p:spPr>
-          <a:xfrm>
-            <a:off x="1069848" y="6473952"/>
-            <a:ext cx="5486400" cy="274320"/>
-          </a:xfrm>
-          <a:prstGeom prst="rect">
-            <a:avLst/>
-          </a:prstGeom>
-          <a:noFill/>
-        </p:spPr>
-        <p:txBody>
-          <a:bodyPr wrap="square" lIns="0" tIns="0" rIns="0" bIns="0">
-            <a:spAutoFit/>
-          </a:bodyPr>
-          <a:lstStyle/>
-          <a:p>
-            <a:pPr algn="l">
-              <a:lnSpc>
-                <a:spcPct val="115000"/>
-              </a:lnSpc>
-              <a:spcAft>
-                <a:spcPts val="0"/>
-              </a:spcAft>
-            </a:pPr>
-            <a:r>
-              <a:rPr sz="1000" b="1">
-                <a:solidFill>
-                  <a:srgbClr val="182D48"/>
-                </a:solidFill>
-                <a:latin typeface="Exo 2"/>
-              </a:rPr>
-              <a:t>AÉZA · ОТТОК · Risk Desk</a:t>
-            </a:r>
-          </a:p>
-        </p:txBody>
-      </p:sp>
-      <p:sp>
-        <p:nvSpPr>
-          <p:cNvPr id="6" name="TextBox 5"/>
-          <p:cNvSpPr txBox="1"/>
-          <p:nvPr/>
-        </p:nvSpPr>
-        <p:spPr>
-          <a:xfrm>
-            <a:off x="10682935" y="6473952"/>
-            <a:ext cx="731520" cy="274320"/>
-          </a:xfrm>
-          <a:prstGeom prst="rect">
-            <a:avLst/>
-          </a:prstGeom>
-          <a:noFill/>
-        </p:spPr>
-        <p:txBody>
-          <a:bodyPr wrap="square" lIns="0" tIns="0" rIns="0" bIns="0">
-            <a:spAutoFit/>
-          </a:bodyPr>
-          <a:lstStyle/>
-          <a:p>
-            <a:pPr algn="r">
-              <a:lnSpc>
-                <a:spcPct val="115000"/>
-              </a:lnSpc>
-              <a:spcAft>
-                <a:spcPts val="0"/>
-              </a:spcAft>
-            </a:pPr>
-            <a:r>
-              <a:rPr sz="1000" b="1">
-                <a:solidFill>
-                  <a:srgbClr val="182D48"/>
-                </a:solidFill>
-                <a:latin typeface="Exo 2"/>
-              </a:rPr>
-              <a:t>04 / 07</a:t>
-            </a:r>
-          </a:p>
-        </p:txBody>
-      </p:sp>
-      <p:sp>
-        <p:nvSpPr>
-          <p:cNvPr id="7" name="TextBox 6"/>
-          <p:cNvSpPr txBox="1"/>
-          <p:nvPr/>
-        </p:nvSpPr>
-        <p:spPr>
-          <a:xfrm>
-            <a:off x="777240" y="411480"/>
-            <a:ext cx="8229600" cy="274320"/>
-          </a:xfrm>
-          <a:prstGeom prst="rect">
-            <a:avLst/>
-          </a:prstGeom>
-          <a:noFill/>
-        </p:spPr>
-        <p:txBody>
-          <a:bodyPr wrap="square" lIns="0" tIns="0" rIns="0" bIns="0">
-            <a:spAutoFit/>
-          </a:bodyPr>
-          <a:lstStyle/>
-          <a:p>
-            <a:pPr algn="l">
-              <a:lnSpc>
-                <a:spcPct val="115000"/>
-              </a:lnSpc>
-              <a:spcAft>
-                <a:spcPts val="0"/>
-              </a:spcAft>
-            </a:pPr>
-            <a:r>
-              <a:rPr sz="1100" b="1">
-                <a:solidFill>
-                  <a:srgbClr val="182D48"/>
-                </a:solidFill>
-                <a:latin typeface="Exo 2"/>
-              </a:rPr>
-              <a:t>ДЕЙСТВИЕ И RETENTION</a:t>
-            </a:r>
-          </a:p>
-        </p:txBody>
-      </p:sp>
-      <p:sp>
-        <p:nvSpPr>
-          <p:cNvPr id="8" name="TextBox 7"/>
-          <p:cNvSpPr txBox="1"/>
-          <p:nvPr/>
-        </p:nvSpPr>
-        <p:spPr>
-          <a:xfrm>
-            <a:off x="777240" y="749808"/>
-            <a:ext cx="6400800" cy="1168077"/>
-          </a:xfrm>
-          <a:prstGeom prst="rect">
-            <a:avLst/>
-          </a:prstGeom>
-          <a:noFill/>
-        </p:spPr>
-        <p:txBody>
-          <a:bodyPr wrap="square" lIns="0" tIns="0" rIns="0" bIns="0">
-            <a:spAutoFit/>
-          </a:bodyPr>
-          <a:lstStyle/>
-          <a:p>
-            <a:pPr algn="l">
-              <a:lnSpc>
-                <a:spcPct val="115000"/>
-              </a:lnSpc>
-              <a:spcAft>
-                <a:spcPts val="0"/>
-              </a:spcAft>
-            </a:pPr>
-            <a:r>
-              <a:rPr sz="3400" b="1" dirty="0" err="1">
-                <a:solidFill>
-                  <a:srgbClr val="000000"/>
-                </a:solidFill>
-                <a:latin typeface="Exo 2"/>
-              </a:rPr>
-              <a:t>От</a:t>
-            </a:r>
-            <a:r>
-              <a:rPr sz="3400" b="1" dirty="0">
-                <a:solidFill>
-                  <a:srgbClr val="000000"/>
-                </a:solidFill>
-                <a:latin typeface="Exo 2"/>
-              </a:rPr>
-              <a:t> </a:t>
-            </a:r>
-            <a:r>
-              <a:rPr sz="3400" b="1" dirty="0" err="1">
-                <a:solidFill>
-                  <a:srgbClr val="000000"/>
-                </a:solidFill>
-                <a:latin typeface="Exo 2"/>
-              </a:rPr>
-              <a:t>анализа</a:t>
-            </a:r>
-            <a:r>
-              <a:rPr sz="3400" b="1" dirty="0">
-                <a:solidFill>
-                  <a:srgbClr val="000000"/>
-                </a:solidFill>
-                <a:latin typeface="Exo 2"/>
-              </a:rPr>
-              <a:t> к </a:t>
-            </a:r>
-            <a:r>
-              <a:rPr sz="3400" b="1" dirty="0" err="1">
-                <a:solidFill>
-                  <a:srgbClr val="000000"/>
-                </a:solidFill>
-                <a:latin typeface="Exo 2"/>
-              </a:rPr>
-              <a:t>действию</a:t>
-            </a:r>
-            <a:r>
-              <a:rPr sz="3400" b="1" dirty="0">
-                <a:solidFill>
-                  <a:srgbClr val="000000"/>
-                </a:solidFill>
-                <a:latin typeface="Exo 2"/>
-              </a:rPr>
-              <a:t>: </a:t>
-            </a:r>
-            <a:r>
-              <a:rPr sz="3400" b="1" dirty="0" err="1">
-                <a:solidFill>
-                  <a:srgbClr val="000000"/>
-                </a:solidFill>
-                <a:latin typeface="Exo 2"/>
-              </a:rPr>
-              <a:t>удержание</a:t>
-            </a:r>
-            <a:r>
-              <a:rPr sz="3400" b="1" dirty="0">
-                <a:solidFill>
-                  <a:srgbClr val="000000"/>
-                </a:solidFill>
-                <a:latin typeface="Exo 2"/>
-              </a:rPr>
-              <a:t> в 1 </a:t>
-            </a:r>
-            <a:r>
-              <a:rPr sz="3400" b="1" dirty="0" err="1">
-                <a:solidFill>
-                  <a:srgbClr val="000000"/>
-                </a:solidFill>
-                <a:latin typeface="Exo 2"/>
-              </a:rPr>
-              <a:t>клик</a:t>
-            </a:r>
-            <a:endParaRPr sz="3400" b="1" dirty="0">
-              <a:solidFill>
-                <a:srgbClr val="000000"/>
-              </a:solidFill>
-              <a:latin typeface="Exo 2"/>
-            </a:endParaRPr>
-          </a:p>
-        </p:txBody>
-      </p:sp>
-      <p:sp>
-        <p:nvSpPr>
-          <p:cNvPr id="9" name="Rectangle 8"/>
-          <p:cNvSpPr/>
-          <p:nvPr/>
-        </p:nvSpPr>
-        <p:spPr>
-          <a:xfrm>
-            <a:off x="777240" y="2001358"/>
-            <a:ext cx="1097280" cy="64008"/>
-          </a:xfrm>
-          <a:prstGeom prst="rect">
-            <a:avLst/>
-          </a:prstGeom>
-          <a:solidFill>
-            <a:srgbClr val="4CC6F1"/>
-          </a:solidFill>
-          <a:ln>
-            <a:noFill/>
-          </a:ln>
-          <a:effectLst/>
-        </p:spPr>
-        <p:style>
-          <a:lnRef idx="1">
-            <a:schemeClr val="accent1"/>
-          </a:lnRef>
-          <a:fillRef idx="3">
-            <a:schemeClr val="accent1"/>
-          </a:fillRef>
-          <a:effectRef idx="2">
-            <a:schemeClr val="accent1"/>
-          </a:effectRef>
-          <a:fontRef idx="minor">
-            <a:schemeClr val="lt1"/>
-          </a:fontRef>
-        </p:style>
-        <p:txBody>
-          <a:bodyPr rtlCol="0" anchor="ctr"/>
-          <a:lstStyle/>
-          <a:p>
-            <a:pPr algn="ctr"/>
-            <a:endParaRPr/>
-          </a:p>
-        </p:txBody>
-      </p:sp>
-      <p:sp>
-        <p:nvSpPr>
-          <p:cNvPr id="10" name="TextBox 9"/>
-          <p:cNvSpPr txBox="1"/>
-          <p:nvPr/>
-        </p:nvSpPr>
-        <p:spPr>
-          <a:xfrm>
-            <a:off x="777240" y="2148840"/>
-            <a:ext cx="5852160" cy="3840480"/>
-          </a:xfrm>
-          <a:prstGeom prst="rect">
-            <a:avLst/>
-          </a:prstGeom>
-          <a:noFill/>
-        </p:spPr>
-        <p:txBody>
-          <a:bodyPr wrap="square" lIns="0" tIns="0" rIns="0" bIns="0">
-            <a:spAutoFit/>
-          </a:bodyPr>
-          <a:lstStyle/>
-          <a:p>
-            <a:pPr marL="320040" indent="-320040">
-              <a:lnSpc>
-                <a:spcPct val="125000"/>
-              </a:lnSpc>
-              <a:spcAft>
-                <a:spcPts val="1600"/>
-              </a:spcAft>
-            </a:pPr>
-            <a:r>
-              <a:rPr sz="1700" b="1" dirty="0">
-                <a:solidFill>
-                  <a:srgbClr val="4CC6F1"/>
-                </a:solidFill>
-                <a:latin typeface="Exo 2"/>
-              </a:rPr>
-              <a:t>—  </a:t>
-            </a:r>
-            <a:r>
-              <a:rPr sz="1700" b="1" dirty="0" err="1">
-                <a:solidFill>
-                  <a:srgbClr val="000000"/>
-                </a:solidFill>
-                <a:latin typeface="Exo 2"/>
-              </a:rPr>
-              <a:t>Маркетолог</a:t>
-            </a:r>
-            <a:r>
-              <a:rPr sz="1700" b="1" dirty="0">
-                <a:solidFill>
-                  <a:srgbClr val="000000"/>
-                </a:solidFill>
-                <a:latin typeface="Exo 2"/>
-              </a:rPr>
-              <a:t> </a:t>
-            </a:r>
-            <a:r>
-              <a:rPr sz="1700" b="1" dirty="0" err="1">
-                <a:solidFill>
-                  <a:srgbClr val="000000"/>
-                </a:solidFill>
-                <a:latin typeface="Exo 2"/>
-              </a:rPr>
-              <a:t>не</a:t>
-            </a:r>
-            <a:r>
-              <a:rPr sz="1700" b="1" dirty="0">
-                <a:solidFill>
-                  <a:srgbClr val="000000"/>
-                </a:solidFill>
-                <a:latin typeface="Exo 2"/>
-              </a:rPr>
-              <a:t> </a:t>
-            </a:r>
-            <a:r>
-              <a:rPr sz="1700" b="1" dirty="0" err="1">
-                <a:solidFill>
-                  <a:srgbClr val="000000"/>
-                </a:solidFill>
-                <a:latin typeface="Exo 2"/>
-              </a:rPr>
-              <a:t>тратит</a:t>
-            </a:r>
-            <a:r>
-              <a:rPr sz="1700" b="1" dirty="0">
-                <a:solidFill>
-                  <a:srgbClr val="000000"/>
-                </a:solidFill>
-                <a:latin typeface="Exo 2"/>
-              </a:rPr>
-              <a:t> </a:t>
-            </a:r>
-            <a:r>
-              <a:rPr sz="1700" b="1" dirty="0" err="1">
-                <a:solidFill>
-                  <a:srgbClr val="000000"/>
-                </a:solidFill>
-                <a:latin typeface="Exo 2"/>
-              </a:rPr>
-              <a:t>время</a:t>
-            </a:r>
-            <a:r>
-              <a:rPr sz="1700" b="1" dirty="0">
-                <a:solidFill>
-                  <a:srgbClr val="000000"/>
-                </a:solidFill>
-                <a:latin typeface="Exo 2"/>
-              </a:rPr>
-              <a:t> </a:t>
-            </a:r>
-            <a:r>
-              <a:rPr sz="1700" b="1" dirty="0" err="1">
-                <a:solidFill>
-                  <a:srgbClr val="000000"/>
-                </a:solidFill>
-                <a:latin typeface="Exo 2"/>
-              </a:rPr>
-              <a:t>на</a:t>
-            </a:r>
-            <a:r>
-              <a:rPr sz="1700" b="1" dirty="0">
-                <a:solidFill>
-                  <a:srgbClr val="000000"/>
-                </a:solidFill>
-                <a:latin typeface="Exo 2"/>
-              </a:rPr>
-              <a:t> </a:t>
-            </a:r>
-            <a:r>
-              <a:rPr sz="1700" b="1" dirty="0" err="1">
-                <a:solidFill>
-                  <a:srgbClr val="000000"/>
-                </a:solidFill>
-                <a:latin typeface="Exo 2"/>
-              </a:rPr>
-              <a:t>рутину</a:t>
-            </a:r>
-            <a:r>
-              <a:rPr sz="1700" b="1" dirty="0">
-                <a:solidFill>
-                  <a:srgbClr val="000000"/>
-                </a:solidFill>
-                <a:latin typeface="Exo 2"/>
-              </a:rPr>
-              <a:t>: </a:t>
-            </a:r>
-            <a:r>
-              <a:rPr sz="1700" b="0" dirty="0" err="1">
-                <a:solidFill>
-                  <a:srgbClr val="000000"/>
-                </a:solidFill>
-                <a:latin typeface="Inter"/>
-              </a:rPr>
-              <a:t>система</a:t>
-            </a:r>
-            <a:r>
-              <a:rPr sz="1700" b="0" dirty="0">
-                <a:solidFill>
-                  <a:srgbClr val="000000"/>
-                </a:solidFill>
-                <a:latin typeface="Inter"/>
-              </a:rPr>
-              <a:t> </a:t>
-            </a:r>
-            <a:r>
-              <a:rPr sz="1700" b="0" dirty="0" err="1">
-                <a:solidFill>
-                  <a:srgbClr val="000000"/>
-                </a:solidFill>
-                <a:latin typeface="Inter"/>
-              </a:rPr>
-              <a:t>сама</a:t>
-            </a:r>
-            <a:r>
-              <a:rPr sz="1700" b="0" dirty="0">
-                <a:solidFill>
-                  <a:srgbClr val="000000"/>
-                </a:solidFill>
-                <a:latin typeface="Inter"/>
-              </a:rPr>
-              <a:t> </a:t>
-            </a:r>
-            <a:r>
-              <a:rPr sz="1700" b="0" dirty="0" err="1">
-                <a:solidFill>
-                  <a:srgbClr val="000000"/>
-                </a:solidFill>
-                <a:latin typeface="Inter"/>
-              </a:rPr>
-              <a:t>формирует</a:t>
-            </a:r>
-            <a:r>
-              <a:rPr sz="1700" b="0" dirty="0">
-                <a:solidFill>
-                  <a:srgbClr val="000000"/>
-                </a:solidFill>
-                <a:latin typeface="Inter"/>
-              </a:rPr>
-              <a:t> </a:t>
-            </a:r>
-            <a:r>
-              <a:rPr sz="1700" b="0" dirty="0" err="1">
-                <a:solidFill>
-                  <a:srgbClr val="000000"/>
-                </a:solidFill>
-                <a:latin typeface="Inter"/>
-              </a:rPr>
-              <a:t>контекст</a:t>
-            </a:r>
-            <a:r>
-              <a:rPr sz="1700" b="0" dirty="0">
-                <a:solidFill>
-                  <a:srgbClr val="000000"/>
-                </a:solidFill>
-                <a:latin typeface="Inter"/>
-              </a:rPr>
-              <a:t> </a:t>
-            </a:r>
-            <a:r>
-              <a:rPr sz="1700" b="0" dirty="0" err="1">
-                <a:solidFill>
-                  <a:srgbClr val="000000"/>
-                </a:solidFill>
-                <a:latin typeface="Inter"/>
-              </a:rPr>
-              <a:t>обращения</a:t>
-            </a:r>
-            <a:r>
-              <a:rPr sz="1700" b="0" dirty="0">
-                <a:solidFill>
-                  <a:srgbClr val="000000"/>
-                </a:solidFill>
-                <a:latin typeface="Inter"/>
-              </a:rPr>
-              <a:t>.</a:t>
-            </a:r>
-          </a:p>
-          <a:p>
-            <a:pPr marL="320040" indent="-320040">
-              <a:lnSpc>
-                <a:spcPct val="125000"/>
-              </a:lnSpc>
-              <a:spcAft>
-                <a:spcPts val="1600"/>
-              </a:spcAft>
-            </a:pPr>
-            <a:r>
-              <a:rPr sz="1700" b="1" dirty="0">
-                <a:solidFill>
-                  <a:srgbClr val="4CC6F1"/>
-                </a:solidFill>
-                <a:latin typeface="Exo 2"/>
-              </a:rPr>
-              <a:t>—  </a:t>
-            </a:r>
-            <a:r>
-              <a:rPr sz="1700" b="1" dirty="0">
-                <a:solidFill>
-                  <a:srgbClr val="000000"/>
-                </a:solidFill>
-                <a:latin typeface="Exo 2"/>
-              </a:rPr>
-              <a:t>7 </a:t>
-            </a:r>
-            <a:r>
-              <a:rPr sz="1700" b="1" dirty="0" err="1">
-                <a:solidFill>
-                  <a:srgbClr val="000000"/>
-                </a:solidFill>
-                <a:latin typeface="Exo 2"/>
-              </a:rPr>
-              <a:t>готовых</a:t>
-            </a:r>
-            <a:r>
-              <a:rPr sz="1700" b="1" dirty="0">
-                <a:solidFill>
-                  <a:srgbClr val="000000"/>
-                </a:solidFill>
-                <a:latin typeface="Exo 2"/>
-              </a:rPr>
-              <a:t> </a:t>
-            </a:r>
-            <a:r>
-              <a:rPr sz="1700" b="1" dirty="0" err="1">
-                <a:solidFill>
-                  <a:srgbClr val="000000"/>
-                </a:solidFill>
-                <a:latin typeface="Exo 2"/>
-              </a:rPr>
-              <a:t>сценариев</a:t>
-            </a:r>
-            <a:r>
-              <a:rPr sz="1700" b="1" dirty="0">
-                <a:solidFill>
-                  <a:srgbClr val="000000"/>
-                </a:solidFill>
-                <a:latin typeface="Exo 2"/>
-              </a:rPr>
-              <a:t> </a:t>
-            </a:r>
-            <a:r>
-              <a:rPr sz="1700" b="1" dirty="0" err="1">
-                <a:solidFill>
-                  <a:srgbClr val="000000"/>
-                </a:solidFill>
-                <a:latin typeface="Exo 2"/>
-              </a:rPr>
-              <a:t>удержания</a:t>
-            </a:r>
-            <a:r>
-              <a:rPr sz="1700" b="1" dirty="0">
-                <a:solidFill>
-                  <a:srgbClr val="000000"/>
-                </a:solidFill>
-                <a:latin typeface="Exo 2"/>
-              </a:rPr>
-              <a:t>: </a:t>
-            </a:r>
-            <a:r>
-              <a:rPr sz="1700" b="0" dirty="0" err="1">
-                <a:solidFill>
-                  <a:srgbClr val="000000"/>
-                </a:solidFill>
-                <a:latin typeface="Inter"/>
-              </a:rPr>
-              <a:t>от</a:t>
-            </a:r>
-            <a:r>
-              <a:rPr sz="1700" b="0" dirty="0">
-                <a:solidFill>
-                  <a:srgbClr val="000000"/>
-                </a:solidFill>
-                <a:latin typeface="Inter"/>
-              </a:rPr>
-              <a:t> </a:t>
-            </a:r>
-            <a:r>
-              <a:rPr sz="1700" b="0" dirty="0" err="1">
-                <a:solidFill>
-                  <a:srgbClr val="000000"/>
-                </a:solidFill>
-                <a:latin typeface="Inter"/>
-              </a:rPr>
-              <a:t>нехватки</a:t>
-            </a:r>
-            <a:r>
-              <a:rPr sz="1700" b="0" dirty="0">
-                <a:solidFill>
-                  <a:srgbClr val="000000"/>
-                </a:solidFill>
-                <a:latin typeface="Inter"/>
-              </a:rPr>
-              <a:t> </a:t>
-            </a:r>
-            <a:r>
-              <a:rPr sz="1700" b="0" dirty="0" err="1">
-                <a:solidFill>
-                  <a:srgbClr val="000000"/>
-                </a:solidFill>
-                <a:latin typeface="Inter"/>
-              </a:rPr>
-              <a:t>денег</a:t>
-            </a:r>
-            <a:r>
-              <a:rPr sz="1700" b="0" dirty="0">
-                <a:solidFill>
-                  <a:srgbClr val="000000"/>
-                </a:solidFill>
-                <a:latin typeface="Inter"/>
-              </a:rPr>
-              <a:t> </a:t>
-            </a:r>
-            <a:r>
-              <a:rPr sz="1700" b="0" dirty="0" err="1">
-                <a:solidFill>
-                  <a:srgbClr val="000000"/>
-                </a:solidFill>
-                <a:latin typeface="Inter"/>
-              </a:rPr>
-              <a:t>до</a:t>
-            </a:r>
-            <a:r>
-              <a:rPr sz="1700" b="0" dirty="0">
-                <a:solidFill>
-                  <a:srgbClr val="000000"/>
-                </a:solidFill>
-                <a:latin typeface="Inter"/>
-              </a:rPr>
-              <a:t> </a:t>
-            </a:r>
-            <a:r>
-              <a:rPr sz="1700" b="0" dirty="0" err="1">
-                <a:solidFill>
-                  <a:srgbClr val="000000"/>
-                </a:solidFill>
-                <a:latin typeface="Inter"/>
-              </a:rPr>
-              <a:t>зависшей</a:t>
-            </a:r>
-            <a:r>
-              <a:rPr sz="1700" b="0" dirty="0">
-                <a:solidFill>
-                  <a:srgbClr val="000000"/>
-                </a:solidFill>
-                <a:latin typeface="Inter"/>
-              </a:rPr>
-              <a:t> </a:t>
-            </a:r>
-            <a:r>
-              <a:rPr sz="1700" b="0" dirty="0" err="1">
-                <a:solidFill>
-                  <a:srgbClr val="000000"/>
-                </a:solidFill>
-                <a:latin typeface="Inter"/>
-              </a:rPr>
-              <a:t>оплаты</a:t>
-            </a:r>
-            <a:r>
-              <a:rPr sz="1700" b="0" dirty="0">
-                <a:solidFill>
-                  <a:srgbClr val="000000"/>
-                </a:solidFill>
-                <a:latin typeface="Inter"/>
-              </a:rPr>
-              <a:t> и </a:t>
-            </a:r>
-            <a:r>
-              <a:rPr sz="1700" b="0" dirty="0" err="1">
-                <a:solidFill>
-                  <a:srgbClr val="000000"/>
-                </a:solidFill>
-                <a:latin typeface="Inter"/>
-              </a:rPr>
-              <a:t>блокировки</a:t>
-            </a:r>
-            <a:r>
-              <a:rPr sz="1700" b="0" dirty="0">
-                <a:solidFill>
-                  <a:srgbClr val="000000"/>
-                </a:solidFill>
-                <a:latin typeface="Inter"/>
-              </a:rPr>
-              <a:t>.</a:t>
-            </a:r>
-          </a:p>
-          <a:p>
-            <a:pPr marL="320040" indent="-320040">
-              <a:lnSpc>
-                <a:spcPct val="125000"/>
-              </a:lnSpc>
-              <a:spcAft>
-                <a:spcPts val="1600"/>
-              </a:spcAft>
-            </a:pPr>
-            <a:r>
-              <a:rPr sz="1700" b="1" dirty="0">
-                <a:solidFill>
-                  <a:srgbClr val="4CC6F1"/>
-                </a:solidFill>
-                <a:latin typeface="Exo 2"/>
-              </a:rPr>
-              <a:t>—  </a:t>
-            </a:r>
-            <a:r>
-              <a:rPr sz="1700" b="1" dirty="0" err="1">
-                <a:solidFill>
-                  <a:srgbClr val="000000"/>
-                </a:solidFill>
-                <a:latin typeface="Exo 2"/>
-              </a:rPr>
-              <a:t>Умная</a:t>
-            </a:r>
-            <a:r>
-              <a:rPr sz="1700" b="1" dirty="0">
-                <a:solidFill>
-                  <a:srgbClr val="000000"/>
-                </a:solidFill>
-                <a:latin typeface="Exo 2"/>
-              </a:rPr>
-              <a:t> </a:t>
-            </a:r>
-            <a:r>
-              <a:rPr sz="1700" b="1" dirty="0" err="1">
-                <a:solidFill>
-                  <a:srgbClr val="000000"/>
-                </a:solidFill>
-                <a:latin typeface="Exo 2"/>
-              </a:rPr>
-              <a:t>автоподстановка</a:t>
-            </a:r>
-            <a:r>
-              <a:rPr sz="1700" b="1" dirty="0">
-                <a:solidFill>
-                  <a:srgbClr val="000000"/>
-                </a:solidFill>
-                <a:latin typeface="Exo 2"/>
-              </a:rPr>
-              <a:t>: </a:t>
-            </a:r>
-            <a:r>
-              <a:rPr sz="1700" b="0" dirty="0">
-                <a:solidFill>
-                  <a:srgbClr val="000000"/>
-                </a:solidFill>
-                <a:latin typeface="Inter"/>
-              </a:rPr>
-              <a:t>в </a:t>
-            </a:r>
-            <a:r>
-              <a:rPr sz="1700" b="0" dirty="0" err="1">
-                <a:solidFill>
-                  <a:srgbClr val="000000"/>
-                </a:solidFill>
-                <a:latin typeface="Inter"/>
-              </a:rPr>
-              <a:t>письмо</a:t>
-            </a:r>
-            <a:r>
-              <a:rPr sz="1700" b="0" dirty="0">
-                <a:solidFill>
-                  <a:srgbClr val="000000"/>
-                </a:solidFill>
-                <a:latin typeface="Inter"/>
-              </a:rPr>
-              <a:t> </a:t>
-            </a:r>
-            <a:r>
-              <a:rPr sz="1700" b="0" dirty="0" err="1">
-                <a:solidFill>
-                  <a:srgbClr val="000000"/>
-                </a:solidFill>
-                <a:latin typeface="Inter"/>
-              </a:rPr>
-              <a:t>подставляются</a:t>
-            </a:r>
-            <a:r>
-              <a:rPr sz="1700" b="0" dirty="0">
-                <a:solidFill>
-                  <a:srgbClr val="000000"/>
-                </a:solidFill>
-                <a:latin typeface="Inter"/>
-              </a:rPr>
-              <a:t> </a:t>
-            </a:r>
-            <a:r>
-              <a:rPr sz="1700" b="0" dirty="0" err="1">
-                <a:solidFill>
-                  <a:srgbClr val="000000"/>
-                </a:solidFill>
-                <a:latin typeface="Inter"/>
-              </a:rPr>
-              <a:t>имя</a:t>
-            </a:r>
-            <a:r>
-              <a:rPr sz="1700" b="0" dirty="0">
-                <a:solidFill>
-                  <a:srgbClr val="000000"/>
-                </a:solidFill>
-                <a:latin typeface="Inter"/>
-              </a:rPr>
-              <a:t>, </a:t>
-            </a:r>
-            <a:r>
-              <a:rPr sz="1700" b="0" dirty="0" err="1">
-                <a:solidFill>
-                  <a:srgbClr val="000000"/>
-                </a:solidFill>
-                <a:latin typeface="Inter"/>
-              </a:rPr>
-              <a:t>название</a:t>
-            </a:r>
-            <a:r>
-              <a:rPr sz="1700" b="0" dirty="0">
-                <a:solidFill>
-                  <a:srgbClr val="000000"/>
-                </a:solidFill>
-                <a:latin typeface="Inter"/>
-              </a:rPr>
-              <a:t> </a:t>
-            </a:r>
-            <a:r>
-              <a:rPr sz="1700" b="0" dirty="0" err="1">
-                <a:solidFill>
-                  <a:srgbClr val="000000"/>
-                </a:solidFill>
-                <a:latin typeface="Inter"/>
-              </a:rPr>
-              <a:t>сервера</a:t>
-            </a:r>
-            <a:r>
-              <a:rPr sz="1700" b="0" dirty="0">
-                <a:solidFill>
-                  <a:srgbClr val="000000"/>
-                </a:solidFill>
-                <a:latin typeface="Inter"/>
-              </a:rPr>
-              <a:t>, </a:t>
-            </a:r>
-            <a:r>
-              <a:rPr sz="1700" b="0" dirty="0" err="1">
-                <a:solidFill>
-                  <a:srgbClr val="000000"/>
-                </a:solidFill>
-                <a:latin typeface="Inter"/>
-              </a:rPr>
-              <a:t>сумма</a:t>
-            </a:r>
-            <a:r>
-              <a:rPr sz="1700" b="0" dirty="0">
-                <a:solidFill>
-                  <a:srgbClr val="000000"/>
-                </a:solidFill>
-                <a:latin typeface="Inter"/>
-              </a:rPr>
-              <a:t> </a:t>
-            </a:r>
-            <a:r>
-              <a:rPr sz="1700" b="0" dirty="0" err="1">
-                <a:solidFill>
-                  <a:srgbClr val="000000"/>
-                </a:solidFill>
-                <a:latin typeface="Inter"/>
-              </a:rPr>
-              <a:t>доплаты</a:t>
-            </a:r>
-            <a:r>
-              <a:rPr sz="1700" b="0" dirty="0">
-                <a:solidFill>
-                  <a:srgbClr val="000000"/>
-                </a:solidFill>
-                <a:latin typeface="Inter"/>
-              </a:rPr>
-              <a:t> и </a:t>
-            </a:r>
-            <a:r>
-              <a:rPr sz="1700" b="0" dirty="0" err="1">
-                <a:solidFill>
-                  <a:srgbClr val="000000"/>
-                </a:solidFill>
-                <a:latin typeface="Inter"/>
-              </a:rPr>
-              <a:t>промокод</a:t>
-            </a:r>
-            <a:r>
-              <a:rPr sz="1700" b="0" dirty="0">
-                <a:solidFill>
-                  <a:srgbClr val="000000"/>
-                </a:solidFill>
-                <a:latin typeface="Inter"/>
-              </a:rPr>
-              <a:t>.</a:t>
-            </a:r>
-          </a:p>
-          <a:p>
-            <a:pPr marL="320040" indent="-320040">
-              <a:lnSpc>
-                <a:spcPct val="125000"/>
-              </a:lnSpc>
-              <a:spcAft>
-                <a:spcPts val="1600"/>
-              </a:spcAft>
-            </a:pPr>
-            <a:r>
-              <a:rPr sz="1700" b="1" dirty="0">
-                <a:solidFill>
-                  <a:srgbClr val="4CC6F1"/>
-                </a:solidFill>
-                <a:latin typeface="Exo 2"/>
-              </a:rPr>
-              <a:t>—  </a:t>
-            </a:r>
-            <a:r>
-              <a:rPr sz="1700" b="1" dirty="0">
-                <a:solidFill>
-                  <a:srgbClr val="000000"/>
-                </a:solidFill>
-                <a:latin typeface="Exo 2"/>
-              </a:rPr>
-              <a:t>Мгновенное </a:t>
-            </a:r>
-            <a:r>
-              <a:rPr sz="1700" b="1" dirty="0" err="1">
-                <a:solidFill>
-                  <a:srgbClr val="000000"/>
-                </a:solidFill>
-                <a:latin typeface="Exo 2"/>
-              </a:rPr>
-              <a:t>действие</a:t>
-            </a:r>
-            <a:r>
-              <a:rPr sz="1700" b="1" dirty="0">
-                <a:solidFill>
-                  <a:srgbClr val="000000"/>
-                </a:solidFill>
-                <a:latin typeface="Exo 2"/>
-              </a:rPr>
-              <a:t>: </a:t>
-            </a:r>
-            <a:r>
-              <a:rPr sz="1700" b="0" dirty="0" err="1">
-                <a:solidFill>
-                  <a:srgbClr val="000000"/>
-                </a:solidFill>
-                <a:latin typeface="Inter"/>
-              </a:rPr>
-              <a:t>копирование</a:t>
-            </a:r>
-            <a:r>
-              <a:rPr sz="1700" b="0" dirty="0">
-                <a:solidFill>
-                  <a:srgbClr val="000000"/>
-                </a:solidFill>
-                <a:latin typeface="Inter"/>
-              </a:rPr>
-              <a:t> </a:t>
-            </a:r>
-            <a:r>
-              <a:rPr sz="1700" b="0" dirty="0" err="1">
-                <a:solidFill>
-                  <a:srgbClr val="000000"/>
-                </a:solidFill>
-                <a:latin typeface="Inter"/>
-              </a:rPr>
-              <a:t>текста</a:t>
-            </a:r>
-            <a:r>
-              <a:rPr sz="1700" b="0" dirty="0">
-                <a:solidFill>
-                  <a:srgbClr val="000000"/>
-                </a:solidFill>
-                <a:latin typeface="Inter"/>
-              </a:rPr>
-              <a:t> в </a:t>
-            </a:r>
-            <a:r>
-              <a:rPr sz="1700" b="0" dirty="0" err="1">
-                <a:solidFill>
-                  <a:srgbClr val="000000"/>
-                </a:solidFill>
-                <a:latin typeface="Inter"/>
-              </a:rPr>
-              <a:t>один</a:t>
-            </a:r>
-            <a:r>
-              <a:rPr sz="1700" b="0" dirty="0">
-                <a:solidFill>
-                  <a:srgbClr val="000000"/>
-                </a:solidFill>
-                <a:latin typeface="Inter"/>
-              </a:rPr>
-              <a:t> </a:t>
-            </a:r>
-            <a:r>
-              <a:rPr sz="1700" b="0" dirty="0" err="1">
-                <a:solidFill>
-                  <a:srgbClr val="000000"/>
-                </a:solidFill>
-                <a:latin typeface="Inter"/>
-              </a:rPr>
-              <a:t>клик</a:t>
-            </a:r>
-            <a:r>
-              <a:rPr sz="1700" b="0" dirty="0">
-                <a:solidFill>
-                  <a:srgbClr val="000000"/>
-                </a:solidFill>
-                <a:latin typeface="Inter"/>
-              </a:rPr>
-              <a:t> </a:t>
-            </a:r>
-            <a:r>
-              <a:rPr sz="1700" b="0" dirty="0" err="1">
-                <a:solidFill>
-                  <a:srgbClr val="000000"/>
-                </a:solidFill>
-                <a:latin typeface="Inter"/>
-              </a:rPr>
-              <a:t>или</a:t>
-            </a:r>
-            <a:r>
-              <a:rPr sz="1700" b="0" dirty="0">
-                <a:solidFill>
-                  <a:srgbClr val="000000"/>
-                </a:solidFill>
-                <a:latin typeface="Inter"/>
-              </a:rPr>
-              <a:t> </a:t>
-            </a:r>
-            <a:r>
-              <a:rPr sz="1700" b="0" dirty="0" err="1">
-                <a:solidFill>
-                  <a:srgbClr val="000000"/>
-                </a:solidFill>
-                <a:latin typeface="Inter"/>
-              </a:rPr>
-              <a:t>прямая</a:t>
-            </a:r>
-            <a:r>
-              <a:rPr sz="1700" b="0" dirty="0">
-                <a:solidFill>
-                  <a:srgbClr val="000000"/>
-                </a:solidFill>
-                <a:latin typeface="Inter"/>
-              </a:rPr>
-              <a:t> </a:t>
-            </a:r>
-            <a:r>
-              <a:rPr sz="1700" b="0" dirty="0" err="1">
-                <a:solidFill>
-                  <a:srgbClr val="000000"/>
-                </a:solidFill>
-                <a:latin typeface="Inter"/>
-              </a:rPr>
-              <a:t>ссылка</a:t>
-            </a:r>
-            <a:r>
-              <a:rPr sz="1700" b="0" dirty="0">
-                <a:solidFill>
-                  <a:srgbClr val="000000"/>
-                </a:solidFill>
-                <a:latin typeface="Inter"/>
-              </a:rPr>
-              <a:t> mailto: </a:t>
-            </a:r>
-            <a:r>
-              <a:rPr sz="1700" b="0" dirty="0" err="1">
-                <a:solidFill>
-                  <a:srgbClr val="000000"/>
-                </a:solidFill>
-                <a:latin typeface="Inter"/>
-              </a:rPr>
-              <a:t>для</a:t>
-            </a:r>
-            <a:r>
-              <a:rPr sz="1700" b="0" dirty="0">
-                <a:solidFill>
-                  <a:srgbClr val="000000"/>
-                </a:solidFill>
-                <a:latin typeface="Inter"/>
-              </a:rPr>
-              <a:t> </a:t>
-            </a:r>
-            <a:r>
-              <a:rPr sz="1700" b="0" dirty="0" err="1">
-                <a:solidFill>
-                  <a:srgbClr val="000000"/>
-                </a:solidFill>
-                <a:latin typeface="Inter"/>
-              </a:rPr>
-              <a:t>отправки</a:t>
-            </a:r>
-            <a:r>
-              <a:rPr sz="1700" b="0" dirty="0">
-                <a:solidFill>
-                  <a:srgbClr val="000000"/>
-                </a:solidFill>
-                <a:latin typeface="Inter"/>
-              </a:rPr>
-              <a:t>.</a:t>
-            </a:r>
-          </a:p>
-        </p:txBody>
-      </p:sp>
-      <p:pic>
-        <p:nvPicPr>
-          <p:cNvPr id="11" name="Picture 10" descr="email-crop.png"/>
-          <p:cNvPicPr>
-            <a:picLocks noChangeAspect="1"/>
-          </p:cNvPicPr>
-          <p:nvPr/>
-        </p:nvPicPr>
-        <p:blipFill>
-          <a:blip r:embed="rId4"/>
-          <a:stretch>
-            <a:fillRect/>
-          </a:stretch>
-        </p:blipFill>
-        <p:spPr>
-          <a:xfrm>
-            <a:off x="7178040" y="474835"/>
+            <a:off x="7178040" y="2011680"/>
             <a:ext cx="4206240" cy="5633357"/>
           </a:xfrm>
           <a:prstGeom prst="rect">
@@ -7377,7 +6851,7 @@
 </file>
 
 <file path=ppt/slides/slide5.xml><?xml version="1.0" encoding="utf-8"?>
-<p:sld xmlns:a="http://schemas.openxmlformats.org/drawingml/2006/main" xmlns:r="http://schemas.openxmlformats.org/officeDocument/2006/relationships" xmlns:p="http://schemas.openxmlformats.org/presentationml/2006/main">
+<p:sld xmlns:a="http://schemas.openxmlformats.org/drawingml/2006/main" xmlns:p="http://schemas.openxmlformats.org/presentationml/2006/main" xmlns:r="http://schemas.openxmlformats.org/officeDocument/2006/relationships">
   <p:cSld>
     <p:bg>
       <p:bgPr>
@@ -7393,14 +6867,7 @@
         <p:cNvGrpSpPr/>
         <p:nvPr/>
       </p:nvGrpSpPr>
-      <p:grpSpPr>
-        <a:xfrm>
-          <a:off x="0" y="0"/>
-          <a:ext cx="0" cy="0"/>
-          <a:chOff x="0" y="0"/>
-          <a:chExt cx="0" cy="0"/>
-        </a:xfrm>
-      </p:grpSpPr>
+      <p:grpSpPr/>
       <p:sp>
         <p:nvSpPr>
           <p:cNvPr id="2" name="Rectangle 1"/>
@@ -7442,7 +6909,6 @@
           <a:lstStyle/>
           <a:p>
             <a:pPr algn="ctr"/>
-            <a:endParaRPr/>
           </a:p>
         </p:txBody>
       </p:sp>
@@ -7487,7 +6953,6 @@
           <a:lstStyle/>
           <a:p>
             <a:pPr algn="ctr"/>
-            <a:endParaRPr/>
           </a:p>
         </p:txBody>
       </p:sp>
@@ -7500,7 +6965,7 @@
           <p:nvPr/>
         </p:nvPicPr>
         <p:blipFill>
-          <a:blip r:embed="rId3"/>
+          <a:blip r:embed="rId2"/>
           <a:stretch>
             <a:fillRect/>
           </a:stretch>
@@ -7532,7 +6997,7 @@
           <a:noFill/>
         </p:spPr>
         <p:txBody>
-          <a:bodyPr wrap="square" lIns="0" tIns="0" rIns="0" bIns="0">
+          <a:bodyPr wrap="square" lIns="0" rIns="0" tIns="0" bIns="0">
             <a:spAutoFit/>
           </a:bodyPr>
           <a:lstStyle/>
@@ -7574,7 +7039,7 @@
           <a:noFill/>
         </p:spPr>
         <p:txBody>
-          <a:bodyPr wrap="square" lIns="0" tIns="0" rIns="0" bIns="0">
+          <a:bodyPr wrap="square" lIns="0" rIns="0" tIns="0" bIns="0">
             <a:spAutoFit/>
           </a:bodyPr>
           <a:lstStyle/>
@@ -7594,7 +7059,7 @@
                 </a:solidFill>
                 <a:latin typeface="Exo 2"/>
               </a:rPr>
-              <a:t>05 / 07</a:t>
+              <a:t>05 / 08</a:t>
             </a:r>
           </a:p>
         </p:txBody>
@@ -7616,7 +7081,7 @@
           <a:noFill/>
         </p:spPr>
         <p:txBody>
-          <a:bodyPr wrap="square" lIns="0" tIns="0" rIns="0" bIns="0">
+          <a:bodyPr wrap="square" lIns="0" rIns="0" tIns="0" bIns="0">
             <a:spAutoFit/>
           </a:bodyPr>
           <a:lstStyle/>
@@ -7658,7 +7123,7 @@
           <a:noFill/>
         </p:spPr>
         <p:txBody>
-          <a:bodyPr wrap="square" lIns="0" tIns="0" rIns="0" bIns="0">
+          <a:bodyPr wrap="square" lIns="0" rIns="0" tIns="0" bIns="0">
             <a:spAutoFit/>
           </a:bodyPr>
           <a:lstStyle/>
@@ -7724,7 +7189,6 @@
           <a:lstStyle/>
           <a:p>
             <a:pPr algn="ctr"/>
-            <a:endParaRPr/>
           </a:p>
         </p:txBody>
       </p:sp>
@@ -7745,7 +7209,7 @@
           <a:noFill/>
         </p:spPr>
         <p:txBody>
-          <a:bodyPr wrap="square" lIns="0" tIns="0" rIns="0" bIns="0">
+          <a:bodyPr wrap="square" lIns="0" rIns="0" tIns="0" bIns="0">
             <a:spAutoFit/>
           </a:bodyPr>
           <a:lstStyle/>
@@ -7787,7 +7251,7 @@
           <a:noFill/>
         </p:spPr>
         <p:txBody>
-          <a:bodyPr wrap="square" lIns="0" tIns="0" rIns="0" bIns="0">
+          <a:bodyPr wrap="square" lIns="0" rIns="0" tIns="0" bIns="0">
             <a:spAutoFit/>
           </a:bodyPr>
           <a:lstStyle/>
@@ -7829,7 +7293,7 @@
           <a:noFill/>
         </p:spPr>
         <p:txBody>
-          <a:bodyPr wrap="square" lIns="0" tIns="0" rIns="0" bIns="0">
+          <a:bodyPr wrap="square" lIns="0" rIns="0" tIns="0" bIns="0">
             <a:spAutoFit/>
           </a:bodyPr>
           <a:lstStyle/>
@@ -7895,7 +7359,6 @@
           <a:lstStyle/>
           <a:p>
             <a:pPr algn="ctr"/>
-            <a:endParaRPr/>
           </a:p>
         </p:txBody>
       </p:sp>
@@ -7916,7 +7379,7 @@
           <a:noFill/>
         </p:spPr>
         <p:txBody>
-          <a:bodyPr wrap="square" lIns="0" tIns="0" rIns="0" bIns="0">
+          <a:bodyPr wrap="square" lIns="0" rIns="0" tIns="0" bIns="0">
             <a:spAutoFit/>
           </a:bodyPr>
           <a:lstStyle/>
@@ -7958,7 +7421,7 @@
           <a:noFill/>
         </p:spPr>
         <p:txBody>
-          <a:bodyPr wrap="square" lIns="0" tIns="0" rIns="0" bIns="0">
+          <a:bodyPr wrap="square" lIns="0" rIns="0" tIns="0" bIns="0">
             <a:spAutoFit/>
           </a:bodyPr>
           <a:lstStyle/>
@@ -8024,7 +7487,6 @@
           <a:lstStyle/>
           <a:p>
             <a:pPr algn="ctr"/>
-            <a:endParaRPr/>
           </a:p>
         </p:txBody>
       </p:sp>
@@ -8045,7 +7507,7 @@
           <a:noFill/>
         </p:spPr>
         <p:txBody>
-          <a:bodyPr wrap="square" lIns="0" tIns="0" rIns="0" bIns="0">
+          <a:bodyPr wrap="square" lIns="0" rIns="0" tIns="0" bIns="0">
             <a:spAutoFit/>
           </a:bodyPr>
           <a:lstStyle/>
@@ -8087,7 +7549,7 @@
           <a:noFill/>
         </p:spPr>
         <p:txBody>
-          <a:bodyPr wrap="square" lIns="0" tIns="0" rIns="0" bIns="0">
+          <a:bodyPr wrap="square" lIns="0" rIns="0" tIns="0" bIns="0">
             <a:spAutoFit/>
           </a:bodyPr>
           <a:lstStyle/>
@@ -8153,7 +7615,6 @@
           <a:lstStyle/>
           <a:p>
             <a:pPr algn="ctr"/>
-            <a:endParaRPr/>
           </a:p>
         </p:txBody>
       </p:sp>
@@ -8174,7 +7635,7 @@
           <a:noFill/>
         </p:spPr>
         <p:txBody>
-          <a:bodyPr wrap="square" lIns="0" tIns="0" rIns="0" bIns="0">
+          <a:bodyPr wrap="square" lIns="0" rIns="0" tIns="0" bIns="0">
             <a:spAutoFit/>
           </a:bodyPr>
           <a:lstStyle/>
@@ -8216,7 +7677,7 @@
           <a:noFill/>
         </p:spPr>
         <p:txBody>
-          <a:bodyPr wrap="square" lIns="0" tIns="0" rIns="0" bIns="0">
+          <a:bodyPr wrap="square" lIns="0" rIns="0" tIns="0" bIns="0">
             <a:spAutoFit/>
           </a:bodyPr>
           <a:lstStyle/>
@@ -8282,7 +7743,6 @@
           <a:lstStyle/>
           <a:p>
             <a:pPr algn="ctr"/>
-            <a:endParaRPr/>
           </a:p>
         </p:txBody>
       </p:sp>
@@ -8303,7 +7763,7 @@
           <a:noFill/>
         </p:spPr>
         <p:txBody>
-          <a:bodyPr wrap="square" lIns="0" tIns="0" rIns="0" bIns="0">
+          <a:bodyPr wrap="square" lIns="0" rIns="0" tIns="0" bIns="0">
             <a:spAutoFit/>
           </a:bodyPr>
           <a:lstStyle/>
@@ -8345,7 +7805,7 @@
           <a:noFill/>
         </p:spPr>
         <p:txBody>
-          <a:bodyPr wrap="square" lIns="0" tIns="0" rIns="0" bIns="0">
+          <a:bodyPr wrap="square" lIns="0" rIns="0" tIns="0" bIns="0">
             <a:spAutoFit/>
           </a:bodyPr>
           <a:lstStyle/>
@@ -8411,7 +7871,6 @@
           <a:lstStyle/>
           <a:p>
             <a:pPr algn="ctr"/>
-            <a:endParaRPr/>
           </a:p>
         </p:txBody>
       </p:sp>
@@ -8432,7 +7891,7 @@
           <a:noFill/>
         </p:spPr>
         <p:txBody>
-          <a:bodyPr wrap="square" lIns="0" tIns="0" rIns="0" bIns="0">
+          <a:bodyPr wrap="square" lIns="0" rIns="0" tIns="0" bIns="0">
             <a:spAutoFit/>
           </a:bodyPr>
           <a:lstStyle/>
@@ -8474,7 +7933,7 @@
           <a:noFill/>
         </p:spPr>
         <p:txBody>
-          <a:bodyPr wrap="square" lIns="0" tIns="0" rIns="0" bIns="0">
+          <a:bodyPr wrap="square" lIns="0" rIns="0" tIns="0" bIns="0">
             <a:spAutoFit/>
           </a:bodyPr>
           <a:lstStyle/>
@@ -8540,7 +7999,6 @@
           <a:lstStyle/>
           <a:p>
             <a:pPr algn="ctr"/>
-            <a:endParaRPr/>
           </a:p>
         </p:txBody>
       </p:sp>
@@ -8587,7 +8045,6 @@
           <a:lstStyle/>
           <a:p>
             <a:pPr algn="ctr"/>
-            <a:endParaRPr/>
           </a:p>
         </p:txBody>
       </p:sp>
@@ -8608,7 +8065,7 @@
           <a:noFill/>
         </p:spPr>
         <p:txBody>
-          <a:bodyPr wrap="square" lIns="0" tIns="0" rIns="0" bIns="0">
+          <a:bodyPr wrap="square" lIns="0" rIns="0" tIns="0" bIns="0">
             <a:spAutoFit/>
           </a:bodyPr>
           <a:lstStyle/>
@@ -8650,7 +8107,7 @@
           <a:noFill/>
         </p:spPr>
         <p:txBody>
-          <a:bodyPr wrap="square" lIns="0" tIns="0" rIns="0" bIns="0">
+          <a:bodyPr wrap="square" lIns="0" rIns="0" tIns="0" bIns="0">
             <a:spAutoFit/>
           </a:bodyPr>
           <a:lstStyle/>
@@ -8692,7 +8149,7 @@
           <a:noFill/>
         </p:spPr>
         <p:txBody>
-          <a:bodyPr wrap="square" lIns="0" tIns="0" rIns="0" bIns="0">
+          <a:bodyPr wrap="square" lIns="0" rIns="0" tIns="0" bIns="0">
             <a:spAutoFit/>
           </a:bodyPr>
           <a:lstStyle/>
@@ -8760,7 +8217,6 @@
           <a:lstStyle/>
           <a:p>
             <a:pPr algn="ctr"/>
-            <a:endParaRPr/>
           </a:p>
         </p:txBody>
       </p:sp>
@@ -8781,7 +8237,7 @@
           <a:noFill/>
         </p:spPr>
         <p:txBody>
-          <a:bodyPr wrap="square" lIns="0" tIns="0" rIns="0" bIns="0">
+          <a:bodyPr wrap="square" lIns="0" rIns="0" tIns="0" bIns="0">
             <a:spAutoFit/>
           </a:bodyPr>
           <a:lstStyle/>
@@ -8823,7 +8279,7 @@
           <a:noFill/>
         </p:spPr>
         <p:txBody>
-          <a:bodyPr wrap="square" lIns="0" tIns="0" rIns="0" bIns="0">
+          <a:bodyPr wrap="square" lIns="0" rIns="0" tIns="0" bIns="0">
             <a:spAutoFit/>
           </a:bodyPr>
           <a:lstStyle/>
@@ -8986,7 +8442,7 @@
 </file>
 
 <file path=ppt/slides/slide6.xml><?xml version="1.0" encoding="utf-8"?>
-<p:sld xmlns:a="http://schemas.openxmlformats.org/drawingml/2006/main" xmlns:r="http://schemas.openxmlformats.org/officeDocument/2006/relationships" xmlns:p="http://schemas.openxmlformats.org/presentationml/2006/main">
+<p:sld xmlns:a="http://schemas.openxmlformats.org/drawingml/2006/main" xmlns:p="http://schemas.openxmlformats.org/presentationml/2006/main" xmlns:r="http://schemas.openxmlformats.org/officeDocument/2006/relationships">
   <p:cSld>
     <p:bg>
       <p:bgPr>
@@ -9002,14 +8458,7 @@
         <p:cNvGrpSpPr/>
         <p:nvPr/>
       </p:nvGrpSpPr>
-      <p:grpSpPr>
-        <a:xfrm>
-          <a:off x="0" y="0"/>
-          <a:ext cx="0" cy="0"/>
-          <a:chOff x="0" y="0"/>
-          <a:chExt cx="0" cy="0"/>
-        </a:xfrm>
-      </p:grpSpPr>
+      <p:grpSpPr/>
       <p:sp>
         <p:nvSpPr>
           <p:cNvPr id="2" name="Rectangle 1"/>
@@ -9051,7 +8500,6 @@
           <a:lstStyle/>
           <a:p>
             <a:pPr algn="ctr"/>
-            <a:endParaRPr/>
           </a:p>
         </p:txBody>
       </p:sp>
@@ -9096,7 +8544,6 @@
           <a:lstStyle/>
           <a:p>
             <a:pPr algn="ctr"/>
-            <a:endParaRPr/>
           </a:p>
         </p:txBody>
       </p:sp>
@@ -9109,7 +8556,7 @@
           <p:nvPr/>
         </p:nvPicPr>
         <p:blipFill>
-          <a:blip r:embed="rId3"/>
+          <a:blip r:embed="rId2"/>
           <a:stretch>
             <a:fillRect/>
           </a:stretch>
@@ -9141,7 +8588,7 @@
           <a:noFill/>
         </p:spPr>
         <p:txBody>
-          <a:bodyPr wrap="square" lIns="0" tIns="0" rIns="0" bIns="0">
+          <a:bodyPr wrap="square" lIns="0" rIns="0" tIns="0" bIns="0">
             <a:spAutoFit/>
           </a:bodyPr>
           <a:lstStyle/>
@@ -9183,7 +8630,7 @@
           <a:noFill/>
         </p:spPr>
         <p:txBody>
-          <a:bodyPr wrap="square" lIns="0" tIns="0" rIns="0" bIns="0">
+          <a:bodyPr wrap="square" lIns="0" rIns="0" tIns="0" bIns="0">
             <a:spAutoFit/>
           </a:bodyPr>
           <a:lstStyle/>
@@ -9203,7 +8650,7 @@
                 </a:solidFill>
                 <a:latin typeface="Exo 2"/>
               </a:rPr>
-              <a:t>06 / 07</a:t>
+              <a:t>06 / 08</a:t>
             </a:r>
           </a:p>
         </p:txBody>
@@ -9225,7 +8672,7 @@
           <a:noFill/>
         </p:spPr>
         <p:txBody>
-          <a:bodyPr wrap="square" lIns="0" tIns="0" rIns="0" bIns="0">
+          <a:bodyPr wrap="square" lIns="0" rIns="0" tIns="0" bIns="0">
             <a:spAutoFit/>
           </a:bodyPr>
           <a:lstStyle/>
@@ -9267,7 +8714,7 @@
           <a:noFill/>
         </p:spPr>
         <p:txBody>
-          <a:bodyPr wrap="square" lIns="0" tIns="0" rIns="0" bIns="0">
+          <a:bodyPr wrap="square" lIns="0" rIns="0" tIns="0" bIns="0">
             <a:spAutoFit/>
           </a:bodyPr>
           <a:lstStyle/>
@@ -9333,7 +8780,6 @@
           <a:lstStyle/>
           <a:p>
             <a:pPr algn="ctr"/>
-            <a:endParaRPr/>
           </a:p>
         </p:txBody>
       </p:sp>
@@ -9380,7 +8826,6 @@
           <a:lstStyle/>
           <a:p>
             <a:pPr algn="ctr"/>
-            <a:endParaRPr/>
           </a:p>
         </p:txBody>
       </p:sp>
@@ -9401,7 +8846,7 @@
           <a:noFill/>
         </p:spPr>
         <p:txBody>
-          <a:bodyPr wrap="square" lIns="0" tIns="0" rIns="0" bIns="0">
+          <a:bodyPr wrap="square" lIns="0" rIns="0" tIns="0" bIns="0">
             <a:spAutoFit/>
           </a:bodyPr>
           <a:lstStyle/>
@@ -9443,7 +8888,7 @@
           <a:noFill/>
         </p:spPr>
         <p:txBody>
-          <a:bodyPr wrap="square" lIns="0" tIns="0" rIns="0" bIns="0">
+          <a:bodyPr wrap="square" lIns="0" rIns="0" tIns="0" bIns="0">
             <a:spAutoFit/>
           </a:bodyPr>
           <a:lstStyle/>
@@ -9530,7 +8975,6 @@
           <a:lstStyle/>
           <a:p>
             <a:pPr algn="ctr"/>
-            <a:endParaRPr/>
           </a:p>
         </p:txBody>
       </p:sp>
@@ -9551,7 +8995,7 @@
           <a:noFill/>
         </p:spPr>
         <p:txBody>
-          <a:bodyPr wrap="square" lIns="0" tIns="0" rIns="0" bIns="0">
+          <a:bodyPr wrap="square" lIns="0" rIns="0" tIns="0" bIns="0">
             <a:spAutoFit/>
           </a:bodyPr>
           <a:lstStyle/>
@@ -9593,7 +9037,7 @@
           <a:noFill/>
         </p:spPr>
         <p:txBody>
-          <a:bodyPr wrap="square" lIns="0" tIns="0" rIns="0" bIns="0">
+          <a:bodyPr wrap="square" lIns="0" rIns="0" tIns="0" bIns="0">
             <a:spAutoFit/>
           </a:bodyPr>
           <a:lstStyle/>
@@ -9680,7 +9124,6 @@
           <a:lstStyle/>
           <a:p>
             <a:pPr algn="ctr"/>
-            <a:endParaRPr/>
           </a:p>
         </p:txBody>
       </p:sp>
@@ -9701,7 +9144,7 @@
           <a:noFill/>
         </p:spPr>
         <p:txBody>
-          <a:bodyPr wrap="square" lIns="0" tIns="0" rIns="0" bIns="0">
+          <a:bodyPr wrap="square" lIns="0" rIns="0" tIns="0" bIns="0">
             <a:spAutoFit/>
           </a:bodyPr>
           <a:lstStyle/>
@@ -9743,7 +9186,7 @@
           <a:noFill/>
         </p:spPr>
         <p:txBody>
-          <a:bodyPr wrap="square" lIns="0" tIns="0" rIns="0" bIns="0">
+          <a:bodyPr wrap="square" lIns="0" rIns="0" tIns="0" bIns="0">
             <a:spAutoFit/>
           </a:bodyPr>
           <a:lstStyle/>
@@ -9830,7 +9273,6 @@
           <a:lstStyle/>
           <a:p>
             <a:pPr algn="ctr"/>
-            <a:endParaRPr/>
           </a:p>
         </p:txBody>
       </p:sp>
@@ -9851,7 +9293,7 @@
           <a:noFill/>
         </p:spPr>
         <p:txBody>
-          <a:bodyPr wrap="square" lIns="0" tIns="0" rIns="0" bIns="0">
+          <a:bodyPr wrap="square" lIns="0" rIns="0" tIns="0" bIns="0">
             <a:spAutoFit/>
           </a:bodyPr>
           <a:lstStyle/>
@@ -9893,7 +9335,7 @@
           <a:noFill/>
         </p:spPr>
         <p:txBody>
-          <a:bodyPr wrap="square" lIns="0" tIns="0" rIns="0" bIns="0">
+          <a:bodyPr wrap="square" lIns="0" rIns="0" tIns="0" bIns="0">
             <a:spAutoFit/>
           </a:bodyPr>
           <a:lstStyle/>
@@ -9954,7 +9396,7 @@
           <a:noFill/>
         </p:spPr>
         <p:txBody>
-          <a:bodyPr wrap="square" lIns="0" tIns="0" rIns="0" bIns="0">
+          <a:bodyPr wrap="square" lIns="0" rIns="0" tIns="0" bIns="0">
             <a:spAutoFit/>
           </a:bodyPr>
           <a:lstStyle/>
@@ -10117,7 +9559,7 @@
           <p:nvPr/>
         </p:nvPicPr>
         <p:blipFill>
-          <a:blip r:embed="rId4"/>
+          <a:blip r:embed="rId3"/>
           <a:stretch>
             <a:fillRect/>
           </a:stretch>
@@ -10146,7 +9588,7 @@
 </file>
 
 <file path=ppt/slides/slide7.xml><?xml version="1.0" encoding="utf-8"?>
-<p:sld xmlns:a="http://schemas.openxmlformats.org/drawingml/2006/main" xmlns:r="http://schemas.openxmlformats.org/officeDocument/2006/relationships" xmlns:p="http://schemas.openxmlformats.org/presentationml/2006/main">
+<p:sld xmlns:a="http://schemas.openxmlformats.org/drawingml/2006/main" xmlns:p="http://schemas.openxmlformats.org/presentationml/2006/main" xmlns:r="http://schemas.openxmlformats.org/officeDocument/2006/relationships">
   <p:cSld>
     <p:bg>
       <p:bgPr>
@@ -10162,14 +9604,7 @@
         <p:cNvGrpSpPr/>
         <p:nvPr/>
       </p:nvGrpSpPr>
-      <p:grpSpPr>
-        <a:xfrm>
-          <a:off x="0" y="0"/>
-          <a:ext cx="0" cy="0"/>
-          <a:chOff x="0" y="0"/>
-          <a:chExt cx="0" cy="0"/>
-        </a:xfrm>
-      </p:grpSpPr>
+      <p:grpSpPr/>
       <p:sp>
         <p:nvSpPr>
           <p:cNvPr id="2" name="Rectangle 1"/>
@@ -10211,7 +9646,6 @@
           <a:lstStyle/>
           <a:p>
             <a:pPr algn="ctr"/>
-            <a:endParaRPr/>
           </a:p>
         </p:txBody>
       </p:sp>
@@ -10256,7 +9690,6 @@
           <a:lstStyle/>
           <a:p>
             <a:pPr algn="ctr"/>
-            <a:endParaRPr/>
           </a:p>
         </p:txBody>
       </p:sp>
@@ -10269,7 +9702,7 @@
           <p:nvPr/>
         </p:nvPicPr>
         <p:blipFill>
-          <a:blip r:embed="rId3"/>
+          <a:blip r:embed="rId2"/>
           <a:stretch>
             <a:fillRect/>
           </a:stretch>
@@ -10301,7 +9734,7 @@
           <a:noFill/>
         </p:spPr>
         <p:txBody>
-          <a:bodyPr wrap="square" lIns="0" tIns="0" rIns="0" bIns="0">
+          <a:bodyPr wrap="square" lIns="0" rIns="0" tIns="0" bIns="0">
             <a:spAutoFit/>
           </a:bodyPr>
           <a:lstStyle/>
@@ -10343,7 +9776,7 @@
           <a:noFill/>
         </p:spPr>
         <p:txBody>
-          <a:bodyPr wrap="square" lIns="0" tIns="0" rIns="0" bIns="0">
+          <a:bodyPr wrap="square" lIns="0" rIns="0" tIns="0" bIns="0">
             <a:spAutoFit/>
           </a:bodyPr>
           <a:lstStyle/>
@@ -10363,7 +9796,7 @@
                 </a:solidFill>
                 <a:latin typeface="Exo 2"/>
               </a:rPr>
-              <a:t>07 / 07</a:t>
+              <a:t>07 / 08</a:t>
             </a:r>
           </a:p>
         </p:txBody>
@@ -10385,7 +9818,7 @@
           <a:noFill/>
         </p:spPr>
         <p:txBody>
-          <a:bodyPr wrap="square" lIns="0" tIns="0" rIns="0" bIns="0">
+          <a:bodyPr wrap="square" lIns="0" rIns="0" tIns="0" bIns="0">
             <a:spAutoFit/>
           </a:bodyPr>
           <a:lstStyle/>
@@ -10427,7 +9860,7 @@
           <a:noFill/>
         </p:spPr>
         <p:txBody>
-          <a:bodyPr wrap="square" lIns="0" tIns="0" rIns="0" bIns="0">
+          <a:bodyPr wrap="square" lIns="0" rIns="0" tIns="0" bIns="0">
             <a:spAutoFit/>
           </a:bodyPr>
           <a:lstStyle/>
@@ -10493,7 +9926,6 @@
           <a:lstStyle/>
           <a:p>
             <a:pPr algn="ctr"/>
-            <a:endParaRPr/>
           </a:p>
         </p:txBody>
       </p:sp>
@@ -10542,7 +9974,6 @@
           <a:lstStyle/>
           <a:p>
             <a:pPr algn="ctr"/>
-            <a:endParaRPr/>
           </a:p>
         </p:txBody>
       </p:sp>
@@ -10563,7 +9994,7 @@
           <a:noFill/>
         </p:spPr>
         <p:txBody>
-          <a:bodyPr wrap="square" lIns="0" tIns="0" rIns="0" bIns="0">
+          <a:bodyPr wrap="square" lIns="0" rIns="0" tIns="0" bIns="0">
             <a:spAutoFit/>
           </a:bodyPr>
           <a:lstStyle/>
@@ -10605,7 +10036,7 @@
           <a:noFill/>
         </p:spPr>
         <p:txBody>
-          <a:bodyPr wrap="square" lIns="0" tIns="0" rIns="0" bIns="0">
+          <a:bodyPr wrap="square" lIns="0" rIns="0" tIns="0" bIns="0">
             <a:spAutoFit/>
           </a:bodyPr>
           <a:lstStyle/>
@@ -10839,7 +10270,6 @@
           <a:lstStyle/>
           <a:p>
             <a:pPr algn="ctr"/>
-            <a:endParaRPr/>
           </a:p>
         </p:txBody>
       </p:sp>
@@ -10860,7 +10290,7 @@
           <a:noFill/>
         </p:spPr>
         <p:txBody>
-          <a:bodyPr wrap="square" lIns="0" tIns="0" rIns="0" bIns="0">
+          <a:bodyPr wrap="square" lIns="0" rIns="0" tIns="0" bIns="0">
             <a:spAutoFit/>
           </a:bodyPr>
           <a:lstStyle/>
@@ -10902,7 +10332,7 @@
           <a:noFill/>
         </p:spPr>
         <p:txBody>
-          <a:bodyPr wrap="square" lIns="0" tIns="0" rIns="0" bIns="0">
+          <a:bodyPr wrap="square" lIns="0" rIns="0" tIns="0" bIns="0">
             <a:spAutoFit/>
           </a:bodyPr>
           <a:lstStyle/>
@@ -10970,7 +10400,6 @@
           <a:lstStyle/>
           <a:p>
             <a:pPr algn="ctr"/>
-            <a:endParaRPr/>
           </a:p>
         </p:txBody>
       </p:sp>
@@ -10983,7 +10412,7 @@
           <p:nvPr/>
         </p:nvPicPr>
         <p:blipFill>
-          <a:blip r:embed="rId4"/>
+          <a:blip r:embed="rId3"/>
           <a:stretch>
             <a:fillRect/>
           </a:stretch>
@@ -11015,7 +10444,7 @@
           <a:noFill/>
         </p:spPr>
         <p:txBody>
-          <a:bodyPr wrap="square" lIns="0" tIns="0" rIns="0" bIns="0">
+          <a:bodyPr wrap="square" lIns="0" rIns="0" tIns="0" bIns="0">
             <a:spAutoFit/>
           </a:bodyPr>
           <a:lstStyle/>
@@ -11047,12 +10476,15 @@
                 <a:spcPts val="0"/>
               </a:spcAft>
             </a:pPr>
-            <a:endParaRPr sz="1050" b="1">
-              <a:solidFill>
-                <a:srgbClr val="FFFFFF"/>
-              </a:solidFill>
-              <a:latin typeface="Exo 2"/>
-            </a:endParaRPr>
+            <a:r>
+              <a:rPr sz="1050" b="1">
+                <a:solidFill>
+                  <a:srgbClr val="FFFFFF"/>
+                </a:solidFill>
+                <a:latin typeface="Exo 2"/>
+              </a:rPr>
+              <a:t/>
+            </a:r>
           </a:p>
           <a:p>
             <a:pPr algn="l">
@@ -11082,12 +10514,15 @@
                 <a:spcPts val="0"/>
               </a:spcAft>
             </a:pPr>
-            <a:endParaRPr sz="1050" b="1">
-              <a:solidFill>
-                <a:srgbClr val="FFFFFF"/>
-              </a:solidFill>
-              <a:latin typeface="Exo 2"/>
-            </a:endParaRPr>
+            <a:r>
+              <a:rPr sz="1050" b="1">
+                <a:solidFill>
+                  <a:srgbClr val="FFFFFF"/>
+                </a:solidFill>
+                <a:latin typeface="Exo 2"/>
+              </a:rPr>
+              <a:t/>
+            </a:r>
           </a:p>
           <a:p>
             <a:pPr algn="l">
@@ -11136,12 +10571,15 @@
                 <a:spcPts val="0"/>
               </a:spcAft>
             </a:pPr>
-            <a:endParaRPr sz="1050" b="1">
-              <a:solidFill>
-                <a:srgbClr val="FFFFFF"/>
-              </a:solidFill>
-              <a:latin typeface="Exo 2"/>
-            </a:endParaRPr>
+            <a:r>
+              <a:rPr sz="1050" b="1">
+                <a:solidFill>
+                  <a:srgbClr val="FFFFFF"/>
+                </a:solidFill>
+                <a:latin typeface="Exo 2"/>
+              </a:rPr>
+              <a:t/>
+            </a:r>
           </a:p>
           <a:p>
             <a:pPr algn="l">
@@ -11190,12 +10628,15 @@
                 <a:spcPts val="0"/>
               </a:spcAft>
             </a:pPr>
-            <a:endParaRPr sz="1050" b="1">
-              <a:solidFill>
-                <a:srgbClr val="FFFFFF"/>
-              </a:solidFill>
-              <a:latin typeface="Exo 2"/>
-            </a:endParaRPr>
+            <a:r>
+              <a:rPr sz="1050" b="1">
+                <a:solidFill>
+                  <a:srgbClr val="FFFFFF"/>
+                </a:solidFill>
+                <a:latin typeface="Exo 2"/>
+              </a:rPr>
+              <a:t/>
+            </a:r>
           </a:p>
           <a:p>
             <a:pPr algn="l">
@@ -11235,7 +10676,7 @@
           <a:noFill/>
         </p:spPr>
         <p:txBody>
-          <a:bodyPr wrap="square" lIns="0" tIns="0" rIns="0" bIns="0">
+          <a:bodyPr wrap="square" lIns="0" rIns="0" tIns="0" bIns="0">
             <a:spAutoFit/>
           </a:bodyPr>
           <a:lstStyle/>
@@ -11256,6 +10697,827 @@
                 <a:latin typeface="Exo 2"/>
               </a:rPr>
               <a:t>github.com/Demtory/Hack23.10.26</a:t>
+            </a:r>
+          </a:p>
+        </p:txBody>
+      </p:sp>
+    </p:spTree>
+  </p:cSld>
+  <p:clrMapOvr>
+    <a:masterClrMapping/>
+  </p:clrMapOvr>
+</p:sld>
+</file>
+
+<file path=ppt/slides/slide8.xml><?xml version="1.0" encoding="utf-8"?>
+<p:sld xmlns:a="http://schemas.openxmlformats.org/drawingml/2006/main" xmlns:p="http://schemas.openxmlformats.org/presentationml/2006/main" xmlns:r="http://schemas.openxmlformats.org/officeDocument/2006/relationships">
+  <p:cSld>
+    <p:bg>
+      <p:bgPr>
+        <a:solidFill>
+          <a:srgbClr val="F4F4F4"/>
+        </a:solidFill>
+        <a:effectLst/>
+      </p:bgPr>
+    </p:bg>
+    <p:spTree>
+      <p:nvGrpSpPr>
+        <p:cNvPr id="1" name=""/>
+        <p:cNvGrpSpPr/>
+        <p:nvPr/>
+      </p:nvGrpSpPr>
+      <p:grpSpPr/>
+      <p:sp>
+        <p:nvSpPr>
+          <p:cNvPr id="2" name="Rectangle 1"/>
+          <p:cNvSpPr/>
+          <p:nvPr/>
+        </p:nvSpPr>
+        <p:spPr>
+          <a:xfrm>
+            <a:off x="0" y="0"/>
+            <a:ext cx="12191695" cy="73152"/>
+          </a:xfrm>
+          <a:prstGeom prst="rect">
+            <a:avLst/>
+          </a:prstGeom>
+          <a:solidFill>
+            <a:srgbClr val="4CC6F1"/>
+          </a:solidFill>
+          <a:ln>
+            <a:noFill/>
+          </a:ln>
+          <a:effectLst/>
+        </p:spPr>
+        <p:style>
+          <a:lnRef idx="1">
+            <a:schemeClr val="accent1"/>
+          </a:lnRef>
+          <a:fillRef idx="3">
+            <a:schemeClr val="accent1"/>
+          </a:fillRef>
+          <a:effectRef idx="2">
+            <a:schemeClr val="accent1"/>
+          </a:effectRef>
+          <a:fontRef idx="minor">
+            <a:schemeClr val="lt1"/>
+          </a:fontRef>
+        </p:style>
+        <p:txBody>
+          <a:bodyPr rtlCol="0" anchor="ctr"/>
+          <a:lstStyle/>
+          <a:p>
+            <a:pPr algn="ctr"/>
+          </a:p>
+        </p:txBody>
+      </p:sp>
+      <p:sp>
+        <p:nvSpPr>
+          <p:cNvPr id="3" name="Rectangle 2"/>
+          <p:cNvSpPr/>
+          <p:nvPr/>
+        </p:nvSpPr>
+        <p:spPr>
+          <a:xfrm>
+            <a:off x="777240" y="6419088"/>
+            <a:ext cx="10637215" cy="13716"/>
+          </a:xfrm>
+          <a:prstGeom prst="rect">
+            <a:avLst/>
+          </a:prstGeom>
+          <a:solidFill>
+            <a:srgbClr val="DDE2EA"/>
+          </a:solidFill>
+          <a:ln>
+            <a:noFill/>
+          </a:ln>
+          <a:effectLst/>
+        </p:spPr>
+        <p:style>
+          <a:lnRef idx="1">
+            <a:schemeClr val="accent1"/>
+          </a:lnRef>
+          <a:fillRef idx="3">
+            <a:schemeClr val="accent1"/>
+          </a:fillRef>
+          <a:effectRef idx="2">
+            <a:schemeClr val="accent1"/>
+          </a:effectRef>
+          <a:fontRef idx="minor">
+            <a:schemeClr val="lt1"/>
+          </a:fontRef>
+        </p:style>
+        <p:txBody>
+          <a:bodyPr rtlCol="0" anchor="ctr"/>
+          <a:lstStyle/>
+          <a:p>
+            <a:pPr algn="ctr"/>
+          </a:p>
+        </p:txBody>
+      </p:sp>
+      <p:pic>
+        <p:nvPicPr>
+          <p:cNvPr id="4" name="Picture 3" descr="aeza-mark.png"/>
+          <p:cNvPicPr>
+            <a:picLocks noChangeAspect="1"/>
+          </p:cNvPicPr>
+          <p:nvPr/>
+        </p:nvPicPr>
+        <p:blipFill>
+          <a:blip r:embed="rId2"/>
+          <a:stretch>
+            <a:fillRect/>
+          </a:stretch>
+        </p:blipFill>
+        <p:spPr>
+          <a:xfrm>
+            <a:off x="777240" y="6455664"/>
+            <a:ext cx="201168" cy="64374"/>
+          </a:xfrm>
+          <a:prstGeom prst="rect">
+            <a:avLst/>
+          </a:prstGeom>
+        </p:spPr>
+      </p:pic>
+      <p:sp>
+        <p:nvSpPr>
+          <p:cNvPr id="5" name="TextBox 4"/>
+          <p:cNvSpPr txBox="1"/>
+          <p:nvPr/>
+        </p:nvSpPr>
+        <p:spPr>
+          <a:xfrm>
+            <a:off x="1069848" y="6473952"/>
+            <a:ext cx="5486400" cy="274320"/>
+          </a:xfrm>
+          <a:prstGeom prst="rect">
+            <a:avLst/>
+          </a:prstGeom>
+          <a:noFill/>
+        </p:spPr>
+        <p:txBody>
+          <a:bodyPr wrap="square" lIns="0" rIns="0" tIns="0" bIns="0">
+            <a:spAutoFit/>
+          </a:bodyPr>
+          <a:lstStyle/>
+          <a:p>
+            <a:pPr algn="l">
+              <a:lnSpc>
+                <a:spcPct val="115000"/>
+              </a:lnSpc>
+              <a:spcAft>
+                <a:spcPts val="0"/>
+              </a:spcAft>
+            </a:pPr>
+            <a:r>
+              <a:rPr sz="1000" b="1">
+                <a:solidFill>
+                  <a:srgbClr val="182D48"/>
+                </a:solidFill>
+                <a:latin typeface="Exo 2"/>
+              </a:rPr>
+              <a:t>AÉZA · ОТТОК · Risk Desk</a:t>
+            </a:r>
+          </a:p>
+        </p:txBody>
+      </p:sp>
+      <p:sp>
+        <p:nvSpPr>
+          <p:cNvPr id="6" name="TextBox 5"/>
+          <p:cNvSpPr txBox="1"/>
+          <p:nvPr/>
+        </p:nvSpPr>
+        <p:spPr>
+          <a:xfrm>
+            <a:off x="10682935" y="6473952"/>
+            <a:ext cx="731520" cy="274320"/>
+          </a:xfrm>
+          <a:prstGeom prst="rect">
+            <a:avLst/>
+          </a:prstGeom>
+          <a:noFill/>
+        </p:spPr>
+        <p:txBody>
+          <a:bodyPr wrap="square" lIns="0" rIns="0" tIns="0" bIns="0">
+            <a:spAutoFit/>
+          </a:bodyPr>
+          <a:lstStyle/>
+          <a:p>
+            <a:pPr algn="r">
+              <a:lnSpc>
+                <a:spcPct val="115000"/>
+              </a:lnSpc>
+              <a:spcAft>
+                <a:spcPts val="0"/>
+              </a:spcAft>
+            </a:pPr>
+            <a:r>
+              <a:rPr sz="1000" b="1">
+                <a:solidFill>
+                  <a:srgbClr val="182D48"/>
+                </a:solidFill>
+                <a:latin typeface="Exo 2"/>
+              </a:rPr>
+              <a:t>08 / 08</a:t>
+            </a:r>
+          </a:p>
+        </p:txBody>
+      </p:sp>
+      <p:sp>
+        <p:nvSpPr>
+          <p:cNvPr id="7" name="TextBox 6"/>
+          <p:cNvSpPr txBox="1"/>
+          <p:nvPr/>
+        </p:nvSpPr>
+        <p:spPr>
+          <a:xfrm>
+            <a:off x="777240" y="411480"/>
+            <a:ext cx="8229600" cy="274320"/>
+          </a:xfrm>
+          <a:prstGeom prst="rect">
+            <a:avLst/>
+          </a:prstGeom>
+          <a:noFill/>
+        </p:spPr>
+        <p:txBody>
+          <a:bodyPr wrap="square" lIns="0" rIns="0" tIns="0" bIns="0">
+            <a:spAutoFit/>
+          </a:bodyPr>
+          <a:lstStyle/>
+          <a:p>
+            <a:pPr algn="l">
+              <a:lnSpc>
+                <a:spcPct val="115000"/>
+              </a:lnSpc>
+              <a:spcAft>
+                <a:spcPts val="0"/>
+              </a:spcAft>
+            </a:pPr>
+            <a:r>
+              <a:rPr sz="1100" b="1">
+                <a:solidFill>
+                  <a:srgbClr val="182D48"/>
+                </a:solidFill>
+                <a:latin typeface="Exo 2"/>
+              </a:rPr>
+              <a:t>ДЕМО-СТЕНД</a:t>
+            </a:r>
+          </a:p>
+        </p:txBody>
+      </p:sp>
+      <p:sp>
+        <p:nvSpPr>
+          <p:cNvPr id="8" name="TextBox 7"/>
+          <p:cNvSpPr txBox="1"/>
+          <p:nvPr/>
+        </p:nvSpPr>
+        <p:spPr>
+          <a:xfrm>
+            <a:off x="777240" y="749808"/>
+            <a:ext cx="10607040" cy="868680"/>
+          </a:xfrm>
+          <a:prstGeom prst="rect">
+            <a:avLst/>
+          </a:prstGeom>
+          <a:noFill/>
+        </p:spPr>
+        <p:txBody>
+          <a:bodyPr wrap="square" lIns="0" rIns="0" tIns="0" bIns="0">
+            <a:spAutoFit/>
+          </a:bodyPr>
+          <a:lstStyle/>
+          <a:p>
+            <a:pPr algn="l">
+              <a:lnSpc>
+                <a:spcPct val="115000"/>
+              </a:lnSpc>
+              <a:spcAft>
+                <a:spcPts val="0"/>
+              </a:spcAft>
+            </a:pPr>
+            <a:r>
+              <a:rPr sz="3400" b="1">
+                <a:solidFill>
+                  <a:srgbClr val="000000"/>
+                </a:solidFill>
+                <a:latin typeface="Exo 2"/>
+              </a:rPr>
+              <a:t>ПАНЕЛЬ В ОДИН СКАН</a:t>
+            </a:r>
+          </a:p>
+        </p:txBody>
+      </p:sp>
+      <p:sp>
+        <p:nvSpPr>
+          <p:cNvPr id="9" name="Rectangle 8"/>
+          <p:cNvSpPr/>
+          <p:nvPr/>
+        </p:nvSpPr>
+        <p:spPr>
+          <a:xfrm>
+            <a:off x="777240" y="1645919"/>
+            <a:ext cx="1097280" cy="64008"/>
+          </a:xfrm>
+          <a:prstGeom prst="rect">
+            <a:avLst/>
+          </a:prstGeom>
+          <a:solidFill>
+            <a:srgbClr val="4CC6F1"/>
+          </a:solidFill>
+          <a:ln>
+            <a:noFill/>
+          </a:ln>
+          <a:effectLst/>
+        </p:spPr>
+        <p:style>
+          <a:lnRef idx="1">
+            <a:schemeClr val="accent1"/>
+          </a:lnRef>
+          <a:fillRef idx="3">
+            <a:schemeClr val="accent1"/>
+          </a:fillRef>
+          <a:effectRef idx="2">
+            <a:schemeClr val="accent1"/>
+          </a:effectRef>
+          <a:fontRef idx="minor">
+            <a:schemeClr val="lt1"/>
+          </a:fontRef>
+        </p:style>
+        <p:txBody>
+          <a:bodyPr rtlCol="0" anchor="ctr"/>
+          <a:lstStyle/>
+          <a:p>
+            <a:pPr algn="ctr"/>
+          </a:p>
+        </p:txBody>
+      </p:sp>
+      <p:sp>
+        <p:nvSpPr>
+          <p:cNvPr id="10" name="Rounded Rectangle 9"/>
+          <p:cNvSpPr/>
+          <p:nvPr/>
+        </p:nvSpPr>
+        <p:spPr>
+          <a:xfrm>
+            <a:off x="777240" y="2057400"/>
+            <a:ext cx="4754880" cy="4023360"/>
+          </a:xfrm>
+          <a:prstGeom prst="roundRect">
+            <a:avLst>
+              <a:gd name="adj" fmla="val 6000"/>
+            </a:avLst>
+          </a:prstGeom>
+          <a:solidFill>
+            <a:srgbClr val="FFFFFF"/>
+          </a:solidFill>
+          <a:ln w="19050">
+            <a:solidFill>
+              <a:srgbClr val="182D48"/>
+            </a:solidFill>
+          </a:ln>
+          <a:effectLst/>
+        </p:spPr>
+        <p:style>
+          <a:lnRef idx="1">
+            <a:schemeClr val="accent1"/>
+          </a:lnRef>
+          <a:fillRef idx="3">
+            <a:schemeClr val="accent1"/>
+          </a:fillRef>
+          <a:effectRef idx="2">
+            <a:schemeClr val="accent1"/>
+          </a:effectRef>
+          <a:fontRef idx="minor">
+            <a:schemeClr val="lt1"/>
+          </a:fontRef>
+        </p:style>
+        <p:txBody>
+          <a:bodyPr rtlCol="0" anchor="ctr"/>
+          <a:lstStyle/>
+          <a:p>
+            <a:pPr algn="ctr"/>
+          </a:p>
+        </p:txBody>
+      </p:sp>
+      <p:pic>
+        <p:nvPicPr>
+          <p:cNvPr id="11" name="Picture 10" descr="qr-demo.png"/>
+          <p:cNvPicPr>
+            <a:picLocks noChangeAspect="1"/>
+          </p:cNvPicPr>
+          <p:nvPr/>
+        </p:nvPicPr>
+        <p:blipFill>
+          <a:blip r:embed="rId3"/>
+          <a:stretch>
+            <a:fillRect/>
+          </a:stretch>
+        </p:blipFill>
+        <p:spPr>
+          <a:xfrm>
+            <a:off x="1280160" y="2286000"/>
+            <a:ext cx="3063240" cy="3063240"/>
+          </a:xfrm>
+          <a:prstGeom prst="rect">
+            <a:avLst/>
+          </a:prstGeom>
+        </p:spPr>
+      </p:pic>
+      <p:sp>
+        <p:nvSpPr>
+          <p:cNvPr id="12" name="TextBox 11"/>
+          <p:cNvSpPr txBox="1"/>
+          <p:nvPr/>
+        </p:nvSpPr>
+        <p:spPr>
+          <a:xfrm>
+            <a:off x="1143000" y="5440680"/>
+            <a:ext cx="4023360" cy="548640"/>
+          </a:xfrm>
+          <a:prstGeom prst="rect">
+            <a:avLst/>
+          </a:prstGeom>
+          <a:noFill/>
+        </p:spPr>
+        <p:txBody>
+          <a:bodyPr wrap="square" lIns="0" rIns="0" tIns="0" bIns="0">
+            <a:spAutoFit/>
+          </a:bodyPr>
+          <a:lstStyle/>
+          <a:p>
+            <a:pPr algn="l">
+              <a:lnSpc>
+                <a:spcPct val="115000"/>
+              </a:lnSpc>
+              <a:spcAft>
+                <a:spcPts val="0"/>
+              </a:spcAft>
+            </a:pPr>
+            <a:r>
+              <a:rPr sz="1200" b="0">
+                <a:solidFill>
+                  <a:srgbClr val="182D48"/>
+                </a:solidFill>
+                <a:latin typeface="Inter"/>
+              </a:rPr>
+              <a:t>Наведите камеру — панель откроется</a:t>
+            </a:r>
+          </a:p>
+          <a:p>
+            <a:pPr algn="l">
+              <a:lnSpc>
+                <a:spcPct val="115000"/>
+              </a:lnSpc>
+              <a:spcAft>
+                <a:spcPts val="0"/>
+              </a:spcAft>
+            </a:pPr>
+            <a:r>
+              <a:rPr sz="1200" b="0">
+                <a:solidFill>
+                  <a:srgbClr val="182D48"/>
+                </a:solidFill>
+                <a:latin typeface="Inter"/>
+              </a:rPr>
+              <a:t>сразу, без пароля</a:t>
+            </a:r>
+          </a:p>
+        </p:txBody>
+      </p:sp>
+      <p:sp>
+        <p:nvSpPr>
+          <p:cNvPr id="13" name="Rounded Rectangle 12"/>
+          <p:cNvSpPr/>
+          <p:nvPr/>
+        </p:nvSpPr>
+        <p:spPr>
+          <a:xfrm>
+            <a:off x="6126480" y="2057400"/>
+            <a:ext cx="5212080" cy="4023360"/>
+          </a:xfrm>
+          <a:prstGeom prst="roundRect">
+            <a:avLst>
+              <a:gd name="adj" fmla="val 6000"/>
+            </a:avLst>
+          </a:prstGeom>
+          <a:solidFill>
+            <a:srgbClr val="182D48"/>
+          </a:solidFill>
+          <a:ln>
+            <a:noFill/>
+          </a:ln>
+          <a:effectLst/>
+        </p:spPr>
+        <p:style>
+          <a:lnRef idx="1">
+            <a:schemeClr val="accent1"/>
+          </a:lnRef>
+          <a:fillRef idx="3">
+            <a:schemeClr val="accent1"/>
+          </a:fillRef>
+          <a:effectRef idx="2">
+            <a:schemeClr val="accent1"/>
+          </a:effectRef>
+          <a:fontRef idx="minor">
+            <a:schemeClr val="lt1"/>
+          </a:fontRef>
+        </p:style>
+        <p:txBody>
+          <a:bodyPr rtlCol="0" anchor="ctr"/>
+          <a:lstStyle/>
+          <a:p>
+            <a:pPr algn="ctr"/>
+          </a:p>
+        </p:txBody>
+      </p:sp>
+      <p:sp>
+        <p:nvSpPr>
+          <p:cNvPr id="14" name="TextBox 13"/>
+          <p:cNvSpPr txBox="1"/>
+          <p:nvPr/>
+        </p:nvSpPr>
+        <p:spPr>
+          <a:xfrm>
+            <a:off x="6400800" y="2286000"/>
+            <a:ext cx="4663440" cy="365760"/>
+          </a:xfrm>
+          <a:prstGeom prst="rect">
+            <a:avLst/>
+          </a:prstGeom>
+          <a:noFill/>
+        </p:spPr>
+        <p:txBody>
+          <a:bodyPr wrap="square" lIns="0" rIns="0" tIns="0" bIns="0">
+            <a:spAutoFit/>
+          </a:bodyPr>
+          <a:lstStyle/>
+          <a:p>
+            <a:pPr algn="l">
+              <a:lnSpc>
+                <a:spcPct val="115000"/>
+              </a:lnSpc>
+              <a:spcAft>
+                <a:spcPts val="0"/>
+              </a:spcAft>
+            </a:pPr>
+            <a:r>
+              <a:rPr sz="1400" b="1">
+                <a:solidFill>
+                  <a:srgbClr val="4CC6F1"/>
+                </a:solidFill>
+                <a:latin typeface="Exo 2"/>
+              </a:rPr>
+              <a:t>ЧТО ПРОВЕРИТЬ ЗА 60 СЕКУНД</a:t>
+            </a:r>
+          </a:p>
+        </p:txBody>
+      </p:sp>
+      <p:sp>
+        <p:nvSpPr>
+          <p:cNvPr id="15" name="TextBox 14"/>
+          <p:cNvSpPr txBox="1"/>
+          <p:nvPr/>
+        </p:nvSpPr>
+        <p:spPr>
+          <a:xfrm>
+            <a:off x="6400800" y="2697480"/>
+            <a:ext cx="4663440" cy="3108960"/>
+          </a:xfrm>
+          <a:prstGeom prst="rect">
+            <a:avLst/>
+          </a:prstGeom>
+          <a:noFill/>
+        </p:spPr>
+        <p:txBody>
+          <a:bodyPr wrap="square" lIns="0" rIns="0" tIns="0" bIns="0">
+            <a:spAutoFit/>
+          </a:bodyPr>
+          <a:lstStyle/>
+          <a:p>
+            <a:pPr marL="320040" indent="-320040">
+              <a:lnSpc>
+                <a:spcPct val="125000"/>
+              </a:lnSpc>
+              <a:spcAft>
+                <a:spcPts val="900"/>
+              </a:spcAft>
+            </a:pPr>
+            <a:r>
+              <a:rPr sz="1250" b="1">
+                <a:solidFill>
+                  <a:srgbClr val="4CC6F1"/>
+                </a:solidFill>
+                <a:latin typeface="Exo 2"/>
+              </a:rPr>
+              <a:t>—  </a:t>
+            </a:r>
+            <a:r>
+              <a:rPr sz="1250" b="1">
+                <a:solidFill>
+                  <a:srgbClr val="FFFFFF"/>
+                </a:solidFill>
+                <a:latin typeface="Exo 2"/>
+              </a:rPr>
+              <a:t>Сводка: </a:t>
+            </a:r>
+            <a:r>
+              <a:rPr sz="1250" b="0">
+                <a:solidFill>
+                  <a:srgbClr val="FFFFFF"/>
+                </a:solidFill>
+                <a:latin typeface="Inter"/>
+              </a:rPr>
+              <a:t>16,87 € потерь, 43,91 € под риском, 3 из 10 — высокий.</a:t>
+            </a:r>
+          </a:p>
+          <a:p>
+            <a:pPr marL="320040" indent="-320040">
+              <a:lnSpc>
+                <a:spcPct val="125000"/>
+              </a:lnSpc>
+              <a:spcAft>
+                <a:spcPts val="900"/>
+              </a:spcAft>
+            </a:pPr>
+            <a:r>
+              <a:rPr sz="1250" b="1">
+                <a:solidFill>
+                  <a:srgbClr val="4CC6F1"/>
+                </a:solidFill>
+                <a:latin typeface="Exo 2"/>
+              </a:rPr>
+              <a:t>—  </a:t>
+            </a:r>
+            <a:r>
+              <a:rPr sz="1250" b="1">
+                <a:solidFill>
+                  <a:srgbClr val="FFFFFF"/>
+                </a:solidFill>
+                <a:latin typeface="Exo 2"/>
+              </a:rPr>
+              <a:t>Прогноз: </a:t>
+            </a:r>
+            <a:r>
+              <a:rPr sz="1250" b="0">
+                <a:solidFill>
+                  <a:srgbClr val="FFFFFF"/>
+                </a:solidFill>
+                <a:latin typeface="Inter"/>
+              </a:rPr>
+              <a:t>6 истёкших услуг, 1,7 ожидаемых непродлений, 6,88 €.</a:t>
+            </a:r>
+          </a:p>
+          <a:p>
+            <a:pPr marL="320040" indent="-320040">
+              <a:lnSpc>
+                <a:spcPct val="125000"/>
+              </a:lnSpc>
+              <a:spcAft>
+                <a:spcPts val="900"/>
+              </a:spcAft>
+            </a:pPr>
+            <a:r>
+              <a:rPr sz="1250" b="1">
+                <a:solidFill>
+                  <a:srgbClr val="4CC6F1"/>
+                </a:solidFill>
+                <a:latin typeface="Exo 2"/>
+              </a:rPr>
+              <a:t>—  </a:t>
+            </a:r>
+            <a:r>
+              <a:rPr sz="1250" b="1">
+                <a:solidFill>
+                  <a:srgbClr val="FFFFFF"/>
+                </a:solidFill>
+                <a:latin typeface="Exo 2"/>
+              </a:rPr>
+              <a:t>Клиент 6: </a:t>
+            </a:r>
+            <a:r>
+              <a:rPr sz="1250" b="0">
+                <a:solidFill>
+                  <a:srgbClr val="FFFFFF"/>
+                </a:solidFill>
+                <a:latin typeface="Inter"/>
+              </a:rPr>
+              <a:t>причины, деньги, готовое письмо маркетолога.</a:t>
+            </a:r>
+          </a:p>
+          <a:p>
+            <a:pPr marL="320040" indent="-320040">
+              <a:lnSpc>
+                <a:spcPct val="125000"/>
+              </a:lnSpc>
+              <a:spcAft>
+                <a:spcPts val="900"/>
+              </a:spcAft>
+            </a:pPr>
+            <a:r>
+              <a:rPr sz="1250" b="1">
+                <a:solidFill>
+                  <a:srgbClr val="4CC6F1"/>
+                </a:solidFill>
+                <a:latin typeface="Exo 2"/>
+              </a:rPr>
+              <a:t>—  </a:t>
+            </a:r>
+            <a:r>
+              <a:rPr sz="1250" b="1">
+                <a:solidFill>
+                  <a:srgbClr val="FFFFFF"/>
+                </a:solidFill>
+                <a:latin typeface="Exo 2"/>
+              </a:rPr>
+              <a:t>Настройки: </a:t>
+            </a:r>
+            <a:r>
+              <a:rPr sz="1250" b="0">
+                <a:solidFill>
+                  <a:srgbClr val="FFFFFF"/>
+                </a:solidFill>
+                <a:latin typeface="Inter"/>
+              </a:rPr>
+              <a:t>пресет «Деньги важнее» → 89 → 95 без перезагрузки.</a:t>
+            </a:r>
+          </a:p>
+          <a:p>
+            <a:pPr marL="320040" indent="-320040">
+              <a:lnSpc>
+                <a:spcPct val="125000"/>
+              </a:lnSpc>
+              <a:spcAft>
+                <a:spcPts val="900"/>
+              </a:spcAft>
+            </a:pPr>
+            <a:r>
+              <a:rPr sz="1250" b="1">
+                <a:solidFill>
+                  <a:srgbClr val="4CC6F1"/>
+                </a:solidFill>
+                <a:latin typeface="Exo 2"/>
+              </a:rPr>
+              <a:t>—  </a:t>
+            </a:r>
+            <a:r>
+              <a:rPr sz="1250" b="1">
+                <a:solidFill>
+                  <a:srgbClr val="FFFFFF"/>
+                </a:solidFill>
+                <a:latin typeface="Exo 2"/>
+              </a:rPr>
+              <a:t>SSO: </a:t>
+            </a:r>
+            <a:r>
+              <a:rPr sz="1250" b="0">
+                <a:solidFill>
+                  <a:srgbClr val="FFFFFF"/>
+                </a:solidFill>
+                <a:latin typeface="Inter"/>
+              </a:rPr>
+              <a:t>кнопка Keycloak, marketer@example.test.</a:t>
+            </a:r>
+          </a:p>
+        </p:txBody>
+      </p:sp>
+      <p:sp>
+        <p:nvSpPr>
+          <p:cNvPr id="16" name="TextBox 15"/>
+          <p:cNvSpPr txBox="1"/>
+          <p:nvPr/>
+        </p:nvSpPr>
+        <p:spPr>
+          <a:xfrm>
+            <a:off x="6400800" y="5440680"/>
+            <a:ext cx="4663440" cy="457200"/>
+          </a:xfrm>
+          <a:prstGeom prst="rect">
+            <a:avLst/>
+          </a:prstGeom>
+          <a:noFill/>
+        </p:spPr>
+        <p:txBody>
+          <a:bodyPr wrap="square" lIns="0" rIns="0" tIns="0" bIns="0">
+            <a:spAutoFit/>
+          </a:bodyPr>
+          <a:lstStyle/>
+          <a:p>
+            <a:pPr algn="l">
+              <a:lnSpc>
+                <a:spcPct val="115000"/>
+              </a:lnSpc>
+              <a:spcAft>
+                <a:spcPts val="0"/>
+              </a:spcAft>
+            </a:pPr>
+            <a:r>
+              <a:rPr sz="1000" b="0">
+                <a:solidFill>
+                  <a:srgbClr val="FFFFFF"/>
+                </a:solidFill>
+                <a:latin typeface="Inter"/>
+              </a:rPr>
+              <a:t>Без QR: 193.233.246.179:8000 · admin@example.test / admin123</a:t>
             </a:r>
           </a:p>
         </p:txBody>
@@ -11599,44 +11861,44 @@
         <a:sysClr val="window" lastClr="FFFFFF"/>
       </a:lt1>
       <a:dk2>
-        <a:srgbClr val="0E2841"/>
+        <a:srgbClr val="1F497D"/>
       </a:dk2>
       <a:lt2>
-        <a:srgbClr val="E8E8E8"/>
+        <a:srgbClr val="EEECE1"/>
       </a:lt2>
       <a:accent1>
-        <a:srgbClr val="156082"/>
+        <a:srgbClr val="4F81BD"/>
       </a:accent1>
       <a:accent2>
-        <a:srgbClr val="E97132"/>
+        <a:srgbClr val="C0504D"/>
       </a:accent2>
       <a:accent3>
-        <a:srgbClr val="196B24"/>
+        <a:srgbClr val="9BBB59"/>
       </a:accent3>
       <a:accent4>
-        <a:srgbClr val="0F9ED5"/>
+        <a:srgbClr val="8064A2"/>
       </a:accent4>
       <a:accent5>
-        <a:srgbClr val="A02B93"/>
+        <a:srgbClr val="4BACC6"/>
       </a:accent5>
       <a:accent6>
-        <a:srgbClr val="4EA72E"/>
+        <a:srgbClr val="F79646"/>
       </a:accent6>
       <a:hlink>
-        <a:srgbClr val="467886"/>
+        <a:srgbClr val="0000FF"/>
       </a:hlink>
       <a:folHlink>
-        <a:srgbClr val="96607D"/>
+        <a:srgbClr val="800080"/>
       </a:folHlink>
     </a:clrScheme>
     <a:fontScheme name="Office">
       <a:majorFont>
-        <a:latin typeface="Aptos Display" panose="02110004020202020204"/>
+        <a:latin typeface="Calibri"/>
         <a:ea typeface=""/>
         <a:cs typeface=""/>
-        <a:font script="Jpan" typeface="游ゴシック Light"/>
+        <a:font script="Jpan" typeface="ＭＳ Ｐゴシック"/>
         <a:font script="Hang" typeface="맑은 고딕"/>
-        <a:font script="Hans" typeface="等线 Light"/>
+        <a:font script="Hans" typeface="宋体"/>
         <a:font script="Hant" typeface="新細明體"/>
         <a:font script="Arab" typeface="Times New Roman"/>
         <a:font script="Hebr" typeface="Times New Roman"/>
@@ -11664,31 +11926,14 @@
         <a:font script="Viet" typeface="Times New Roman"/>
         <a:font script="Uigh" typeface="Microsoft Uighur"/>
         <a:font script="Geor" typeface="Sylfaen"/>
-        <a:font script="Armn" typeface="Arial"/>
-        <a:font script="Bugi" typeface="Leelawadee UI"/>
-        <a:font script="Bopo" typeface="Microsoft JhengHei"/>
-        <a:font script="Java" typeface="Javanese Text"/>
-        <a:font script="Lisu" typeface="Segoe UI"/>
-        <a:font script="Mymr" typeface="Myanmar Text"/>
-        <a:font script="Nkoo" typeface="Ebrima"/>
-        <a:font script="Olck" typeface="Nirmala UI"/>
-        <a:font script="Osma" typeface="Ebrima"/>
-        <a:font script="Phag" typeface="Phagspa"/>
-        <a:font script="Syrn" typeface="Estrangelo Edessa"/>
-        <a:font script="Syrj" typeface="Estrangelo Edessa"/>
-        <a:font script="Syre" typeface="Estrangelo Edessa"/>
-        <a:font script="Sora" typeface="Nirmala UI"/>
-        <a:font script="Tale" typeface="Microsoft Tai Le"/>
-        <a:font script="Talu" typeface="Microsoft New Tai Lue"/>
-        <a:font script="Tfng" typeface="Ebrima"/>
       </a:majorFont>
       <a:minorFont>
-        <a:latin typeface="Aptos" panose="02110004020202020204"/>
+        <a:latin typeface="Calibri"/>
         <a:ea typeface=""/>
         <a:cs typeface=""/>
-        <a:font script="Jpan" typeface="游ゴシック"/>
+        <a:font script="Jpan" typeface="ＭＳ Ｐゴシック"/>
         <a:font script="Hang" typeface="맑은 고딕"/>
-        <a:font script="Hans" typeface="等线"/>
+        <a:font script="Hans" typeface="宋体"/>
         <a:font script="Hant" typeface="新細明體"/>
         <a:font script="Arab" typeface="Arial"/>
         <a:font script="Hebr" typeface="Arial"/>
@@ -11716,23 +11961,6 @@
         <a:font script="Viet" typeface="Arial"/>
         <a:font script="Uigh" typeface="Microsoft Uighur"/>
         <a:font script="Geor" typeface="Sylfaen"/>
-        <a:font script="Armn" typeface="Arial"/>
-        <a:font script="Bugi" typeface="Leelawadee UI"/>
-        <a:font script="Bopo" typeface="Microsoft JhengHei"/>
-        <a:font script="Java" typeface="Javanese Text"/>
-        <a:font script="Lisu" typeface="Segoe UI"/>
-        <a:font script="Mymr" typeface="Myanmar Text"/>
-        <a:font script="Nkoo" typeface="Ebrima"/>
-        <a:font script="Olck" typeface="Nirmala UI"/>
-        <a:font script="Osma" typeface="Ebrima"/>
-        <a:font script="Phag" typeface="Phagspa"/>
-        <a:font script="Syrn" typeface="Estrangelo Edessa"/>
-        <a:font script="Syrj" typeface="Estrangelo Edessa"/>
-        <a:font script="Syre" typeface="Estrangelo Edessa"/>
-        <a:font script="Sora" typeface="Nirmala UI"/>
-        <a:font script="Tale" typeface="Microsoft Tai Le"/>
-        <a:font script="Talu" typeface="Microsoft New Tai Lue"/>
-        <a:font script="Tfng" typeface="Ebrima"/>
       </a:minorFont>
     </a:fontScheme>
     <a:fmtScheme name="Office">
@@ -11744,136 +11972,180 @@
           <a:gsLst>
             <a:gs pos="0">
               <a:schemeClr val="phClr">
-                <a:lumMod val="110000"/>
-                <a:satMod val="105000"/>
-                <a:tint val="67000"/>
+                <a:tint val="50000"/>
+                <a:satMod val="300000"/>
               </a:schemeClr>
             </a:gs>
-            <a:gs pos="50000">
+            <a:gs pos="35000">
               <a:schemeClr val="phClr">
-                <a:lumMod val="105000"/>
-                <a:satMod val="103000"/>
-                <a:tint val="73000"/>
+                <a:tint val="37000"/>
+                <a:satMod val="300000"/>
               </a:schemeClr>
             </a:gs>
             <a:gs pos="100000">
               <a:schemeClr val="phClr">
-                <a:lumMod val="105000"/>
-                <a:satMod val="109000"/>
-                <a:tint val="81000"/>
+                <a:tint val="15000"/>
+                <a:satMod val="350000"/>
               </a:schemeClr>
             </a:gs>
           </a:gsLst>
-          <a:lin ang="5400000" scaled="0"/>
+          <a:lin ang="16200000" scaled="1"/>
         </a:gradFill>
         <a:gradFill rotWithShape="1">
           <a:gsLst>
             <a:gs pos="0">
               <a:schemeClr val="phClr">
-                <a:satMod val="103000"/>
-                <a:lumMod val="102000"/>
-                <a:tint val="94000"/>
-              </a:schemeClr>
-            </a:gs>
-            <a:gs pos="50000">
-              <a:schemeClr val="phClr">
-                <a:satMod val="110000"/>
-                <a:lumMod val="100000"/>
+                <a:tint val="100000"/>
                 <a:shade val="100000"/>
+                <a:satMod val="130000"/>
               </a:schemeClr>
             </a:gs>
             <a:gs pos="100000">
               <a:schemeClr val="phClr">
-                <a:lumMod val="99000"/>
-                <a:satMod val="120000"/>
-                <a:shade val="78000"/>
+                <a:tint val="50000"/>
+                <a:shade val="100000"/>
+                <a:satMod val="350000"/>
               </a:schemeClr>
             </a:gs>
           </a:gsLst>
-          <a:lin ang="5400000" scaled="0"/>
+          <a:lin ang="16200000" scaled="0"/>
         </a:gradFill>
       </a:fillStyleLst>
       <a:lnStyleLst>
-        <a:ln w="12700" cap="flat" cmpd="sng" algn="ctr">
+        <a:ln w="9525" cap="flat" cmpd="sng" algn="ctr">
           <a:solidFill>
-            <a:schemeClr val="phClr"/>
+            <a:schemeClr val="phClr">
+              <a:shade val="95000"/>
+              <a:satMod val="105000"/>
+            </a:schemeClr>
           </a:solidFill>
           <a:prstDash val="solid"/>
-          <a:miter lim="800000"/>
-        </a:ln>
-        <a:ln w="19050" cap="flat" cmpd="sng" algn="ctr">
-          <a:solidFill>
-            <a:schemeClr val="phClr"/>
-          </a:solidFill>
-          <a:prstDash val="solid"/>
-          <a:miter lim="800000"/>
         </a:ln>
         <a:ln w="25400" cap="flat" cmpd="sng" algn="ctr">
           <a:solidFill>
             <a:schemeClr val="phClr"/>
           </a:solidFill>
           <a:prstDash val="solid"/>
-          <a:miter lim="800000"/>
+        </a:ln>
+        <a:ln w="38100" cap="flat" cmpd="sng" algn="ctr">
+          <a:solidFill>
+            <a:schemeClr val="phClr"/>
+          </a:solidFill>
+          <a:prstDash val="solid"/>
         </a:ln>
       </a:lnStyleLst>
       <a:effectStyleLst>
         <a:effectStyle>
-          <a:effectLst/>
-        </a:effectStyle>
-        <a:effectStyle>
-          <a:effectLst/>
+          <a:effectLst>
+            <a:outerShdw blurRad="40000" dist="20000" dir="5400000" rotWithShape="0">
+              <a:srgbClr val="000000">
+                <a:alpha val="38000"/>
+              </a:srgbClr>
+            </a:outerShdw>
+          </a:effectLst>
         </a:effectStyle>
         <a:effectStyle>
           <a:effectLst>
-            <a:outerShdw blurRad="57150" dist="19050" dir="5400000" algn="ctr" rotWithShape="0">
+            <a:outerShdw blurRad="40000" dist="23000" dir="5400000" rotWithShape="0">
               <a:srgbClr val="000000">
-                <a:alpha val="63000"/>
+                <a:alpha val="35000"/>
               </a:srgbClr>
             </a:outerShdw>
           </a:effectLst>
+        </a:effectStyle>
+        <a:effectStyle>
+          <a:effectLst>
+            <a:outerShdw blurRad="40000" dist="23000" dir="5400000" rotWithShape="0">
+              <a:srgbClr val="000000">
+                <a:alpha val="35000"/>
+              </a:srgbClr>
+            </a:outerShdw>
+          </a:effectLst>
+          <a:scene3d>
+            <a:camera prst="orthographicFront">
+              <a:rot lat="0" lon="0" rev="0"/>
+            </a:camera>
+            <a:lightRig rig="threePt" dir="t">
+              <a:rot lat="0" lon="0" rev="1200000"/>
+            </a:lightRig>
+          </a:scene3d>
+          <a:sp3d>
+            <a:bevelT w="63500" h="25400"/>
+          </a:sp3d>
         </a:effectStyle>
       </a:effectStyleLst>
       <a:bgFillStyleLst>
         <a:solidFill>
           <a:schemeClr val="phClr"/>
         </a:solidFill>
-        <a:solidFill>
-          <a:schemeClr val="phClr">
-            <a:tint val="95000"/>
-            <a:satMod val="170000"/>
-          </a:schemeClr>
-        </a:solidFill>
         <a:gradFill rotWithShape="1">
           <a:gsLst>
             <a:gs pos="0">
               <a:schemeClr val="phClr">
-                <a:tint val="93000"/>
-                <a:satMod val="150000"/>
-                <a:shade val="98000"/>
-                <a:lumMod val="102000"/>
+                <a:tint val="40000"/>
+                <a:satMod val="350000"/>
               </a:schemeClr>
             </a:gs>
-            <a:gs pos="50000">
+            <a:gs pos="40000">
               <a:schemeClr val="phClr">
-                <a:tint val="98000"/>
-                <a:satMod val="130000"/>
-                <a:shade val="90000"/>
-                <a:lumMod val="103000"/>
+                <a:tint val="45000"/>
+                <a:shade val="99000"/>
+                <a:satMod val="350000"/>
               </a:schemeClr>
             </a:gs>
             <a:gs pos="100000">
               <a:schemeClr val="phClr">
-                <a:shade val="63000"/>
-                <a:satMod val="120000"/>
+                <a:shade val="20000"/>
+                <a:satMod val="255000"/>
               </a:schemeClr>
             </a:gs>
           </a:gsLst>
-          <a:lin ang="5400000" scaled="0"/>
+          <a:path path="circle">
+            <a:fillToRect l="50000" t="-80000" r="50000" b="180000"/>
+          </a:path>
+        </a:gradFill>
+        <a:gradFill rotWithShape="1">
+          <a:gsLst>
+            <a:gs pos="0">
+              <a:schemeClr val="phClr">
+                <a:tint val="80000"/>
+                <a:satMod val="300000"/>
+              </a:schemeClr>
+            </a:gs>
+            <a:gs pos="100000">
+              <a:schemeClr val="phClr">
+                <a:shade val="30000"/>
+                <a:satMod val="200000"/>
+              </a:schemeClr>
+            </a:gs>
+          </a:gsLst>
+          <a:path path="circle">
+            <a:fillToRect l="50000" t="50000" r="50000" b="50000"/>
+          </a:path>
         </a:gradFill>
       </a:bgFillStyleLst>
     </a:fmtScheme>
   </a:themeElements>
   <a:objectDefaults>
+    <a:spDef>
+      <a:spPr/>
+      <a:bodyPr/>
+      <a:lstStyle/>
+      <a:style>
+        <a:lnRef idx="1">
+          <a:schemeClr val="accent1"/>
+        </a:lnRef>
+        <a:fillRef idx="3">
+          <a:schemeClr val="accent1"/>
+        </a:fillRef>
+        <a:effectRef idx="2">
+          <a:schemeClr val="accent1"/>
+        </a:effectRef>
+        <a:fontRef idx="minor">
+          <a:schemeClr val="lt1"/>
+        </a:fontRef>
+      </a:style>
+    </a:spDef>
     <a:lnDef>
       <a:spPr/>
       <a:bodyPr/>
@@ -11895,10 +12167,5 @@
     </a:lnDef>
   </a:objectDefaults>
   <a:extraClrSchemeLst/>
-  <a:extLst>
-    <a:ext uri="{05A4C25C-085E-4340-85A3-A5531E510DB2}">
-      <thm15:themeFamily xmlns:thm15="http://schemas.microsoft.com/office/thememl/2012/main" name="Office Theme" id="{2E142A2C-CD16-42D6-873A-C26D2A0506FA}" vid="{1BDDFF52-6CD6-40A5-AB3C-68EB2F1E4D0A}"/>
-    </a:ext>
-  </a:extLst>
 </a:theme>
 </file>